--- a/test_set/ppt/共圆中国梦（思政课）.pptx
+++ b/test_set/ppt/共圆中国梦（思政课）.pptx
@@ -3,14 +3,13 @@
 <p:presentation xmlns:a="http://schemas.openxmlformats.org/drawingml/2006/main" xmlns:r="http://schemas.openxmlformats.org/officeDocument/2006/relationships" xmlns:p="http://schemas.openxmlformats.org/presentationml/2006/main" embedTrueTypeFonts="1" saveSubsetFonts="1">
   <p:sldMasterIdLst>
     <p:sldMasterId id="2147483648" r:id="rId1"/>
-    <p:sldMasterId id="2147483666" r:id="rId2"/>
-    <p:sldMasterId id="2147483668" r:id="rId3"/>
+    <p:sldMasterId id="2147483666" r:id="rId3"/>
   </p:sldMasterIdLst>
   <p:notesMasterIdLst>
-    <p:notesMasterId r:id="rId24"/>
+    <p:notesMasterId r:id="rId12"/>
   </p:notesMasterIdLst>
   <p:handoutMasterIdLst>
-    <p:handoutMasterId r:id="rId25"/>
+    <p:handoutMasterId r:id="rId24"/>
   </p:handoutMasterIdLst>
   <p:sldIdLst>
     <p:sldId id="551" r:id="rId4"/>
@@ -21,57 +20,51 @@
     <p:sldId id="535" r:id="rId9"/>
     <p:sldId id="579" r:id="rId10"/>
     <p:sldId id="580" r:id="rId11"/>
-    <p:sldId id="598" r:id="rId12"/>
-    <p:sldId id="596" r:id="rId13"/>
-    <p:sldId id="572" r:id="rId14"/>
-    <p:sldId id="364" r:id="rId15"/>
-    <p:sldId id="590" r:id="rId16"/>
-    <p:sldId id="542" r:id="rId17"/>
-    <p:sldId id="571" r:id="rId18"/>
-    <p:sldId id="539" r:id="rId19"/>
-    <p:sldId id="569" r:id="rId20"/>
-    <p:sldId id="599" r:id="rId21"/>
-    <p:sldId id="567" r:id="rId22"/>
-    <p:sldId id="600" r:id="rId23"/>
+    <p:sldId id="598" r:id="rId13"/>
+    <p:sldId id="596" r:id="rId14"/>
+    <p:sldId id="572" r:id="rId15"/>
+    <p:sldId id="364" r:id="rId16"/>
+    <p:sldId id="590" r:id="rId17"/>
+    <p:sldId id="542" r:id="rId18"/>
+    <p:sldId id="571" r:id="rId19"/>
+    <p:sldId id="539" r:id="rId20"/>
+    <p:sldId id="569" r:id="rId21"/>
+    <p:sldId id="599" r:id="rId22"/>
+    <p:sldId id="567" r:id="rId23"/>
   </p:sldIdLst>
   <p:sldSz cx="9144000" cy="5143500" type="screen16x9"/>
   <p:notesSz cx="6858000" cy="9144000"/>
   <p:embeddedFontLst>
     <p:embeddedFont>
-      <p:font typeface="微软雅黑" pitchFamily="34" charset="-122"/>
-      <p:regular r:id="rId26"/>
-      <p:bold r:id="rId27"/>
-    </p:embeddedFont>
-    <p:embeddedFont>
-      <p:font typeface="汉仪颜楷简" charset="-122"/>
-      <p:regular r:id="rId28"/>
-    </p:embeddedFont>
-    <p:embeddedFont>
-      <p:font typeface="楷体" pitchFamily="49" charset="-122"/>
+      <p:font typeface="微软雅黑" panose="020B0503020204020204" pitchFamily="34" charset="-122"/>
       <p:regular r:id="rId29"/>
     </p:embeddedFont>
     <p:embeddedFont>
-      <p:font typeface="Wingdings 3" pitchFamily="18" charset="2"/>
+      <p:font typeface="黑体" panose="02010609060101010101" pitchFamily="49" charset="-122"/>
       <p:regular r:id="rId30"/>
     </p:embeddedFont>
     <p:embeddedFont>
-      <p:font typeface="Calibri" pitchFamily="34" charset="0"/>
+      <p:font typeface="Calibri" panose="020F0502020204030204"/>
       <p:regular r:id="rId31"/>
       <p:bold r:id="rId32"/>
       <p:italic r:id="rId33"/>
       <p:boldItalic r:id="rId34"/>
     </p:embeddedFont>
     <p:embeddedFont>
-      <p:font typeface="黑体" pitchFamily="49" charset="-122"/>
+      <p:font typeface="楷体" panose="02010609060101010101" pitchFamily="49" charset="-122"/>
       <p:regular r:id="rId35"/>
     </p:embeddedFont>
     <p:embeddedFont>
-      <p:font typeface="Impact" pitchFamily="34" charset="0"/>
+      <p:font typeface="Wingdings 3" panose="05040102010807070707" charset="0"/>
       <p:regular r:id="rId36"/>
+    </p:embeddedFont>
+    <p:embeddedFont>
+      <p:font typeface="汉仪颜楷简" panose="02010600030101010101" charset="-122"/>
+      <p:regular r:id="rId37"/>
     </p:embeddedFont>
   </p:embeddedFontLst>
   <p:custDataLst>
-    <p:tags r:id="rId37"/>
+    <p:tags r:id="rId38"/>
   </p:custDataLst>
   <p:defaultTextStyle>
     <a:defPPr>
@@ -205,7 +198,7 @@
   </p:defaultTextStyle>
   <p:extLst>
     <p:ext uri="{EFAFB233-063F-42B5-8137-9DF3F51BA10A}">
-      <p15:sldGuideLst xmlns:p15="http://schemas.microsoft.com/office/powerpoint/2012/main" xmlns="">
+      <p15:sldGuideLst xmlns:p15="http://schemas.microsoft.com/office/powerpoint/2012/main">
         <p15:guide id="1" orient="horz" pos="1620" userDrawn="1">
           <p15:clr>
             <a:srgbClr val="A4A3A4"/>
@@ -448,7 +441,6 @@
               <a:rPr lang="zh-CN" altLang="en-US">
                 <a:ea typeface="黑体" panose="02010609060101010101" pitchFamily="49" charset="-122"/>
               </a:rPr>
-              <a:t>‹#›</a:t>
             </a:fld>
             <a:endParaRPr lang="zh-CN" altLang="en-US" dirty="0">
               <a:ea typeface="黑体" panose="02010609060101010101" pitchFamily="49" charset="-122"/>
@@ -457,11 +449,6 @@
         </p:txBody>
       </p:sp>
     </p:spTree>
-    <p:extLst>
-      <p:ext uri="{BB962C8B-B14F-4D97-AF65-F5344CB8AC3E}">
-        <p14:creationId xmlns:p14="http://schemas.microsoft.com/office/powerpoint/2010/main" val="707944902"/>
-      </p:ext>
-    </p:extLst>
   </p:cSld>
   <p:clrMap bg1="lt1" tx1="dk1" bg2="lt2" tx2="dk2" accent1="accent1" accent2="accent2" accent3="accent3" accent4="accent4" accent5="accent5" accent6="accent6" hlink="hlink" folHlink="folHlink"/>
 </p:handoutMaster>
@@ -632,6 +619,7 @@
               <a:rPr lang="zh-CN" altLang="en-US" noProof="0" dirty="0"/>
               <a:t>单击此处编辑母版文本样式</a:t>
             </a:r>
+            <a:endParaRPr lang="zh-CN" altLang="en-US" noProof="0" dirty="0"/>
           </a:p>
           <a:p>
             <a:pPr lvl="1"/>
@@ -639,6 +627,7 @@
               <a:rPr lang="zh-CN" altLang="en-US" noProof="0" dirty="0"/>
               <a:t>第二级</a:t>
             </a:r>
+            <a:endParaRPr lang="zh-CN" altLang="en-US" noProof="0" dirty="0"/>
           </a:p>
           <a:p>
             <a:pPr lvl="2"/>
@@ -646,6 +635,7 @@
               <a:rPr lang="zh-CN" altLang="en-US" noProof="0" dirty="0"/>
               <a:t>第三级</a:t>
             </a:r>
+            <a:endParaRPr lang="zh-CN" altLang="en-US" noProof="0" dirty="0"/>
           </a:p>
           <a:p>
             <a:pPr lvl="3"/>
@@ -653,6 +643,7 @@
               <a:rPr lang="zh-CN" altLang="en-US" noProof="0" dirty="0"/>
               <a:t>第四级</a:t>
             </a:r>
+            <a:endParaRPr lang="zh-CN" altLang="en-US" noProof="0" dirty="0"/>
           </a:p>
           <a:p>
             <a:pPr lvl="4"/>
@@ -660,6 +651,7 @@
               <a:rPr lang="zh-CN" altLang="en-US" noProof="0" dirty="0"/>
               <a:t>第五级</a:t>
             </a:r>
+            <a:endParaRPr lang="zh-CN" altLang="en-US" noProof="0" dirty="0"/>
           </a:p>
         </p:txBody>
       </p:sp>
@@ -735,18 +727,12 @@
             </a:pPr>
             <a:fld id="{395A52D7-8F67-41F0-A534-CB8A9A4DB925}" type="slidenum">
               <a:rPr lang="zh-CN" altLang="en-US" smtClean="0"/>
-              <a:t>‹#›</a:t>
             </a:fld>
             <a:endParaRPr lang="zh-CN" altLang="en-US" dirty="0"/>
           </a:p>
         </p:txBody>
       </p:sp>
     </p:spTree>
-    <p:extLst>
-      <p:ext uri="{BB962C8B-B14F-4D97-AF65-F5344CB8AC3E}">
-        <p14:creationId xmlns:p14="http://schemas.microsoft.com/office/powerpoint/2010/main" val="2661004196"/>
-      </p:ext>
-    </p:extLst>
   </p:cSld>
   <p:clrMap bg1="lt1" tx1="dk1" bg2="lt2" tx2="dk2" accent1="accent1" accent2="accent2" accent3="accent3" accent4="accent4" accent5="accent5" accent6="accent6" hlink="hlink" folHlink="folHlink"/>
   <p:notesStyle>
@@ -1061,6 +1047,13 @@
               </a:rPr>
               <a:t>      </a:t>
             </a:r>
+            <a:endParaRPr lang="en-US" altLang="zh-CN" sz="1200" dirty="0" smtClean="0">
+              <a:solidFill>
+                <a:srgbClr val="EEECE1">
+                  <a:lumMod val="25000"/>
+                </a:srgbClr>
+              </a:solidFill>
+            </a:endParaRPr>
           </a:p>
           <a:p>
             <a:r>
@@ -1135,6 +1128,13 @@
               </a:rPr>
               <a:t>      </a:t>
             </a:r>
+            <a:endParaRPr lang="en-US" altLang="zh-CN" sz="1200" dirty="0" smtClean="0">
+              <a:solidFill>
+                <a:srgbClr val="EEECE1">
+                  <a:lumMod val="25000"/>
+                </a:srgbClr>
+              </a:solidFill>
+            </a:endParaRPr>
           </a:p>
           <a:p>
             <a:r>
@@ -1209,6 +1209,13 @@
               </a:rPr>
               <a:t>              </a:t>
             </a:r>
+            <a:endParaRPr lang="en-US" altLang="zh-CN" sz="1200" dirty="0" smtClean="0">
+              <a:solidFill>
+                <a:srgbClr val="EEECE1">
+                  <a:lumMod val="25000"/>
+                </a:srgbClr>
+              </a:solidFill>
+            </a:endParaRPr>
           </a:p>
           <a:p>
             <a:r>
@@ -1273,6 +1280,13 @@
               </a:rPr>
               <a:t>               </a:t>
             </a:r>
+            <a:endParaRPr lang="en-US" altLang="zh-CN" sz="1200" dirty="0" smtClean="0">
+              <a:solidFill>
+                <a:srgbClr val="EEECE1">
+                  <a:lumMod val="25000"/>
+                </a:srgbClr>
+              </a:solidFill>
+            </a:endParaRPr>
           </a:p>
           <a:p>
             <a:r>
@@ -1337,6 +1351,13 @@
               </a:rPr>
               <a:t> </a:t>
             </a:r>
+            <a:endParaRPr lang="en-US" altLang="zh-CN" sz="1200" dirty="0" smtClean="0">
+              <a:solidFill>
+                <a:srgbClr val="EEECE1">
+                  <a:lumMod val="25000"/>
+                </a:srgbClr>
+              </a:solidFill>
+            </a:endParaRPr>
           </a:p>
           <a:p>
             <a:r>
@@ -1401,6 +1422,13 @@
               </a:rPr>
               <a:t> </a:t>
             </a:r>
+            <a:endParaRPr lang="en-US" altLang="zh-CN" sz="1200" dirty="0" smtClean="0">
+              <a:solidFill>
+                <a:srgbClr val="EEECE1">
+                  <a:lumMod val="25000"/>
+                </a:srgbClr>
+              </a:solidFill>
+            </a:endParaRPr>
           </a:p>
           <a:p>
             <a:r>
@@ -1465,6 +1493,13 @@
               </a:rPr>
               <a:t> </a:t>
             </a:r>
+            <a:endParaRPr lang="en-US" altLang="zh-CN" sz="1200" dirty="0" smtClean="0">
+              <a:solidFill>
+                <a:srgbClr val="EEECE1">
+                  <a:lumMod val="25000"/>
+                </a:srgbClr>
+              </a:solidFill>
+            </a:endParaRPr>
           </a:p>
           <a:p>
             <a:r>
@@ -1529,6 +1564,13 @@
               </a:rPr>
               <a:t> </a:t>
             </a:r>
+            <a:endParaRPr lang="en-US" altLang="zh-CN" sz="1200" dirty="0" smtClean="0">
+              <a:solidFill>
+                <a:srgbClr val="EEECE1">
+                  <a:lumMod val="25000"/>
+                </a:srgbClr>
+              </a:solidFill>
+            </a:endParaRPr>
           </a:p>
           <a:p>
             <a:r>
@@ -1593,6 +1635,13 @@
               </a:rPr>
               <a:t> </a:t>
             </a:r>
+            <a:endParaRPr lang="en-US" altLang="zh-CN" sz="1200" dirty="0" smtClean="0">
+              <a:solidFill>
+                <a:srgbClr val="EEECE1">
+                  <a:lumMod val="25000"/>
+                </a:srgbClr>
+              </a:solidFill>
+            </a:endParaRPr>
           </a:p>
           <a:p>
             <a:r>
@@ -1657,6 +1706,13 @@
               </a:rPr>
               <a:t>  </a:t>
             </a:r>
+            <a:endParaRPr lang="en-US" altLang="zh-CN" sz="1200" dirty="0" smtClean="0">
+              <a:solidFill>
+                <a:srgbClr val="EEECE1">
+                  <a:lumMod val="25000"/>
+                </a:srgbClr>
+              </a:solidFill>
+            </a:endParaRPr>
           </a:p>
           <a:p>
             <a:endParaRPr lang="zh-CN" altLang="en-US" dirty="0"/>
@@ -1683,18 +1739,12 @@
             </a:pPr>
             <a:fld id="{395A52D7-8F67-41F0-A534-CB8A9A4DB925}" type="slidenum">
               <a:rPr lang="zh-CN" altLang="en-US" smtClean="0"/>
-              <a:t>8</a:t>
             </a:fld>
             <a:endParaRPr lang="zh-CN" altLang="en-US" dirty="0"/>
           </a:p>
         </p:txBody>
       </p:sp>
     </p:spTree>
-    <p:extLst>
-      <p:ext uri="{BB962C8B-B14F-4D97-AF65-F5344CB8AC3E}">
-        <p14:creationId xmlns:p14="http://schemas.microsoft.com/office/powerpoint/2010/main" val="3920953092"/>
-      </p:ext>
-    </p:extLst>
   </p:cSld>
   <p:clrMapOvr>
     <a:masterClrMapping/>
@@ -1850,7 +1900,7 @@
           <p:cNvCxnSpPr/>
           <p:nvPr userDrawn="1">
             <p:custDataLst>
-              <p:tags r:id="rId1"/>
+              <p:tags r:id="rId2"/>
             </p:custDataLst>
           </p:nvPr>
         </p:nvCxnSpPr>
@@ -1903,7 +1953,7 @@
             <p:cNvSpPr/>
             <p:nvPr>
               <p:custDataLst>
-                <p:tags r:id="rId2"/>
+                <p:tags r:id="rId3"/>
               </p:custDataLst>
             </p:nvPr>
           </p:nvSpPr>
@@ -1966,7 +2016,7 @@
             <p:cNvCxnSpPr/>
             <p:nvPr>
               <p:custDataLst>
-                <p:tags r:id="rId3"/>
+                <p:tags r:id="rId4"/>
               </p:custDataLst>
             </p:nvPr>
           </p:nvCxnSpPr>
@@ -2075,7 +2125,7 @@
           <p:cNvCxnSpPr/>
           <p:nvPr userDrawn="1">
             <p:custDataLst>
-              <p:tags r:id="rId1"/>
+              <p:tags r:id="rId2"/>
             </p:custDataLst>
           </p:nvPr>
         </p:nvCxnSpPr>
@@ -2128,7 +2178,7 @@
             <p:cNvSpPr/>
             <p:nvPr>
               <p:custDataLst>
-                <p:tags r:id="rId2"/>
+                <p:tags r:id="rId3"/>
               </p:custDataLst>
             </p:nvPr>
           </p:nvSpPr>
@@ -2191,7 +2241,7 @@
             <p:cNvCxnSpPr/>
             <p:nvPr>
               <p:custDataLst>
-                <p:tags r:id="rId3"/>
+                <p:tags r:id="rId4"/>
               </p:custDataLst>
             </p:nvPr>
           </p:nvCxnSpPr>
@@ -2300,7 +2350,7 @@
           <p:cNvCxnSpPr/>
           <p:nvPr userDrawn="1">
             <p:custDataLst>
-              <p:tags r:id="rId1"/>
+              <p:tags r:id="rId2"/>
             </p:custDataLst>
           </p:nvPr>
         </p:nvCxnSpPr>
@@ -2353,7 +2403,7 @@
             <p:cNvSpPr/>
             <p:nvPr>
               <p:custDataLst>
-                <p:tags r:id="rId2"/>
+                <p:tags r:id="rId3"/>
               </p:custDataLst>
             </p:nvPr>
           </p:nvSpPr>
@@ -2416,7 +2466,7 @@
             <p:cNvCxnSpPr/>
             <p:nvPr>
               <p:custDataLst>
-                <p:tags r:id="rId3"/>
+                <p:tags r:id="rId4"/>
               </p:custDataLst>
             </p:nvPr>
           </p:nvCxnSpPr>
@@ -2518,7 +2568,7 @@
           <p:cNvCxnSpPr/>
           <p:nvPr userDrawn="1">
             <p:custDataLst>
-              <p:tags r:id="rId1"/>
+              <p:tags r:id="rId2"/>
             </p:custDataLst>
           </p:nvPr>
         </p:nvCxnSpPr>
@@ -2571,7 +2621,7 @@
             <p:cNvSpPr/>
             <p:nvPr>
               <p:custDataLst>
-                <p:tags r:id="rId2"/>
+                <p:tags r:id="rId3"/>
               </p:custDataLst>
             </p:nvPr>
           </p:nvSpPr>
@@ -2634,7 +2684,7 @@
             <p:cNvCxnSpPr/>
             <p:nvPr>
               <p:custDataLst>
-                <p:tags r:id="rId3"/>
+                <p:tags r:id="rId4"/>
               </p:custDataLst>
             </p:nvPr>
           </p:nvCxnSpPr>
@@ -2742,7 +2792,7 @@
           <p:cNvCxnSpPr/>
           <p:nvPr userDrawn="1">
             <p:custDataLst>
-              <p:tags r:id="rId1"/>
+              <p:tags r:id="rId2"/>
             </p:custDataLst>
           </p:nvPr>
         </p:nvCxnSpPr>
@@ -2795,7 +2845,7 @@
             <p:cNvSpPr/>
             <p:nvPr>
               <p:custDataLst>
-                <p:tags r:id="rId2"/>
+                <p:tags r:id="rId3"/>
               </p:custDataLst>
             </p:nvPr>
           </p:nvSpPr>
@@ -2858,7 +2908,7 @@
             <p:cNvCxnSpPr/>
             <p:nvPr>
               <p:custDataLst>
-                <p:tags r:id="rId3"/>
+                <p:tags r:id="rId4"/>
               </p:custDataLst>
             </p:nvPr>
           </p:nvCxnSpPr>
@@ -2960,7 +3010,7 @@
           <p:cNvCxnSpPr/>
           <p:nvPr userDrawn="1">
             <p:custDataLst>
-              <p:tags r:id="rId1"/>
+              <p:tags r:id="rId2"/>
             </p:custDataLst>
           </p:nvPr>
         </p:nvCxnSpPr>
@@ -3013,7 +3063,7 @@
             <p:cNvSpPr/>
             <p:nvPr>
               <p:custDataLst>
-                <p:tags r:id="rId2"/>
+                <p:tags r:id="rId3"/>
               </p:custDataLst>
             </p:nvPr>
           </p:nvSpPr>
@@ -3076,7 +3126,7 @@
             <p:cNvCxnSpPr/>
             <p:nvPr>
               <p:custDataLst>
-                <p:tags r:id="rId3"/>
+                <p:tags r:id="rId4"/>
               </p:custDataLst>
             </p:nvPr>
           </p:nvCxnSpPr>
@@ -3185,7 +3235,7 @@
           <p:cNvCxnSpPr/>
           <p:nvPr userDrawn="1">
             <p:custDataLst>
-              <p:tags r:id="rId1"/>
+              <p:tags r:id="rId2"/>
             </p:custDataLst>
           </p:nvPr>
         </p:nvCxnSpPr>
@@ -3238,7 +3288,7 @@
             <p:cNvSpPr/>
             <p:nvPr>
               <p:custDataLst>
-                <p:tags r:id="rId2"/>
+                <p:tags r:id="rId3"/>
               </p:custDataLst>
             </p:nvPr>
           </p:nvSpPr>
@@ -3301,7 +3351,7 @@
             <p:cNvCxnSpPr/>
             <p:nvPr>
               <p:custDataLst>
-                <p:tags r:id="rId3"/>
+                <p:tags r:id="rId4"/>
               </p:custDataLst>
             </p:nvPr>
           </p:nvCxnSpPr>
@@ -3410,7 +3460,7 @@
           <p:cNvCxnSpPr/>
           <p:nvPr userDrawn="1">
             <p:custDataLst>
-              <p:tags r:id="rId1"/>
+              <p:tags r:id="rId2"/>
             </p:custDataLst>
           </p:nvPr>
         </p:nvCxnSpPr>
@@ -3463,7 +3513,7 @@
             <p:cNvSpPr/>
             <p:nvPr>
               <p:custDataLst>
-                <p:tags r:id="rId2"/>
+                <p:tags r:id="rId3"/>
               </p:custDataLst>
             </p:nvPr>
           </p:nvSpPr>
@@ -3526,7 +3576,7 @@
             <p:cNvCxnSpPr/>
             <p:nvPr>
               <p:custDataLst>
-                <p:tags r:id="rId3"/>
+                <p:tags r:id="rId4"/>
               </p:custDataLst>
             </p:nvPr>
           </p:nvCxnSpPr>
@@ -3601,18 +3651,13 @@
           </p:cNvPicPr>
           <p:nvPr userDrawn="1">
             <p:custDataLst>
-              <p:tags r:id="rId1"/>
+              <p:tags r:id="rId2"/>
             </p:custDataLst>
           </p:nvPr>
         </p:nvPicPr>
         <p:blipFill>
           <a:blip r:embed="rId3" cstate="email">
             <a:lum contrast="-12001"/>
-            <a:extLst>
-              <a:ext uri="{28A0092B-C50C-407E-A947-70E740481C1C}">
-                <a14:useLocalDpi xmlns:a14="http://schemas.microsoft.com/office/drawing/2010/main"/>
-              </a:ext>
-            </a:extLst>
           </a:blip>
           <a:srcRect/>
           <a:stretch>
@@ -3686,280 +3731,6 @@
 </p:sldLayout>
 </file>
 
-<file path=ppt/slideLayouts/slideLayout19.xml><?xml version="1.0" encoding="utf-8"?>
-<p:sldLayout xmlns:a="http://schemas.openxmlformats.org/drawingml/2006/main" xmlns:r="http://schemas.openxmlformats.org/officeDocument/2006/relationships" xmlns:p="http://schemas.openxmlformats.org/presentationml/2006/main" type="title" preserve="1">
-  <p:cSld name="标题幻灯片">
-    <p:spTree>
-      <p:nvGrpSpPr>
-        <p:cNvPr id="1" name=""/>
-        <p:cNvGrpSpPr/>
-        <p:nvPr/>
-      </p:nvGrpSpPr>
-      <p:grpSpPr>
-        <a:xfrm>
-          <a:off x="0" y="0"/>
-          <a:ext cx="0" cy="0"/>
-          <a:chOff x="0" y="0"/>
-          <a:chExt cx="0" cy="0"/>
-        </a:xfrm>
-      </p:grpSpPr>
-      <p:sp>
-        <p:nvSpPr>
-          <p:cNvPr id="2" name="标题 1"/>
-          <p:cNvSpPr>
-            <a:spLocks noGrp="1"/>
-          </p:cNvSpPr>
-          <p:nvPr>
-            <p:ph type="ctrTitle"/>
-          </p:nvPr>
-        </p:nvSpPr>
-        <p:spPr>
-          <a:xfrm>
-            <a:off x="685800" y="1597819"/>
-            <a:ext cx="7772400" cy="1102519"/>
-          </a:xfrm>
-        </p:spPr>
-        <p:txBody>
-          <a:bodyPr/>
-          <a:lstStyle/>
-          <a:p>
-            <a:r>
-              <a:rPr lang="zh-CN" altLang="en-US" smtClean="0"/>
-              <a:t>单击此处编辑母版标题样式</a:t>
-            </a:r>
-            <a:endParaRPr lang="zh-CN" altLang="en-US"/>
-          </a:p>
-        </p:txBody>
-      </p:sp>
-      <p:sp>
-        <p:nvSpPr>
-          <p:cNvPr id="3" name="副标题 2"/>
-          <p:cNvSpPr>
-            <a:spLocks noGrp="1"/>
-          </p:cNvSpPr>
-          <p:nvPr>
-            <p:ph type="subTitle" idx="1"/>
-          </p:nvPr>
-        </p:nvSpPr>
-        <p:spPr>
-          <a:xfrm>
-            <a:off x="1371600" y="2914650"/>
-            <a:ext cx="6400800" cy="1314450"/>
-          </a:xfrm>
-        </p:spPr>
-        <p:txBody>
-          <a:bodyPr/>
-          <a:lstStyle>
-            <a:lvl1pPr marL="0" indent="0" algn="ctr">
-              <a:buNone/>
-              <a:defRPr>
-                <a:solidFill>
-                  <a:schemeClr val="tx1">
-                    <a:tint val="75000"/>
-                  </a:schemeClr>
-                </a:solidFill>
-              </a:defRPr>
-            </a:lvl1pPr>
-            <a:lvl2pPr marL="457200" indent="0" algn="ctr">
-              <a:buNone/>
-              <a:defRPr>
-                <a:solidFill>
-                  <a:schemeClr val="tx1">
-                    <a:tint val="75000"/>
-                  </a:schemeClr>
-                </a:solidFill>
-              </a:defRPr>
-            </a:lvl2pPr>
-            <a:lvl3pPr marL="914400" indent="0" algn="ctr">
-              <a:buNone/>
-              <a:defRPr>
-                <a:solidFill>
-                  <a:schemeClr val="tx1">
-                    <a:tint val="75000"/>
-                  </a:schemeClr>
-                </a:solidFill>
-              </a:defRPr>
-            </a:lvl3pPr>
-            <a:lvl4pPr marL="1371600" indent="0" algn="ctr">
-              <a:buNone/>
-              <a:defRPr>
-                <a:solidFill>
-                  <a:schemeClr val="tx1">
-                    <a:tint val="75000"/>
-                  </a:schemeClr>
-                </a:solidFill>
-              </a:defRPr>
-            </a:lvl4pPr>
-            <a:lvl5pPr marL="1828800" indent="0" algn="ctr">
-              <a:buNone/>
-              <a:defRPr>
-                <a:solidFill>
-                  <a:schemeClr val="tx1">
-                    <a:tint val="75000"/>
-                  </a:schemeClr>
-                </a:solidFill>
-              </a:defRPr>
-            </a:lvl5pPr>
-            <a:lvl6pPr marL="2286000" indent="0" algn="ctr">
-              <a:buNone/>
-              <a:defRPr>
-                <a:solidFill>
-                  <a:schemeClr val="tx1">
-                    <a:tint val="75000"/>
-                  </a:schemeClr>
-                </a:solidFill>
-              </a:defRPr>
-            </a:lvl6pPr>
-            <a:lvl7pPr marL="2743200" indent="0" algn="ctr">
-              <a:buNone/>
-              <a:defRPr>
-                <a:solidFill>
-                  <a:schemeClr val="tx1">
-                    <a:tint val="75000"/>
-                  </a:schemeClr>
-                </a:solidFill>
-              </a:defRPr>
-            </a:lvl7pPr>
-            <a:lvl8pPr marL="3200400" indent="0" algn="ctr">
-              <a:buNone/>
-              <a:defRPr>
-                <a:solidFill>
-                  <a:schemeClr val="tx1">
-                    <a:tint val="75000"/>
-                  </a:schemeClr>
-                </a:solidFill>
-              </a:defRPr>
-            </a:lvl8pPr>
-            <a:lvl9pPr marL="3657600" indent="0" algn="ctr">
-              <a:buNone/>
-              <a:defRPr>
-                <a:solidFill>
-                  <a:schemeClr val="tx1">
-                    <a:tint val="75000"/>
-                  </a:schemeClr>
-                </a:solidFill>
-              </a:defRPr>
-            </a:lvl9pPr>
-          </a:lstStyle>
-          <a:p>
-            <a:r>
-              <a:rPr lang="zh-CN" altLang="en-US" smtClean="0"/>
-              <a:t>单击此处编辑母版副标题样式</a:t>
-            </a:r>
-            <a:endParaRPr lang="zh-CN" altLang="en-US"/>
-          </a:p>
-        </p:txBody>
-      </p:sp>
-      <p:sp>
-        <p:nvSpPr>
-          <p:cNvPr id="4" name="日期占位符 3"/>
-          <p:cNvSpPr>
-            <a:spLocks noGrp="1"/>
-          </p:cNvSpPr>
-          <p:nvPr>
-            <p:ph type="dt" sz="half" idx="10"/>
-          </p:nvPr>
-        </p:nvSpPr>
-        <p:spPr/>
-        <p:txBody>
-          <a:bodyPr/>
-          <a:lstStyle/>
-          <a:p>
-            <a:fld id="{530820CF-B880-4189-942D-D702A7CBA730}" type="datetimeFigureOut">
-              <a:rPr lang="zh-CN" altLang="en-US" smtClean="0">
-                <a:solidFill>
-                  <a:prstClr val="black">
-                    <a:tint val="75000"/>
-                  </a:prstClr>
-                </a:solidFill>
-              </a:rPr>
-              <a:pPr/>
-              <a:t>2024/8/12</a:t>
-            </a:fld>
-            <a:endParaRPr lang="zh-CN" altLang="en-US">
-              <a:solidFill>
-                <a:prstClr val="black">
-                  <a:tint val="75000"/>
-                </a:prstClr>
-              </a:solidFill>
-            </a:endParaRPr>
-          </a:p>
-        </p:txBody>
-      </p:sp>
-      <p:sp>
-        <p:nvSpPr>
-          <p:cNvPr id="5" name="页脚占位符 4"/>
-          <p:cNvSpPr>
-            <a:spLocks noGrp="1"/>
-          </p:cNvSpPr>
-          <p:nvPr>
-            <p:ph type="ftr" sz="quarter" idx="11"/>
-          </p:nvPr>
-        </p:nvSpPr>
-        <p:spPr/>
-        <p:txBody>
-          <a:bodyPr/>
-          <a:lstStyle/>
-          <a:p>
-            <a:endParaRPr lang="zh-CN" altLang="en-US">
-              <a:solidFill>
-                <a:prstClr val="black">
-                  <a:tint val="75000"/>
-                </a:prstClr>
-              </a:solidFill>
-            </a:endParaRPr>
-          </a:p>
-        </p:txBody>
-      </p:sp>
-      <p:sp>
-        <p:nvSpPr>
-          <p:cNvPr id="6" name="灯片编号占位符 5"/>
-          <p:cNvSpPr>
-            <a:spLocks noGrp="1"/>
-          </p:cNvSpPr>
-          <p:nvPr>
-            <p:ph type="sldNum" sz="quarter" idx="12"/>
-          </p:nvPr>
-        </p:nvSpPr>
-        <p:spPr/>
-        <p:txBody>
-          <a:bodyPr/>
-          <a:lstStyle/>
-          <a:p>
-            <a:fld id="{0C913308-F349-4B6D-A68A-DD1791B4A57B}" type="slidenum">
-              <a:rPr lang="zh-CN" altLang="en-US" smtClean="0">
-                <a:solidFill>
-                  <a:prstClr val="black">
-                    <a:tint val="75000"/>
-                  </a:prstClr>
-                </a:solidFill>
-              </a:rPr>
-              <a:pPr/>
-              <a:t>‹#›</a:t>
-            </a:fld>
-            <a:endParaRPr lang="zh-CN" altLang="en-US">
-              <a:solidFill>
-                <a:prstClr val="black">
-                  <a:tint val="75000"/>
-                </a:prstClr>
-              </a:solidFill>
-            </a:endParaRPr>
-          </a:p>
-        </p:txBody>
-      </p:sp>
-    </p:spTree>
-    <p:extLst>
-      <p:ext uri="{BB962C8B-B14F-4D97-AF65-F5344CB8AC3E}">
-        <p14:creationId xmlns:p14="http://schemas.microsoft.com/office/powerpoint/2010/main" val="2242809936"/>
-      </p:ext>
-    </p:extLst>
-  </p:cSld>
-  <p:clrMapOvr>
-    <a:masterClrMapping/>
-  </p:clrMapOvr>
-</p:sldLayout>
-</file>
-
 <file path=ppt/slideLayouts/slideLayout2.xml><?xml version="1.0" encoding="utf-8"?>
 <p:sldLayout xmlns:a="http://schemas.openxmlformats.org/drawingml/2006/main" xmlns:r="http://schemas.openxmlformats.org/officeDocument/2006/relationships" xmlns:p="http://schemas.openxmlformats.org/presentationml/2006/main" preserve="1">
   <p:cSld name="新课导入">
@@ -4005,2759 +3776,6 @@
                 <a:ea typeface="黑体" panose="02010609060101010101" pitchFamily="49" charset="-122"/>
               </a:rPr>
               <a:t>新课导入</a:t>
-            </a:r>
-          </a:p>
-        </p:txBody>
-      </p:sp>
-      <p:grpSp>
-        <p:nvGrpSpPr>
-          <p:cNvPr id="3" name="组合 2"/>
-          <p:cNvGrpSpPr/>
-          <p:nvPr userDrawn="1"/>
-        </p:nvGrpSpPr>
-        <p:grpSpPr>
-          <a:xfrm>
-            <a:off x="294084" y="195486"/>
-            <a:ext cx="1685628" cy="354827"/>
-            <a:chOff x="392112" y="375411"/>
-            <a:chExt cx="2247503" cy="473102"/>
-          </a:xfrm>
-        </p:grpSpPr>
-        <p:sp>
-          <p:nvSpPr>
-            <p:cNvPr id="4" name="菱形 3"/>
-            <p:cNvSpPr/>
-            <p:nvPr>
-              <p:custDataLst>
-                <p:tags r:id="rId2"/>
-              </p:custDataLst>
-            </p:nvPr>
-          </p:nvSpPr>
-          <p:spPr>
-            <a:xfrm>
-              <a:off x="392112" y="375411"/>
-              <a:ext cx="384000" cy="384000"/>
-            </a:xfrm>
-            <a:prstGeom prst="diamond">
-              <a:avLst/>
-            </a:prstGeom>
-            <a:solidFill>
-              <a:srgbClr val="009FB0"/>
-            </a:solidFill>
-            <a:ln>
-              <a:noFill/>
-            </a:ln>
-            <a:effectLst/>
-          </p:spPr>
-          <p:style>
-            <a:lnRef idx="2">
-              <a:schemeClr val="accent1">
-                <a:shade val="50000"/>
-              </a:schemeClr>
-            </a:lnRef>
-            <a:fillRef idx="1">
-              <a:schemeClr val="accent1"/>
-            </a:fillRef>
-            <a:effectRef idx="0">
-              <a:schemeClr val="accent1"/>
-            </a:effectRef>
-            <a:fontRef idx="minor">
-              <a:schemeClr val="lt1"/>
-            </a:fontRef>
-          </p:style>
-          <p:txBody>
-            <a:bodyPr anchor="ctr"/>
-            <a:lstStyle/>
-            <a:p>
-              <a:pPr algn="ctr" fontAlgn="auto">
-                <a:defRPr/>
-              </a:pPr>
-              <a:endParaRPr kumimoji="1" lang="zh-CN" altLang="en-US" sz="100" strike="noStrike" noProof="1">
-                <a:ln>
-                  <a:solidFill>
-                    <a:srgbClr val="E6A774"/>
-                  </a:solidFill>
-                </a:ln>
-                <a:solidFill>
-                  <a:srgbClr val="E6A774"/>
-                </a:solidFill>
-                <a:ea typeface="黑体" panose="02010609060101010101" pitchFamily="49" charset="-122"/>
-              </a:endParaRPr>
-            </a:p>
-          </p:txBody>
-        </p:sp>
-        <p:cxnSp>
-          <p:nvCxnSpPr>
-            <p:cNvPr id="5" name="直接连接符 4"/>
-            <p:cNvCxnSpPr/>
-            <p:nvPr>
-              <p:custDataLst>
-                <p:tags r:id="rId3"/>
-              </p:custDataLst>
-            </p:nvPr>
-          </p:nvCxnSpPr>
-          <p:spPr>
-            <a:xfrm>
-              <a:off x="421415" y="848513"/>
-              <a:ext cx="2218200" cy="0"/>
-            </a:xfrm>
-            <a:prstGeom prst="line">
-              <a:avLst/>
-            </a:prstGeom>
-            <a:ln w="25400">
-              <a:solidFill>
-                <a:srgbClr val="009FB0"/>
-              </a:solidFill>
-            </a:ln>
-          </p:spPr>
-          <p:style>
-            <a:lnRef idx="1">
-              <a:schemeClr val="accent1"/>
-            </a:lnRef>
-            <a:fillRef idx="0">
-              <a:schemeClr val="accent1"/>
-            </a:fillRef>
-            <a:effectRef idx="0">
-              <a:schemeClr val="accent1"/>
-            </a:effectRef>
-            <a:fontRef idx="minor">
-              <a:schemeClr val="tx1"/>
-            </a:fontRef>
-          </p:style>
-        </p:cxnSp>
-      </p:grpSp>
-      <p:cxnSp>
-        <p:nvCxnSpPr>
-          <p:cNvPr id="6" name="直接连接符 5"/>
-          <p:cNvCxnSpPr/>
-          <p:nvPr userDrawn="1">
-            <p:custDataLst>
-              <p:tags r:id="rId1"/>
-            </p:custDataLst>
-          </p:nvPr>
-        </p:nvCxnSpPr>
-        <p:spPr>
-          <a:xfrm>
-            <a:off x="0" y="699542"/>
-            <a:ext cx="9144000" cy="0"/>
-          </a:xfrm>
-          <a:prstGeom prst="line">
-            <a:avLst/>
-          </a:prstGeom>
-          <a:ln w="44450">
-            <a:solidFill>
-              <a:srgbClr val="E0F1EF"/>
-            </a:solidFill>
-          </a:ln>
-        </p:spPr>
-        <p:style>
-          <a:lnRef idx="1">
-            <a:schemeClr val="accent1"/>
-          </a:lnRef>
-          <a:fillRef idx="0">
-            <a:schemeClr val="accent1"/>
-          </a:fillRef>
-          <a:effectRef idx="0">
-            <a:schemeClr val="accent1"/>
-          </a:effectRef>
-          <a:fontRef idx="minor">
-            <a:schemeClr val="tx1"/>
-          </a:fontRef>
-        </p:style>
-      </p:cxnSp>
-    </p:spTree>
-  </p:cSld>
-  <p:clrMapOvr>
-    <a:masterClrMapping/>
-  </p:clrMapOvr>
-  <p:transition/>
-</p:sldLayout>
-</file>
-
-<file path=ppt/slideLayouts/slideLayout20.xml><?xml version="1.0" encoding="utf-8"?>
-<p:sldLayout xmlns:a="http://schemas.openxmlformats.org/drawingml/2006/main" xmlns:r="http://schemas.openxmlformats.org/officeDocument/2006/relationships" xmlns:p="http://schemas.openxmlformats.org/presentationml/2006/main" type="obj" preserve="1">
-  <p:cSld name="标题和内容">
-    <p:spTree>
-      <p:nvGrpSpPr>
-        <p:cNvPr id="1" name=""/>
-        <p:cNvGrpSpPr/>
-        <p:nvPr/>
-      </p:nvGrpSpPr>
-      <p:grpSpPr>
-        <a:xfrm>
-          <a:off x="0" y="0"/>
-          <a:ext cx="0" cy="0"/>
-          <a:chOff x="0" y="0"/>
-          <a:chExt cx="0" cy="0"/>
-        </a:xfrm>
-      </p:grpSpPr>
-      <p:sp>
-        <p:nvSpPr>
-          <p:cNvPr id="2" name="标题 1"/>
-          <p:cNvSpPr>
-            <a:spLocks noGrp="1"/>
-          </p:cNvSpPr>
-          <p:nvPr>
-            <p:ph type="title"/>
-          </p:nvPr>
-        </p:nvSpPr>
-        <p:spPr/>
-        <p:txBody>
-          <a:bodyPr/>
-          <a:lstStyle/>
-          <a:p>
-            <a:r>
-              <a:rPr lang="zh-CN" altLang="en-US" smtClean="0"/>
-              <a:t>单击此处编辑母版标题样式</a:t>
-            </a:r>
-            <a:endParaRPr lang="zh-CN" altLang="en-US"/>
-          </a:p>
-        </p:txBody>
-      </p:sp>
-      <p:sp>
-        <p:nvSpPr>
-          <p:cNvPr id="3" name="内容占位符 2"/>
-          <p:cNvSpPr>
-            <a:spLocks noGrp="1"/>
-          </p:cNvSpPr>
-          <p:nvPr>
-            <p:ph idx="1"/>
-          </p:nvPr>
-        </p:nvSpPr>
-        <p:spPr/>
-        <p:txBody>
-          <a:bodyPr/>
-          <a:lstStyle/>
-          <a:p>
-            <a:pPr lvl="0"/>
-            <a:r>
-              <a:rPr lang="zh-CN" altLang="en-US" smtClean="0"/>
-              <a:t>单击此处编辑母版文本样式</a:t>
-            </a:r>
-          </a:p>
-          <a:p>
-            <a:pPr lvl="1"/>
-            <a:r>
-              <a:rPr lang="zh-CN" altLang="en-US" smtClean="0"/>
-              <a:t>第二级</a:t>
-            </a:r>
-          </a:p>
-          <a:p>
-            <a:pPr lvl="2"/>
-            <a:r>
-              <a:rPr lang="zh-CN" altLang="en-US" smtClean="0"/>
-              <a:t>第三级</a:t>
-            </a:r>
-          </a:p>
-          <a:p>
-            <a:pPr lvl="3"/>
-            <a:r>
-              <a:rPr lang="zh-CN" altLang="en-US" smtClean="0"/>
-              <a:t>第四级</a:t>
-            </a:r>
-          </a:p>
-          <a:p>
-            <a:pPr lvl="4"/>
-            <a:r>
-              <a:rPr lang="zh-CN" altLang="en-US" smtClean="0"/>
-              <a:t>第五级</a:t>
-            </a:r>
-            <a:endParaRPr lang="zh-CN" altLang="en-US"/>
-          </a:p>
-        </p:txBody>
-      </p:sp>
-      <p:sp>
-        <p:nvSpPr>
-          <p:cNvPr id="4" name="日期占位符 3"/>
-          <p:cNvSpPr>
-            <a:spLocks noGrp="1"/>
-          </p:cNvSpPr>
-          <p:nvPr>
-            <p:ph type="dt" sz="half" idx="10"/>
-          </p:nvPr>
-        </p:nvSpPr>
-        <p:spPr/>
-        <p:txBody>
-          <a:bodyPr/>
-          <a:lstStyle/>
-          <a:p>
-            <a:fld id="{530820CF-B880-4189-942D-D702A7CBA730}" type="datetimeFigureOut">
-              <a:rPr lang="zh-CN" altLang="en-US" smtClean="0">
-                <a:solidFill>
-                  <a:prstClr val="black">
-                    <a:tint val="75000"/>
-                  </a:prstClr>
-                </a:solidFill>
-              </a:rPr>
-              <a:pPr/>
-              <a:t>2024/8/12</a:t>
-            </a:fld>
-            <a:endParaRPr lang="zh-CN" altLang="en-US">
-              <a:solidFill>
-                <a:prstClr val="black">
-                  <a:tint val="75000"/>
-                </a:prstClr>
-              </a:solidFill>
-            </a:endParaRPr>
-          </a:p>
-        </p:txBody>
-      </p:sp>
-      <p:sp>
-        <p:nvSpPr>
-          <p:cNvPr id="5" name="页脚占位符 4"/>
-          <p:cNvSpPr>
-            <a:spLocks noGrp="1"/>
-          </p:cNvSpPr>
-          <p:nvPr>
-            <p:ph type="ftr" sz="quarter" idx="11"/>
-          </p:nvPr>
-        </p:nvSpPr>
-        <p:spPr/>
-        <p:txBody>
-          <a:bodyPr/>
-          <a:lstStyle/>
-          <a:p>
-            <a:endParaRPr lang="zh-CN" altLang="en-US">
-              <a:solidFill>
-                <a:prstClr val="black">
-                  <a:tint val="75000"/>
-                </a:prstClr>
-              </a:solidFill>
-            </a:endParaRPr>
-          </a:p>
-        </p:txBody>
-      </p:sp>
-      <p:sp>
-        <p:nvSpPr>
-          <p:cNvPr id="6" name="灯片编号占位符 5"/>
-          <p:cNvSpPr>
-            <a:spLocks noGrp="1"/>
-          </p:cNvSpPr>
-          <p:nvPr>
-            <p:ph type="sldNum" sz="quarter" idx="12"/>
-          </p:nvPr>
-        </p:nvSpPr>
-        <p:spPr/>
-        <p:txBody>
-          <a:bodyPr/>
-          <a:lstStyle/>
-          <a:p>
-            <a:fld id="{0C913308-F349-4B6D-A68A-DD1791B4A57B}" type="slidenum">
-              <a:rPr lang="zh-CN" altLang="en-US" smtClean="0">
-                <a:solidFill>
-                  <a:prstClr val="black">
-                    <a:tint val="75000"/>
-                  </a:prstClr>
-                </a:solidFill>
-              </a:rPr>
-              <a:pPr/>
-              <a:t>‹#›</a:t>
-            </a:fld>
-            <a:endParaRPr lang="zh-CN" altLang="en-US">
-              <a:solidFill>
-                <a:prstClr val="black">
-                  <a:tint val="75000"/>
-                </a:prstClr>
-              </a:solidFill>
-            </a:endParaRPr>
-          </a:p>
-        </p:txBody>
-      </p:sp>
-    </p:spTree>
-    <p:extLst>
-      <p:ext uri="{BB962C8B-B14F-4D97-AF65-F5344CB8AC3E}">
-        <p14:creationId xmlns:p14="http://schemas.microsoft.com/office/powerpoint/2010/main" val="4178967833"/>
-      </p:ext>
-    </p:extLst>
-  </p:cSld>
-  <p:clrMapOvr>
-    <a:masterClrMapping/>
-  </p:clrMapOvr>
-</p:sldLayout>
-</file>
-
-<file path=ppt/slideLayouts/slideLayout21.xml><?xml version="1.0" encoding="utf-8"?>
-<p:sldLayout xmlns:a="http://schemas.openxmlformats.org/drawingml/2006/main" xmlns:r="http://schemas.openxmlformats.org/officeDocument/2006/relationships" xmlns:p="http://schemas.openxmlformats.org/presentationml/2006/main" type="secHead" preserve="1">
-  <p:cSld name="节标题">
-    <p:spTree>
-      <p:nvGrpSpPr>
-        <p:cNvPr id="1" name=""/>
-        <p:cNvGrpSpPr/>
-        <p:nvPr/>
-      </p:nvGrpSpPr>
-      <p:grpSpPr>
-        <a:xfrm>
-          <a:off x="0" y="0"/>
-          <a:ext cx="0" cy="0"/>
-          <a:chOff x="0" y="0"/>
-          <a:chExt cx="0" cy="0"/>
-        </a:xfrm>
-      </p:grpSpPr>
-      <p:sp>
-        <p:nvSpPr>
-          <p:cNvPr id="2" name="标题 1"/>
-          <p:cNvSpPr>
-            <a:spLocks noGrp="1"/>
-          </p:cNvSpPr>
-          <p:nvPr>
-            <p:ph type="title"/>
-          </p:nvPr>
-        </p:nvSpPr>
-        <p:spPr>
-          <a:xfrm>
-            <a:off x="722313" y="3305176"/>
-            <a:ext cx="7772400" cy="1021556"/>
-          </a:xfrm>
-        </p:spPr>
-        <p:txBody>
-          <a:bodyPr anchor="t"/>
-          <a:lstStyle>
-            <a:lvl1pPr algn="l">
-              <a:defRPr sz="4000" b="1" cap="all"/>
-            </a:lvl1pPr>
-          </a:lstStyle>
-          <a:p>
-            <a:r>
-              <a:rPr lang="zh-CN" altLang="en-US" smtClean="0"/>
-              <a:t>单击此处编辑母版标题样式</a:t>
-            </a:r>
-            <a:endParaRPr lang="zh-CN" altLang="en-US"/>
-          </a:p>
-        </p:txBody>
-      </p:sp>
-      <p:sp>
-        <p:nvSpPr>
-          <p:cNvPr id="3" name="文本占位符 2"/>
-          <p:cNvSpPr>
-            <a:spLocks noGrp="1"/>
-          </p:cNvSpPr>
-          <p:nvPr>
-            <p:ph type="body" idx="1"/>
-          </p:nvPr>
-        </p:nvSpPr>
-        <p:spPr>
-          <a:xfrm>
-            <a:off x="722313" y="2180035"/>
-            <a:ext cx="7772400" cy="1125140"/>
-          </a:xfrm>
-        </p:spPr>
-        <p:txBody>
-          <a:bodyPr anchor="b"/>
-          <a:lstStyle>
-            <a:lvl1pPr marL="0" indent="0">
-              <a:buNone/>
-              <a:defRPr sz="2000">
-                <a:solidFill>
-                  <a:schemeClr val="tx1">
-                    <a:tint val="75000"/>
-                  </a:schemeClr>
-                </a:solidFill>
-              </a:defRPr>
-            </a:lvl1pPr>
-            <a:lvl2pPr marL="457200" indent="0">
-              <a:buNone/>
-              <a:defRPr sz="1800">
-                <a:solidFill>
-                  <a:schemeClr val="tx1">
-                    <a:tint val="75000"/>
-                  </a:schemeClr>
-                </a:solidFill>
-              </a:defRPr>
-            </a:lvl2pPr>
-            <a:lvl3pPr marL="914400" indent="0">
-              <a:buNone/>
-              <a:defRPr sz="1600">
-                <a:solidFill>
-                  <a:schemeClr val="tx1">
-                    <a:tint val="75000"/>
-                  </a:schemeClr>
-                </a:solidFill>
-              </a:defRPr>
-            </a:lvl3pPr>
-            <a:lvl4pPr marL="1371600" indent="0">
-              <a:buNone/>
-              <a:defRPr sz="1400">
-                <a:solidFill>
-                  <a:schemeClr val="tx1">
-                    <a:tint val="75000"/>
-                  </a:schemeClr>
-                </a:solidFill>
-              </a:defRPr>
-            </a:lvl4pPr>
-            <a:lvl5pPr marL="1828800" indent="0">
-              <a:buNone/>
-              <a:defRPr sz="1400">
-                <a:solidFill>
-                  <a:schemeClr val="tx1">
-                    <a:tint val="75000"/>
-                  </a:schemeClr>
-                </a:solidFill>
-              </a:defRPr>
-            </a:lvl5pPr>
-            <a:lvl6pPr marL="2286000" indent="0">
-              <a:buNone/>
-              <a:defRPr sz="1400">
-                <a:solidFill>
-                  <a:schemeClr val="tx1">
-                    <a:tint val="75000"/>
-                  </a:schemeClr>
-                </a:solidFill>
-              </a:defRPr>
-            </a:lvl6pPr>
-            <a:lvl7pPr marL="2743200" indent="0">
-              <a:buNone/>
-              <a:defRPr sz="1400">
-                <a:solidFill>
-                  <a:schemeClr val="tx1">
-                    <a:tint val="75000"/>
-                  </a:schemeClr>
-                </a:solidFill>
-              </a:defRPr>
-            </a:lvl7pPr>
-            <a:lvl8pPr marL="3200400" indent="0">
-              <a:buNone/>
-              <a:defRPr sz="1400">
-                <a:solidFill>
-                  <a:schemeClr val="tx1">
-                    <a:tint val="75000"/>
-                  </a:schemeClr>
-                </a:solidFill>
-              </a:defRPr>
-            </a:lvl8pPr>
-            <a:lvl9pPr marL="3657600" indent="0">
-              <a:buNone/>
-              <a:defRPr sz="1400">
-                <a:solidFill>
-                  <a:schemeClr val="tx1">
-                    <a:tint val="75000"/>
-                  </a:schemeClr>
-                </a:solidFill>
-              </a:defRPr>
-            </a:lvl9pPr>
-          </a:lstStyle>
-          <a:p>
-            <a:pPr lvl="0"/>
-            <a:r>
-              <a:rPr lang="zh-CN" altLang="en-US" smtClean="0"/>
-              <a:t>单击此处编辑母版文本样式</a:t>
-            </a:r>
-          </a:p>
-        </p:txBody>
-      </p:sp>
-      <p:sp>
-        <p:nvSpPr>
-          <p:cNvPr id="4" name="日期占位符 3"/>
-          <p:cNvSpPr>
-            <a:spLocks noGrp="1"/>
-          </p:cNvSpPr>
-          <p:nvPr>
-            <p:ph type="dt" sz="half" idx="10"/>
-          </p:nvPr>
-        </p:nvSpPr>
-        <p:spPr/>
-        <p:txBody>
-          <a:bodyPr/>
-          <a:lstStyle/>
-          <a:p>
-            <a:fld id="{530820CF-B880-4189-942D-D702A7CBA730}" type="datetimeFigureOut">
-              <a:rPr lang="zh-CN" altLang="en-US" smtClean="0">
-                <a:solidFill>
-                  <a:prstClr val="black">
-                    <a:tint val="75000"/>
-                  </a:prstClr>
-                </a:solidFill>
-              </a:rPr>
-              <a:pPr/>
-              <a:t>2024/8/12</a:t>
-            </a:fld>
-            <a:endParaRPr lang="zh-CN" altLang="en-US">
-              <a:solidFill>
-                <a:prstClr val="black">
-                  <a:tint val="75000"/>
-                </a:prstClr>
-              </a:solidFill>
-            </a:endParaRPr>
-          </a:p>
-        </p:txBody>
-      </p:sp>
-      <p:sp>
-        <p:nvSpPr>
-          <p:cNvPr id="5" name="页脚占位符 4"/>
-          <p:cNvSpPr>
-            <a:spLocks noGrp="1"/>
-          </p:cNvSpPr>
-          <p:nvPr>
-            <p:ph type="ftr" sz="quarter" idx="11"/>
-          </p:nvPr>
-        </p:nvSpPr>
-        <p:spPr/>
-        <p:txBody>
-          <a:bodyPr/>
-          <a:lstStyle/>
-          <a:p>
-            <a:endParaRPr lang="zh-CN" altLang="en-US">
-              <a:solidFill>
-                <a:prstClr val="black">
-                  <a:tint val="75000"/>
-                </a:prstClr>
-              </a:solidFill>
-            </a:endParaRPr>
-          </a:p>
-        </p:txBody>
-      </p:sp>
-      <p:sp>
-        <p:nvSpPr>
-          <p:cNvPr id="6" name="灯片编号占位符 5"/>
-          <p:cNvSpPr>
-            <a:spLocks noGrp="1"/>
-          </p:cNvSpPr>
-          <p:nvPr>
-            <p:ph type="sldNum" sz="quarter" idx="12"/>
-          </p:nvPr>
-        </p:nvSpPr>
-        <p:spPr/>
-        <p:txBody>
-          <a:bodyPr/>
-          <a:lstStyle/>
-          <a:p>
-            <a:fld id="{0C913308-F349-4B6D-A68A-DD1791B4A57B}" type="slidenum">
-              <a:rPr lang="zh-CN" altLang="en-US" smtClean="0">
-                <a:solidFill>
-                  <a:prstClr val="black">
-                    <a:tint val="75000"/>
-                  </a:prstClr>
-                </a:solidFill>
-              </a:rPr>
-              <a:pPr/>
-              <a:t>‹#›</a:t>
-            </a:fld>
-            <a:endParaRPr lang="zh-CN" altLang="en-US">
-              <a:solidFill>
-                <a:prstClr val="black">
-                  <a:tint val="75000"/>
-                </a:prstClr>
-              </a:solidFill>
-            </a:endParaRPr>
-          </a:p>
-        </p:txBody>
-      </p:sp>
-    </p:spTree>
-    <p:extLst>
-      <p:ext uri="{BB962C8B-B14F-4D97-AF65-F5344CB8AC3E}">
-        <p14:creationId xmlns:p14="http://schemas.microsoft.com/office/powerpoint/2010/main" val="1525047093"/>
-      </p:ext>
-    </p:extLst>
-  </p:cSld>
-  <p:clrMapOvr>
-    <a:masterClrMapping/>
-  </p:clrMapOvr>
-</p:sldLayout>
-</file>
-
-<file path=ppt/slideLayouts/slideLayout22.xml><?xml version="1.0" encoding="utf-8"?>
-<p:sldLayout xmlns:a="http://schemas.openxmlformats.org/drawingml/2006/main" xmlns:r="http://schemas.openxmlformats.org/officeDocument/2006/relationships" xmlns:p="http://schemas.openxmlformats.org/presentationml/2006/main" type="twoObj" preserve="1">
-  <p:cSld name="两栏内容">
-    <p:spTree>
-      <p:nvGrpSpPr>
-        <p:cNvPr id="1" name=""/>
-        <p:cNvGrpSpPr/>
-        <p:nvPr/>
-      </p:nvGrpSpPr>
-      <p:grpSpPr>
-        <a:xfrm>
-          <a:off x="0" y="0"/>
-          <a:ext cx="0" cy="0"/>
-          <a:chOff x="0" y="0"/>
-          <a:chExt cx="0" cy="0"/>
-        </a:xfrm>
-      </p:grpSpPr>
-      <p:sp>
-        <p:nvSpPr>
-          <p:cNvPr id="2" name="标题 1"/>
-          <p:cNvSpPr>
-            <a:spLocks noGrp="1"/>
-          </p:cNvSpPr>
-          <p:nvPr>
-            <p:ph type="title"/>
-          </p:nvPr>
-        </p:nvSpPr>
-        <p:spPr/>
-        <p:txBody>
-          <a:bodyPr/>
-          <a:lstStyle/>
-          <a:p>
-            <a:r>
-              <a:rPr lang="zh-CN" altLang="en-US" smtClean="0"/>
-              <a:t>单击此处编辑母版标题样式</a:t>
-            </a:r>
-            <a:endParaRPr lang="zh-CN" altLang="en-US"/>
-          </a:p>
-        </p:txBody>
-      </p:sp>
-      <p:sp>
-        <p:nvSpPr>
-          <p:cNvPr id="3" name="内容占位符 2"/>
-          <p:cNvSpPr>
-            <a:spLocks noGrp="1"/>
-          </p:cNvSpPr>
-          <p:nvPr>
-            <p:ph sz="half" idx="1"/>
-          </p:nvPr>
-        </p:nvSpPr>
-        <p:spPr>
-          <a:xfrm>
-            <a:off x="457200" y="1200151"/>
-            <a:ext cx="4038600" cy="3394472"/>
-          </a:xfrm>
-        </p:spPr>
-        <p:txBody>
-          <a:bodyPr/>
-          <a:lstStyle>
-            <a:lvl1pPr>
-              <a:defRPr sz="2800"/>
-            </a:lvl1pPr>
-            <a:lvl2pPr>
-              <a:defRPr sz="2400"/>
-            </a:lvl2pPr>
-            <a:lvl3pPr>
-              <a:defRPr sz="2000"/>
-            </a:lvl3pPr>
-            <a:lvl4pPr>
-              <a:defRPr sz="1800"/>
-            </a:lvl4pPr>
-            <a:lvl5pPr>
-              <a:defRPr sz="1800"/>
-            </a:lvl5pPr>
-            <a:lvl6pPr>
-              <a:defRPr sz="1800"/>
-            </a:lvl6pPr>
-            <a:lvl7pPr>
-              <a:defRPr sz="1800"/>
-            </a:lvl7pPr>
-            <a:lvl8pPr>
-              <a:defRPr sz="1800"/>
-            </a:lvl8pPr>
-            <a:lvl9pPr>
-              <a:defRPr sz="1800"/>
-            </a:lvl9pPr>
-          </a:lstStyle>
-          <a:p>
-            <a:pPr lvl="0"/>
-            <a:r>
-              <a:rPr lang="zh-CN" altLang="en-US" smtClean="0"/>
-              <a:t>单击此处编辑母版文本样式</a:t>
-            </a:r>
-          </a:p>
-          <a:p>
-            <a:pPr lvl="1"/>
-            <a:r>
-              <a:rPr lang="zh-CN" altLang="en-US" smtClean="0"/>
-              <a:t>第二级</a:t>
-            </a:r>
-          </a:p>
-          <a:p>
-            <a:pPr lvl="2"/>
-            <a:r>
-              <a:rPr lang="zh-CN" altLang="en-US" smtClean="0"/>
-              <a:t>第三级</a:t>
-            </a:r>
-          </a:p>
-          <a:p>
-            <a:pPr lvl="3"/>
-            <a:r>
-              <a:rPr lang="zh-CN" altLang="en-US" smtClean="0"/>
-              <a:t>第四级</a:t>
-            </a:r>
-          </a:p>
-          <a:p>
-            <a:pPr lvl="4"/>
-            <a:r>
-              <a:rPr lang="zh-CN" altLang="en-US" smtClean="0"/>
-              <a:t>第五级</a:t>
-            </a:r>
-            <a:endParaRPr lang="zh-CN" altLang="en-US"/>
-          </a:p>
-        </p:txBody>
-      </p:sp>
-      <p:sp>
-        <p:nvSpPr>
-          <p:cNvPr id="4" name="内容占位符 3"/>
-          <p:cNvSpPr>
-            <a:spLocks noGrp="1"/>
-          </p:cNvSpPr>
-          <p:nvPr>
-            <p:ph sz="half" idx="2"/>
-          </p:nvPr>
-        </p:nvSpPr>
-        <p:spPr>
-          <a:xfrm>
-            <a:off x="4648200" y="1200151"/>
-            <a:ext cx="4038600" cy="3394472"/>
-          </a:xfrm>
-        </p:spPr>
-        <p:txBody>
-          <a:bodyPr/>
-          <a:lstStyle>
-            <a:lvl1pPr>
-              <a:defRPr sz="2800"/>
-            </a:lvl1pPr>
-            <a:lvl2pPr>
-              <a:defRPr sz="2400"/>
-            </a:lvl2pPr>
-            <a:lvl3pPr>
-              <a:defRPr sz="2000"/>
-            </a:lvl3pPr>
-            <a:lvl4pPr>
-              <a:defRPr sz="1800"/>
-            </a:lvl4pPr>
-            <a:lvl5pPr>
-              <a:defRPr sz="1800"/>
-            </a:lvl5pPr>
-            <a:lvl6pPr>
-              <a:defRPr sz="1800"/>
-            </a:lvl6pPr>
-            <a:lvl7pPr>
-              <a:defRPr sz="1800"/>
-            </a:lvl7pPr>
-            <a:lvl8pPr>
-              <a:defRPr sz="1800"/>
-            </a:lvl8pPr>
-            <a:lvl9pPr>
-              <a:defRPr sz="1800"/>
-            </a:lvl9pPr>
-          </a:lstStyle>
-          <a:p>
-            <a:pPr lvl="0"/>
-            <a:r>
-              <a:rPr lang="zh-CN" altLang="en-US" smtClean="0"/>
-              <a:t>单击此处编辑母版文本样式</a:t>
-            </a:r>
-          </a:p>
-          <a:p>
-            <a:pPr lvl="1"/>
-            <a:r>
-              <a:rPr lang="zh-CN" altLang="en-US" smtClean="0"/>
-              <a:t>第二级</a:t>
-            </a:r>
-          </a:p>
-          <a:p>
-            <a:pPr lvl="2"/>
-            <a:r>
-              <a:rPr lang="zh-CN" altLang="en-US" smtClean="0"/>
-              <a:t>第三级</a:t>
-            </a:r>
-          </a:p>
-          <a:p>
-            <a:pPr lvl="3"/>
-            <a:r>
-              <a:rPr lang="zh-CN" altLang="en-US" smtClean="0"/>
-              <a:t>第四级</a:t>
-            </a:r>
-          </a:p>
-          <a:p>
-            <a:pPr lvl="4"/>
-            <a:r>
-              <a:rPr lang="zh-CN" altLang="en-US" smtClean="0"/>
-              <a:t>第五级</a:t>
-            </a:r>
-            <a:endParaRPr lang="zh-CN" altLang="en-US"/>
-          </a:p>
-        </p:txBody>
-      </p:sp>
-      <p:sp>
-        <p:nvSpPr>
-          <p:cNvPr id="5" name="日期占位符 4"/>
-          <p:cNvSpPr>
-            <a:spLocks noGrp="1"/>
-          </p:cNvSpPr>
-          <p:nvPr>
-            <p:ph type="dt" sz="half" idx="10"/>
-          </p:nvPr>
-        </p:nvSpPr>
-        <p:spPr/>
-        <p:txBody>
-          <a:bodyPr/>
-          <a:lstStyle/>
-          <a:p>
-            <a:fld id="{530820CF-B880-4189-942D-D702A7CBA730}" type="datetimeFigureOut">
-              <a:rPr lang="zh-CN" altLang="en-US" smtClean="0">
-                <a:solidFill>
-                  <a:prstClr val="black">
-                    <a:tint val="75000"/>
-                  </a:prstClr>
-                </a:solidFill>
-              </a:rPr>
-              <a:pPr/>
-              <a:t>2024/8/12</a:t>
-            </a:fld>
-            <a:endParaRPr lang="zh-CN" altLang="en-US">
-              <a:solidFill>
-                <a:prstClr val="black">
-                  <a:tint val="75000"/>
-                </a:prstClr>
-              </a:solidFill>
-            </a:endParaRPr>
-          </a:p>
-        </p:txBody>
-      </p:sp>
-      <p:sp>
-        <p:nvSpPr>
-          <p:cNvPr id="6" name="页脚占位符 5"/>
-          <p:cNvSpPr>
-            <a:spLocks noGrp="1"/>
-          </p:cNvSpPr>
-          <p:nvPr>
-            <p:ph type="ftr" sz="quarter" idx="11"/>
-          </p:nvPr>
-        </p:nvSpPr>
-        <p:spPr/>
-        <p:txBody>
-          <a:bodyPr/>
-          <a:lstStyle/>
-          <a:p>
-            <a:endParaRPr lang="zh-CN" altLang="en-US">
-              <a:solidFill>
-                <a:prstClr val="black">
-                  <a:tint val="75000"/>
-                </a:prstClr>
-              </a:solidFill>
-            </a:endParaRPr>
-          </a:p>
-        </p:txBody>
-      </p:sp>
-      <p:sp>
-        <p:nvSpPr>
-          <p:cNvPr id="7" name="灯片编号占位符 6"/>
-          <p:cNvSpPr>
-            <a:spLocks noGrp="1"/>
-          </p:cNvSpPr>
-          <p:nvPr>
-            <p:ph type="sldNum" sz="quarter" idx="12"/>
-          </p:nvPr>
-        </p:nvSpPr>
-        <p:spPr/>
-        <p:txBody>
-          <a:bodyPr/>
-          <a:lstStyle/>
-          <a:p>
-            <a:fld id="{0C913308-F349-4B6D-A68A-DD1791B4A57B}" type="slidenum">
-              <a:rPr lang="zh-CN" altLang="en-US" smtClean="0">
-                <a:solidFill>
-                  <a:prstClr val="black">
-                    <a:tint val="75000"/>
-                  </a:prstClr>
-                </a:solidFill>
-              </a:rPr>
-              <a:pPr/>
-              <a:t>‹#›</a:t>
-            </a:fld>
-            <a:endParaRPr lang="zh-CN" altLang="en-US">
-              <a:solidFill>
-                <a:prstClr val="black">
-                  <a:tint val="75000"/>
-                </a:prstClr>
-              </a:solidFill>
-            </a:endParaRPr>
-          </a:p>
-        </p:txBody>
-      </p:sp>
-    </p:spTree>
-    <p:extLst>
-      <p:ext uri="{BB962C8B-B14F-4D97-AF65-F5344CB8AC3E}">
-        <p14:creationId xmlns:p14="http://schemas.microsoft.com/office/powerpoint/2010/main" val="3938375087"/>
-      </p:ext>
-    </p:extLst>
-  </p:cSld>
-  <p:clrMapOvr>
-    <a:masterClrMapping/>
-  </p:clrMapOvr>
-</p:sldLayout>
-</file>
-
-<file path=ppt/slideLayouts/slideLayout23.xml><?xml version="1.0" encoding="utf-8"?>
-<p:sldLayout xmlns:a="http://schemas.openxmlformats.org/drawingml/2006/main" xmlns:r="http://schemas.openxmlformats.org/officeDocument/2006/relationships" xmlns:p="http://schemas.openxmlformats.org/presentationml/2006/main" type="twoTxTwoObj" preserve="1">
-  <p:cSld name="比较">
-    <p:spTree>
-      <p:nvGrpSpPr>
-        <p:cNvPr id="1" name=""/>
-        <p:cNvGrpSpPr/>
-        <p:nvPr/>
-      </p:nvGrpSpPr>
-      <p:grpSpPr>
-        <a:xfrm>
-          <a:off x="0" y="0"/>
-          <a:ext cx="0" cy="0"/>
-          <a:chOff x="0" y="0"/>
-          <a:chExt cx="0" cy="0"/>
-        </a:xfrm>
-      </p:grpSpPr>
-      <p:sp>
-        <p:nvSpPr>
-          <p:cNvPr id="2" name="标题 1"/>
-          <p:cNvSpPr>
-            <a:spLocks noGrp="1"/>
-          </p:cNvSpPr>
-          <p:nvPr>
-            <p:ph type="title"/>
-          </p:nvPr>
-        </p:nvSpPr>
-        <p:spPr/>
-        <p:txBody>
-          <a:bodyPr/>
-          <a:lstStyle>
-            <a:lvl1pPr>
-              <a:defRPr/>
-            </a:lvl1pPr>
-          </a:lstStyle>
-          <a:p>
-            <a:r>
-              <a:rPr lang="zh-CN" altLang="en-US" smtClean="0"/>
-              <a:t>单击此处编辑母版标题样式</a:t>
-            </a:r>
-            <a:endParaRPr lang="zh-CN" altLang="en-US"/>
-          </a:p>
-        </p:txBody>
-      </p:sp>
-      <p:sp>
-        <p:nvSpPr>
-          <p:cNvPr id="3" name="文本占位符 2"/>
-          <p:cNvSpPr>
-            <a:spLocks noGrp="1"/>
-          </p:cNvSpPr>
-          <p:nvPr>
-            <p:ph type="body" idx="1"/>
-          </p:nvPr>
-        </p:nvSpPr>
-        <p:spPr>
-          <a:xfrm>
-            <a:off x="457200" y="1151335"/>
-            <a:ext cx="4040188" cy="479822"/>
-          </a:xfrm>
-        </p:spPr>
-        <p:txBody>
-          <a:bodyPr anchor="b"/>
-          <a:lstStyle>
-            <a:lvl1pPr marL="0" indent="0">
-              <a:buNone/>
-              <a:defRPr sz="2400" b="1"/>
-            </a:lvl1pPr>
-            <a:lvl2pPr marL="457200" indent="0">
-              <a:buNone/>
-              <a:defRPr sz="2000" b="1"/>
-            </a:lvl2pPr>
-            <a:lvl3pPr marL="914400" indent="0">
-              <a:buNone/>
-              <a:defRPr sz="1800" b="1"/>
-            </a:lvl3pPr>
-            <a:lvl4pPr marL="1371600" indent="0">
-              <a:buNone/>
-              <a:defRPr sz="1600" b="1"/>
-            </a:lvl4pPr>
-            <a:lvl5pPr marL="1828800" indent="0">
-              <a:buNone/>
-              <a:defRPr sz="1600" b="1"/>
-            </a:lvl5pPr>
-            <a:lvl6pPr marL="2286000" indent="0">
-              <a:buNone/>
-              <a:defRPr sz="1600" b="1"/>
-            </a:lvl6pPr>
-            <a:lvl7pPr marL="2743200" indent="0">
-              <a:buNone/>
-              <a:defRPr sz="1600" b="1"/>
-            </a:lvl7pPr>
-            <a:lvl8pPr marL="3200400" indent="0">
-              <a:buNone/>
-              <a:defRPr sz="1600" b="1"/>
-            </a:lvl8pPr>
-            <a:lvl9pPr marL="3657600" indent="0">
-              <a:buNone/>
-              <a:defRPr sz="1600" b="1"/>
-            </a:lvl9pPr>
-          </a:lstStyle>
-          <a:p>
-            <a:pPr lvl="0"/>
-            <a:r>
-              <a:rPr lang="zh-CN" altLang="en-US" smtClean="0"/>
-              <a:t>单击此处编辑母版文本样式</a:t>
-            </a:r>
-          </a:p>
-        </p:txBody>
-      </p:sp>
-      <p:sp>
-        <p:nvSpPr>
-          <p:cNvPr id="4" name="内容占位符 3"/>
-          <p:cNvSpPr>
-            <a:spLocks noGrp="1"/>
-          </p:cNvSpPr>
-          <p:nvPr>
-            <p:ph sz="half" idx="2"/>
-          </p:nvPr>
-        </p:nvSpPr>
-        <p:spPr>
-          <a:xfrm>
-            <a:off x="457200" y="1631156"/>
-            <a:ext cx="4040188" cy="2963466"/>
-          </a:xfrm>
-        </p:spPr>
-        <p:txBody>
-          <a:bodyPr/>
-          <a:lstStyle>
-            <a:lvl1pPr>
-              <a:defRPr sz="2400"/>
-            </a:lvl1pPr>
-            <a:lvl2pPr>
-              <a:defRPr sz="2000"/>
-            </a:lvl2pPr>
-            <a:lvl3pPr>
-              <a:defRPr sz="1800"/>
-            </a:lvl3pPr>
-            <a:lvl4pPr>
-              <a:defRPr sz="1600"/>
-            </a:lvl4pPr>
-            <a:lvl5pPr>
-              <a:defRPr sz="1600"/>
-            </a:lvl5pPr>
-            <a:lvl6pPr>
-              <a:defRPr sz="1600"/>
-            </a:lvl6pPr>
-            <a:lvl7pPr>
-              <a:defRPr sz="1600"/>
-            </a:lvl7pPr>
-            <a:lvl8pPr>
-              <a:defRPr sz="1600"/>
-            </a:lvl8pPr>
-            <a:lvl9pPr>
-              <a:defRPr sz="1600"/>
-            </a:lvl9pPr>
-          </a:lstStyle>
-          <a:p>
-            <a:pPr lvl="0"/>
-            <a:r>
-              <a:rPr lang="zh-CN" altLang="en-US" smtClean="0"/>
-              <a:t>单击此处编辑母版文本样式</a:t>
-            </a:r>
-          </a:p>
-          <a:p>
-            <a:pPr lvl="1"/>
-            <a:r>
-              <a:rPr lang="zh-CN" altLang="en-US" smtClean="0"/>
-              <a:t>第二级</a:t>
-            </a:r>
-          </a:p>
-          <a:p>
-            <a:pPr lvl="2"/>
-            <a:r>
-              <a:rPr lang="zh-CN" altLang="en-US" smtClean="0"/>
-              <a:t>第三级</a:t>
-            </a:r>
-          </a:p>
-          <a:p>
-            <a:pPr lvl="3"/>
-            <a:r>
-              <a:rPr lang="zh-CN" altLang="en-US" smtClean="0"/>
-              <a:t>第四级</a:t>
-            </a:r>
-          </a:p>
-          <a:p>
-            <a:pPr lvl="4"/>
-            <a:r>
-              <a:rPr lang="zh-CN" altLang="en-US" smtClean="0"/>
-              <a:t>第五级</a:t>
-            </a:r>
-            <a:endParaRPr lang="zh-CN" altLang="en-US"/>
-          </a:p>
-        </p:txBody>
-      </p:sp>
-      <p:sp>
-        <p:nvSpPr>
-          <p:cNvPr id="5" name="文本占位符 4"/>
-          <p:cNvSpPr>
-            <a:spLocks noGrp="1"/>
-          </p:cNvSpPr>
-          <p:nvPr>
-            <p:ph type="body" sz="quarter" idx="3"/>
-          </p:nvPr>
-        </p:nvSpPr>
-        <p:spPr>
-          <a:xfrm>
-            <a:off x="4645026" y="1151335"/>
-            <a:ext cx="4041775" cy="479822"/>
-          </a:xfrm>
-        </p:spPr>
-        <p:txBody>
-          <a:bodyPr anchor="b"/>
-          <a:lstStyle>
-            <a:lvl1pPr marL="0" indent="0">
-              <a:buNone/>
-              <a:defRPr sz="2400" b="1"/>
-            </a:lvl1pPr>
-            <a:lvl2pPr marL="457200" indent="0">
-              <a:buNone/>
-              <a:defRPr sz="2000" b="1"/>
-            </a:lvl2pPr>
-            <a:lvl3pPr marL="914400" indent="0">
-              <a:buNone/>
-              <a:defRPr sz="1800" b="1"/>
-            </a:lvl3pPr>
-            <a:lvl4pPr marL="1371600" indent="0">
-              <a:buNone/>
-              <a:defRPr sz="1600" b="1"/>
-            </a:lvl4pPr>
-            <a:lvl5pPr marL="1828800" indent="0">
-              <a:buNone/>
-              <a:defRPr sz="1600" b="1"/>
-            </a:lvl5pPr>
-            <a:lvl6pPr marL="2286000" indent="0">
-              <a:buNone/>
-              <a:defRPr sz="1600" b="1"/>
-            </a:lvl6pPr>
-            <a:lvl7pPr marL="2743200" indent="0">
-              <a:buNone/>
-              <a:defRPr sz="1600" b="1"/>
-            </a:lvl7pPr>
-            <a:lvl8pPr marL="3200400" indent="0">
-              <a:buNone/>
-              <a:defRPr sz="1600" b="1"/>
-            </a:lvl8pPr>
-            <a:lvl9pPr marL="3657600" indent="0">
-              <a:buNone/>
-              <a:defRPr sz="1600" b="1"/>
-            </a:lvl9pPr>
-          </a:lstStyle>
-          <a:p>
-            <a:pPr lvl="0"/>
-            <a:r>
-              <a:rPr lang="zh-CN" altLang="en-US" smtClean="0"/>
-              <a:t>单击此处编辑母版文本样式</a:t>
-            </a:r>
-          </a:p>
-        </p:txBody>
-      </p:sp>
-      <p:sp>
-        <p:nvSpPr>
-          <p:cNvPr id="6" name="内容占位符 5"/>
-          <p:cNvSpPr>
-            <a:spLocks noGrp="1"/>
-          </p:cNvSpPr>
-          <p:nvPr>
-            <p:ph sz="quarter" idx="4"/>
-          </p:nvPr>
-        </p:nvSpPr>
-        <p:spPr>
-          <a:xfrm>
-            <a:off x="4645026" y="1631156"/>
-            <a:ext cx="4041775" cy="2963466"/>
-          </a:xfrm>
-        </p:spPr>
-        <p:txBody>
-          <a:bodyPr/>
-          <a:lstStyle>
-            <a:lvl1pPr>
-              <a:defRPr sz="2400"/>
-            </a:lvl1pPr>
-            <a:lvl2pPr>
-              <a:defRPr sz="2000"/>
-            </a:lvl2pPr>
-            <a:lvl3pPr>
-              <a:defRPr sz="1800"/>
-            </a:lvl3pPr>
-            <a:lvl4pPr>
-              <a:defRPr sz="1600"/>
-            </a:lvl4pPr>
-            <a:lvl5pPr>
-              <a:defRPr sz="1600"/>
-            </a:lvl5pPr>
-            <a:lvl6pPr>
-              <a:defRPr sz="1600"/>
-            </a:lvl6pPr>
-            <a:lvl7pPr>
-              <a:defRPr sz="1600"/>
-            </a:lvl7pPr>
-            <a:lvl8pPr>
-              <a:defRPr sz="1600"/>
-            </a:lvl8pPr>
-            <a:lvl9pPr>
-              <a:defRPr sz="1600"/>
-            </a:lvl9pPr>
-          </a:lstStyle>
-          <a:p>
-            <a:pPr lvl="0"/>
-            <a:r>
-              <a:rPr lang="zh-CN" altLang="en-US" smtClean="0"/>
-              <a:t>单击此处编辑母版文本样式</a:t>
-            </a:r>
-          </a:p>
-          <a:p>
-            <a:pPr lvl="1"/>
-            <a:r>
-              <a:rPr lang="zh-CN" altLang="en-US" smtClean="0"/>
-              <a:t>第二级</a:t>
-            </a:r>
-          </a:p>
-          <a:p>
-            <a:pPr lvl="2"/>
-            <a:r>
-              <a:rPr lang="zh-CN" altLang="en-US" smtClean="0"/>
-              <a:t>第三级</a:t>
-            </a:r>
-          </a:p>
-          <a:p>
-            <a:pPr lvl="3"/>
-            <a:r>
-              <a:rPr lang="zh-CN" altLang="en-US" smtClean="0"/>
-              <a:t>第四级</a:t>
-            </a:r>
-          </a:p>
-          <a:p>
-            <a:pPr lvl="4"/>
-            <a:r>
-              <a:rPr lang="zh-CN" altLang="en-US" smtClean="0"/>
-              <a:t>第五级</a:t>
-            </a:r>
-            <a:endParaRPr lang="zh-CN" altLang="en-US"/>
-          </a:p>
-        </p:txBody>
-      </p:sp>
-      <p:sp>
-        <p:nvSpPr>
-          <p:cNvPr id="7" name="日期占位符 6"/>
-          <p:cNvSpPr>
-            <a:spLocks noGrp="1"/>
-          </p:cNvSpPr>
-          <p:nvPr>
-            <p:ph type="dt" sz="half" idx="10"/>
-          </p:nvPr>
-        </p:nvSpPr>
-        <p:spPr/>
-        <p:txBody>
-          <a:bodyPr/>
-          <a:lstStyle/>
-          <a:p>
-            <a:fld id="{530820CF-B880-4189-942D-D702A7CBA730}" type="datetimeFigureOut">
-              <a:rPr lang="zh-CN" altLang="en-US" smtClean="0">
-                <a:solidFill>
-                  <a:prstClr val="black">
-                    <a:tint val="75000"/>
-                  </a:prstClr>
-                </a:solidFill>
-              </a:rPr>
-              <a:pPr/>
-              <a:t>2024/8/12</a:t>
-            </a:fld>
-            <a:endParaRPr lang="zh-CN" altLang="en-US">
-              <a:solidFill>
-                <a:prstClr val="black">
-                  <a:tint val="75000"/>
-                </a:prstClr>
-              </a:solidFill>
-            </a:endParaRPr>
-          </a:p>
-        </p:txBody>
-      </p:sp>
-      <p:sp>
-        <p:nvSpPr>
-          <p:cNvPr id="8" name="页脚占位符 7"/>
-          <p:cNvSpPr>
-            <a:spLocks noGrp="1"/>
-          </p:cNvSpPr>
-          <p:nvPr>
-            <p:ph type="ftr" sz="quarter" idx="11"/>
-          </p:nvPr>
-        </p:nvSpPr>
-        <p:spPr/>
-        <p:txBody>
-          <a:bodyPr/>
-          <a:lstStyle/>
-          <a:p>
-            <a:endParaRPr lang="zh-CN" altLang="en-US">
-              <a:solidFill>
-                <a:prstClr val="black">
-                  <a:tint val="75000"/>
-                </a:prstClr>
-              </a:solidFill>
-            </a:endParaRPr>
-          </a:p>
-        </p:txBody>
-      </p:sp>
-      <p:sp>
-        <p:nvSpPr>
-          <p:cNvPr id="9" name="灯片编号占位符 8"/>
-          <p:cNvSpPr>
-            <a:spLocks noGrp="1"/>
-          </p:cNvSpPr>
-          <p:nvPr>
-            <p:ph type="sldNum" sz="quarter" idx="12"/>
-          </p:nvPr>
-        </p:nvSpPr>
-        <p:spPr/>
-        <p:txBody>
-          <a:bodyPr/>
-          <a:lstStyle/>
-          <a:p>
-            <a:fld id="{0C913308-F349-4B6D-A68A-DD1791B4A57B}" type="slidenum">
-              <a:rPr lang="zh-CN" altLang="en-US" smtClean="0">
-                <a:solidFill>
-                  <a:prstClr val="black">
-                    <a:tint val="75000"/>
-                  </a:prstClr>
-                </a:solidFill>
-              </a:rPr>
-              <a:pPr/>
-              <a:t>‹#›</a:t>
-            </a:fld>
-            <a:endParaRPr lang="zh-CN" altLang="en-US">
-              <a:solidFill>
-                <a:prstClr val="black">
-                  <a:tint val="75000"/>
-                </a:prstClr>
-              </a:solidFill>
-            </a:endParaRPr>
-          </a:p>
-        </p:txBody>
-      </p:sp>
-    </p:spTree>
-    <p:extLst>
-      <p:ext uri="{BB962C8B-B14F-4D97-AF65-F5344CB8AC3E}">
-        <p14:creationId xmlns:p14="http://schemas.microsoft.com/office/powerpoint/2010/main" val="3920962272"/>
-      </p:ext>
-    </p:extLst>
-  </p:cSld>
-  <p:clrMapOvr>
-    <a:masterClrMapping/>
-  </p:clrMapOvr>
-</p:sldLayout>
-</file>
-
-<file path=ppt/slideLayouts/slideLayout24.xml><?xml version="1.0" encoding="utf-8"?>
-<p:sldLayout xmlns:a="http://schemas.openxmlformats.org/drawingml/2006/main" xmlns:r="http://schemas.openxmlformats.org/officeDocument/2006/relationships" xmlns:p="http://schemas.openxmlformats.org/presentationml/2006/main" type="titleOnly" preserve="1">
-  <p:cSld name="仅标题">
-    <p:spTree>
-      <p:nvGrpSpPr>
-        <p:cNvPr id="1" name=""/>
-        <p:cNvGrpSpPr/>
-        <p:nvPr/>
-      </p:nvGrpSpPr>
-      <p:grpSpPr>
-        <a:xfrm>
-          <a:off x="0" y="0"/>
-          <a:ext cx="0" cy="0"/>
-          <a:chOff x="0" y="0"/>
-          <a:chExt cx="0" cy="0"/>
-        </a:xfrm>
-      </p:grpSpPr>
-      <p:sp>
-        <p:nvSpPr>
-          <p:cNvPr id="2" name="标题 1"/>
-          <p:cNvSpPr>
-            <a:spLocks noGrp="1"/>
-          </p:cNvSpPr>
-          <p:nvPr>
-            <p:ph type="title"/>
-          </p:nvPr>
-        </p:nvSpPr>
-        <p:spPr/>
-        <p:txBody>
-          <a:bodyPr/>
-          <a:lstStyle/>
-          <a:p>
-            <a:r>
-              <a:rPr lang="zh-CN" altLang="en-US" smtClean="0"/>
-              <a:t>单击此处编辑母版标题样式</a:t>
-            </a:r>
-            <a:endParaRPr lang="zh-CN" altLang="en-US"/>
-          </a:p>
-        </p:txBody>
-      </p:sp>
-      <p:sp>
-        <p:nvSpPr>
-          <p:cNvPr id="3" name="日期占位符 2"/>
-          <p:cNvSpPr>
-            <a:spLocks noGrp="1"/>
-          </p:cNvSpPr>
-          <p:nvPr>
-            <p:ph type="dt" sz="half" idx="10"/>
-          </p:nvPr>
-        </p:nvSpPr>
-        <p:spPr/>
-        <p:txBody>
-          <a:bodyPr/>
-          <a:lstStyle/>
-          <a:p>
-            <a:fld id="{530820CF-B880-4189-942D-D702A7CBA730}" type="datetimeFigureOut">
-              <a:rPr lang="zh-CN" altLang="en-US" smtClean="0">
-                <a:solidFill>
-                  <a:prstClr val="black">
-                    <a:tint val="75000"/>
-                  </a:prstClr>
-                </a:solidFill>
-              </a:rPr>
-              <a:pPr/>
-              <a:t>2024/8/12</a:t>
-            </a:fld>
-            <a:endParaRPr lang="zh-CN" altLang="en-US">
-              <a:solidFill>
-                <a:prstClr val="black">
-                  <a:tint val="75000"/>
-                </a:prstClr>
-              </a:solidFill>
-            </a:endParaRPr>
-          </a:p>
-        </p:txBody>
-      </p:sp>
-      <p:sp>
-        <p:nvSpPr>
-          <p:cNvPr id="4" name="页脚占位符 3"/>
-          <p:cNvSpPr>
-            <a:spLocks noGrp="1"/>
-          </p:cNvSpPr>
-          <p:nvPr>
-            <p:ph type="ftr" sz="quarter" idx="11"/>
-          </p:nvPr>
-        </p:nvSpPr>
-        <p:spPr/>
-        <p:txBody>
-          <a:bodyPr/>
-          <a:lstStyle/>
-          <a:p>
-            <a:endParaRPr lang="zh-CN" altLang="en-US">
-              <a:solidFill>
-                <a:prstClr val="black">
-                  <a:tint val="75000"/>
-                </a:prstClr>
-              </a:solidFill>
-            </a:endParaRPr>
-          </a:p>
-        </p:txBody>
-      </p:sp>
-      <p:sp>
-        <p:nvSpPr>
-          <p:cNvPr id="5" name="灯片编号占位符 4"/>
-          <p:cNvSpPr>
-            <a:spLocks noGrp="1"/>
-          </p:cNvSpPr>
-          <p:nvPr>
-            <p:ph type="sldNum" sz="quarter" idx="12"/>
-          </p:nvPr>
-        </p:nvSpPr>
-        <p:spPr/>
-        <p:txBody>
-          <a:bodyPr/>
-          <a:lstStyle/>
-          <a:p>
-            <a:fld id="{0C913308-F349-4B6D-A68A-DD1791B4A57B}" type="slidenum">
-              <a:rPr lang="zh-CN" altLang="en-US" smtClean="0">
-                <a:solidFill>
-                  <a:prstClr val="black">
-                    <a:tint val="75000"/>
-                  </a:prstClr>
-                </a:solidFill>
-              </a:rPr>
-              <a:pPr/>
-              <a:t>‹#›</a:t>
-            </a:fld>
-            <a:endParaRPr lang="zh-CN" altLang="en-US">
-              <a:solidFill>
-                <a:prstClr val="black">
-                  <a:tint val="75000"/>
-                </a:prstClr>
-              </a:solidFill>
-            </a:endParaRPr>
-          </a:p>
-        </p:txBody>
-      </p:sp>
-    </p:spTree>
-    <p:extLst>
-      <p:ext uri="{BB962C8B-B14F-4D97-AF65-F5344CB8AC3E}">
-        <p14:creationId xmlns:p14="http://schemas.microsoft.com/office/powerpoint/2010/main" val="3179912639"/>
-      </p:ext>
-    </p:extLst>
-  </p:cSld>
-  <p:clrMapOvr>
-    <a:masterClrMapping/>
-  </p:clrMapOvr>
-</p:sldLayout>
-</file>
-
-<file path=ppt/slideLayouts/slideLayout25.xml><?xml version="1.0" encoding="utf-8"?>
-<p:sldLayout xmlns:a="http://schemas.openxmlformats.org/drawingml/2006/main" xmlns:r="http://schemas.openxmlformats.org/officeDocument/2006/relationships" xmlns:p="http://schemas.openxmlformats.org/presentationml/2006/main" type="blank" preserve="1">
-  <p:cSld name="空白">
-    <p:spTree>
-      <p:nvGrpSpPr>
-        <p:cNvPr id="1" name=""/>
-        <p:cNvGrpSpPr/>
-        <p:nvPr/>
-      </p:nvGrpSpPr>
-      <p:grpSpPr>
-        <a:xfrm>
-          <a:off x="0" y="0"/>
-          <a:ext cx="0" cy="0"/>
-          <a:chOff x="0" y="0"/>
-          <a:chExt cx="0" cy="0"/>
-        </a:xfrm>
-      </p:grpSpPr>
-      <p:sp>
-        <p:nvSpPr>
-          <p:cNvPr id="2" name="日期占位符 1"/>
-          <p:cNvSpPr>
-            <a:spLocks noGrp="1"/>
-          </p:cNvSpPr>
-          <p:nvPr>
-            <p:ph type="dt" sz="half" idx="10"/>
-          </p:nvPr>
-        </p:nvSpPr>
-        <p:spPr/>
-        <p:txBody>
-          <a:bodyPr/>
-          <a:lstStyle/>
-          <a:p>
-            <a:fld id="{530820CF-B880-4189-942D-D702A7CBA730}" type="datetimeFigureOut">
-              <a:rPr lang="zh-CN" altLang="en-US" smtClean="0">
-                <a:solidFill>
-                  <a:prstClr val="black">
-                    <a:tint val="75000"/>
-                  </a:prstClr>
-                </a:solidFill>
-              </a:rPr>
-              <a:pPr/>
-              <a:t>2024/8/12</a:t>
-            </a:fld>
-            <a:endParaRPr lang="zh-CN" altLang="en-US">
-              <a:solidFill>
-                <a:prstClr val="black">
-                  <a:tint val="75000"/>
-                </a:prstClr>
-              </a:solidFill>
-            </a:endParaRPr>
-          </a:p>
-        </p:txBody>
-      </p:sp>
-      <p:sp>
-        <p:nvSpPr>
-          <p:cNvPr id="3" name="页脚占位符 2"/>
-          <p:cNvSpPr>
-            <a:spLocks noGrp="1"/>
-          </p:cNvSpPr>
-          <p:nvPr>
-            <p:ph type="ftr" sz="quarter" idx="11"/>
-          </p:nvPr>
-        </p:nvSpPr>
-        <p:spPr/>
-        <p:txBody>
-          <a:bodyPr/>
-          <a:lstStyle/>
-          <a:p>
-            <a:endParaRPr lang="zh-CN" altLang="en-US">
-              <a:solidFill>
-                <a:prstClr val="black">
-                  <a:tint val="75000"/>
-                </a:prstClr>
-              </a:solidFill>
-            </a:endParaRPr>
-          </a:p>
-        </p:txBody>
-      </p:sp>
-      <p:sp>
-        <p:nvSpPr>
-          <p:cNvPr id="4" name="灯片编号占位符 3"/>
-          <p:cNvSpPr>
-            <a:spLocks noGrp="1"/>
-          </p:cNvSpPr>
-          <p:nvPr>
-            <p:ph type="sldNum" sz="quarter" idx="12"/>
-          </p:nvPr>
-        </p:nvSpPr>
-        <p:spPr/>
-        <p:txBody>
-          <a:bodyPr/>
-          <a:lstStyle/>
-          <a:p>
-            <a:fld id="{0C913308-F349-4B6D-A68A-DD1791B4A57B}" type="slidenum">
-              <a:rPr lang="zh-CN" altLang="en-US" smtClean="0">
-                <a:solidFill>
-                  <a:prstClr val="black">
-                    <a:tint val="75000"/>
-                  </a:prstClr>
-                </a:solidFill>
-              </a:rPr>
-              <a:pPr/>
-              <a:t>‹#›</a:t>
-            </a:fld>
-            <a:endParaRPr lang="zh-CN" altLang="en-US">
-              <a:solidFill>
-                <a:prstClr val="black">
-                  <a:tint val="75000"/>
-                </a:prstClr>
-              </a:solidFill>
-            </a:endParaRPr>
-          </a:p>
-        </p:txBody>
-      </p:sp>
-    </p:spTree>
-    <p:extLst>
-      <p:ext uri="{BB962C8B-B14F-4D97-AF65-F5344CB8AC3E}">
-        <p14:creationId xmlns:p14="http://schemas.microsoft.com/office/powerpoint/2010/main" val="2500496644"/>
-      </p:ext>
-    </p:extLst>
-  </p:cSld>
-  <p:clrMapOvr>
-    <a:masterClrMapping/>
-  </p:clrMapOvr>
-</p:sldLayout>
-</file>
-
-<file path=ppt/slideLayouts/slideLayout26.xml><?xml version="1.0" encoding="utf-8"?>
-<p:sldLayout xmlns:a="http://schemas.openxmlformats.org/drawingml/2006/main" xmlns:r="http://schemas.openxmlformats.org/officeDocument/2006/relationships" xmlns:p="http://schemas.openxmlformats.org/presentationml/2006/main" type="objTx" preserve="1">
-  <p:cSld name="内容与标题">
-    <p:spTree>
-      <p:nvGrpSpPr>
-        <p:cNvPr id="1" name=""/>
-        <p:cNvGrpSpPr/>
-        <p:nvPr/>
-      </p:nvGrpSpPr>
-      <p:grpSpPr>
-        <a:xfrm>
-          <a:off x="0" y="0"/>
-          <a:ext cx="0" cy="0"/>
-          <a:chOff x="0" y="0"/>
-          <a:chExt cx="0" cy="0"/>
-        </a:xfrm>
-      </p:grpSpPr>
-      <p:sp>
-        <p:nvSpPr>
-          <p:cNvPr id="2" name="标题 1"/>
-          <p:cNvSpPr>
-            <a:spLocks noGrp="1"/>
-          </p:cNvSpPr>
-          <p:nvPr>
-            <p:ph type="title"/>
-          </p:nvPr>
-        </p:nvSpPr>
-        <p:spPr>
-          <a:xfrm>
-            <a:off x="457201" y="204787"/>
-            <a:ext cx="3008313" cy="871538"/>
-          </a:xfrm>
-        </p:spPr>
-        <p:txBody>
-          <a:bodyPr anchor="b"/>
-          <a:lstStyle>
-            <a:lvl1pPr algn="l">
-              <a:defRPr sz="2000" b="1"/>
-            </a:lvl1pPr>
-          </a:lstStyle>
-          <a:p>
-            <a:r>
-              <a:rPr lang="zh-CN" altLang="en-US" smtClean="0"/>
-              <a:t>单击此处编辑母版标题样式</a:t>
-            </a:r>
-            <a:endParaRPr lang="zh-CN" altLang="en-US"/>
-          </a:p>
-        </p:txBody>
-      </p:sp>
-      <p:sp>
-        <p:nvSpPr>
-          <p:cNvPr id="3" name="内容占位符 2"/>
-          <p:cNvSpPr>
-            <a:spLocks noGrp="1"/>
-          </p:cNvSpPr>
-          <p:nvPr>
-            <p:ph idx="1"/>
-          </p:nvPr>
-        </p:nvSpPr>
-        <p:spPr>
-          <a:xfrm>
-            <a:off x="3575050" y="204788"/>
-            <a:ext cx="5111750" cy="4389835"/>
-          </a:xfrm>
-        </p:spPr>
-        <p:txBody>
-          <a:bodyPr/>
-          <a:lstStyle>
-            <a:lvl1pPr>
-              <a:defRPr sz="3200"/>
-            </a:lvl1pPr>
-            <a:lvl2pPr>
-              <a:defRPr sz="2800"/>
-            </a:lvl2pPr>
-            <a:lvl3pPr>
-              <a:defRPr sz="2400"/>
-            </a:lvl3pPr>
-            <a:lvl4pPr>
-              <a:defRPr sz="2000"/>
-            </a:lvl4pPr>
-            <a:lvl5pPr>
-              <a:defRPr sz="2000"/>
-            </a:lvl5pPr>
-            <a:lvl6pPr>
-              <a:defRPr sz="2000"/>
-            </a:lvl6pPr>
-            <a:lvl7pPr>
-              <a:defRPr sz="2000"/>
-            </a:lvl7pPr>
-            <a:lvl8pPr>
-              <a:defRPr sz="2000"/>
-            </a:lvl8pPr>
-            <a:lvl9pPr>
-              <a:defRPr sz="2000"/>
-            </a:lvl9pPr>
-          </a:lstStyle>
-          <a:p>
-            <a:pPr lvl="0"/>
-            <a:r>
-              <a:rPr lang="zh-CN" altLang="en-US" smtClean="0"/>
-              <a:t>单击此处编辑母版文本样式</a:t>
-            </a:r>
-          </a:p>
-          <a:p>
-            <a:pPr lvl="1"/>
-            <a:r>
-              <a:rPr lang="zh-CN" altLang="en-US" smtClean="0"/>
-              <a:t>第二级</a:t>
-            </a:r>
-          </a:p>
-          <a:p>
-            <a:pPr lvl="2"/>
-            <a:r>
-              <a:rPr lang="zh-CN" altLang="en-US" smtClean="0"/>
-              <a:t>第三级</a:t>
-            </a:r>
-          </a:p>
-          <a:p>
-            <a:pPr lvl="3"/>
-            <a:r>
-              <a:rPr lang="zh-CN" altLang="en-US" smtClean="0"/>
-              <a:t>第四级</a:t>
-            </a:r>
-          </a:p>
-          <a:p>
-            <a:pPr lvl="4"/>
-            <a:r>
-              <a:rPr lang="zh-CN" altLang="en-US" smtClean="0"/>
-              <a:t>第五级</a:t>
-            </a:r>
-            <a:endParaRPr lang="zh-CN" altLang="en-US"/>
-          </a:p>
-        </p:txBody>
-      </p:sp>
-      <p:sp>
-        <p:nvSpPr>
-          <p:cNvPr id="4" name="文本占位符 3"/>
-          <p:cNvSpPr>
-            <a:spLocks noGrp="1"/>
-          </p:cNvSpPr>
-          <p:nvPr>
-            <p:ph type="body" sz="half" idx="2"/>
-          </p:nvPr>
-        </p:nvSpPr>
-        <p:spPr>
-          <a:xfrm>
-            <a:off x="457201" y="1076326"/>
-            <a:ext cx="3008313" cy="3518297"/>
-          </a:xfrm>
-        </p:spPr>
-        <p:txBody>
-          <a:bodyPr/>
-          <a:lstStyle>
-            <a:lvl1pPr marL="0" indent="0">
-              <a:buNone/>
-              <a:defRPr sz="1400"/>
-            </a:lvl1pPr>
-            <a:lvl2pPr marL="457200" indent="0">
-              <a:buNone/>
-              <a:defRPr sz="1200"/>
-            </a:lvl2pPr>
-            <a:lvl3pPr marL="914400" indent="0">
-              <a:buNone/>
-              <a:defRPr sz="1000"/>
-            </a:lvl3pPr>
-            <a:lvl4pPr marL="1371600" indent="0">
-              <a:buNone/>
-              <a:defRPr sz="900"/>
-            </a:lvl4pPr>
-            <a:lvl5pPr marL="1828800" indent="0">
-              <a:buNone/>
-              <a:defRPr sz="900"/>
-            </a:lvl5pPr>
-            <a:lvl6pPr marL="2286000" indent="0">
-              <a:buNone/>
-              <a:defRPr sz="900"/>
-            </a:lvl6pPr>
-            <a:lvl7pPr marL="2743200" indent="0">
-              <a:buNone/>
-              <a:defRPr sz="900"/>
-            </a:lvl7pPr>
-            <a:lvl8pPr marL="3200400" indent="0">
-              <a:buNone/>
-              <a:defRPr sz="900"/>
-            </a:lvl8pPr>
-            <a:lvl9pPr marL="3657600" indent="0">
-              <a:buNone/>
-              <a:defRPr sz="900"/>
-            </a:lvl9pPr>
-          </a:lstStyle>
-          <a:p>
-            <a:pPr lvl="0"/>
-            <a:r>
-              <a:rPr lang="zh-CN" altLang="en-US" smtClean="0"/>
-              <a:t>单击此处编辑母版文本样式</a:t>
-            </a:r>
-          </a:p>
-        </p:txBody>
-      </p:sp>
-      <p:sp>
-        <p:nvSpPr>
-          <p:cNvPr id="5" name="日期占位符 4"/>
-          <p:cNvSpPr>
-            <a:spLocks noGrp="1"/>
-          </p:cNvSpPr>
-          <p:nvPr>
-            <p:ph type="dt" sz="half" idx="10"/>
-          </p:nvPr>
-        </p:nvSpPr>
-        <p:spPr/>
-        <p:txBody>
-          <a:bodyPr/>
-          <a:lstStyle/>
-          <a:p>
-            <a:fld id="{530820CF-B880-4189-942D-D702A7CBA730}" type="datetimeFigureOut">
-              <a:rPr lang="zh-CN" altLang="en-US" smtClean="0">
-                <a:solidFill>
-                  <a:prstClr val="black">
-                    <a:tint val="75000"/>
-                  </a:prstClr>
-                </a:solidFill>
-              </a:rPr>
-              <a:pPr/>
-              <a:t>2024/8/12</a:t>
-            </a:fld>
-            <a:endParaRPr lang="zh-CN" altLang="en-US">
-              <a:solidFill>
-                <a:prstClr val="black">
-                  <a:tint val="75000"/>
-                </a:prstClr>
-              </a:solidFill>
-            </a:endParaRPr>
-          </a:p>
-        </p:txBody>
-      </p:sp>
-      <p:sp>
-        <p:nvSpPr>
-          <p:cNvPr id="6" name="页脚占位符 5"/>
-          <p:cNvSpPr>
-            <a:spLocks noGrp="1"/>
-          </p:cNvSpPr>
-          <p:nvPr>
-            <p:ph type="ftr" sz="quarter" idx="11"/>
-          </p:nvPr>
-        </p:nvSpPr>
-        <p:spPr/>
-        <p:txBody>
-          <a:bodyPr/>
-          <a:lstStyle/>
-          <a:p>
-            <a:endParaRPr lang="zh-CN" altLang="en-US">
-              <a:solidFill>
-                <a:prstClr val="black">
-                  <a:tint val="75000"/>
-                </a:prstClr>
-              </a:solidFill>
-            </a:endParaRPr>
-          </a:p>
-        </p:txBody>
-      </p:sp>
-      <p:sp>
-        <p:nvSpPr>
-          <p:cNvPr id="7" name="灯片编号占位符 6"/>
-          <p:cNvSpPr>
-            <a:spLocks noGrp="1"/>
-          </p:cNvSpPr>
-          <p:nvPr>
-            <p:ph type="sldNum" sz="quarter" idx="12"/>
-          </p:nvPr>
-        </p:nvSpPr>
-        <p:spPr/>
-        <p:txBody>
-          <a:bodyPr/>
-          <a:lstStyle/>
-          <a:p>
-            <a:fld id="{0C913308-F349-4B6D-A68A-DD1791B4A57B}" type="slidenum">
-              <a:rPr lang="zh-CN" altLang="en-US" smtClean="0">
-                <a:solidFill>
-                  <a:prstClr val="black">
-                    <a:tint val="75000"/>
-                  </a:prstClr>
-                </a:solidFill>
-              </a:rPr>
-              <a:pPr/>
-              <a:t>‹#›</a:t>
-            </a:fld>
-            <a:endParaRPr lang="zh-CN" altLang="en-US">
-              <a:solidFill>
-                <a:prstClr val="black">
-                  <a:tint val="75000"/>
-                </a:prstClr>
-              </a:solidFill>
-            </a:endParaRPr>
-          </a:p>
-        </p:txBody>
-      </p:sp>
-    </p:spTree>
-    <p:extLst>
-      <p:ext uri="{BB962C8B-B14F-4D97-AF65-F5344CB8AC3E}">
-        <p14:creationId xmlns:p14="http://schemas.microsoft.com/office/powerpoint/2010/main" val="1609995132"/>
-      </p:ext>
-    </p:extLst>
-  </p:cSld>
-  <p:clrMapOvr>
-    <a:masterClrMapping/>
-  </p:clrMapOvr>
-</p:sldLayout>
-</file>
-
-<file path=ppt/slideLayouts/slideLayout27.xml><?xml version="1.0" encoding="utf-8"?>
-<p:sldLayout xmlns:a="http://schemas.openxmlformats.org/drawingml/2006/main" xmlns:r="http://schemas.openxmlformats.org/officeDocument/2006/relationships" xmlns:p="http://schemas.openxmlformats.org/presentationml/2006/main" type="picTx" preserve="1">
-  <p:cSld name="图片与标题">
-    <p:spTree>
-      <p:nvGrpSpPr>
-        <p:cNvPr id="1" name=""/>
-        <p:cNvGrpSpPr/>
-        <p:nvPr/>
-      </p:nvGrpSpPr>
-      <p:grpSpPr>
-        <a:xfrm>
-          <a:off x="0" y="0"/>
-          <a:ext cx="0" cy="0"/>
-          <a:chOff x="0" y="0"/>
-          <a:chExt cx="0" cy="0"/>
-        </a:xfrm>
-      </p:grpSpPr>
-      <p:sp>
-        <p:nvSpPr>
-          <p:cNvPr id="2" name="标题 1"/>
-          <p:cNvSpPr>
-            <a:spLocks noGrp="1"/>
-          </p:cNvSpPr>
-          <p:nvPr>
-            <p:ph type="title"/>
-          </p:nvPr>
-        </p:nvSpPr>
-        <p:spPr>
-          <a:xfrm>
-            <a:off x="1792288" y="3600450"/>
-            <a:ext cx="5486400" cy="425054"/>
-          </a:xfrm>
-        </p:spPr>
-        <p:txBody>
-          <a:bodyPr anchor="b"/>
-          <a:lstStyle>
-            <a:lvl1pPr algn="l">
-              <a:defRPr sz="2000" b="1"/>
-            </a:lvl1pPr>
-          </a:lstStyle>
-          <a:p>
-            <a:r>
-              <a:rPr lang="zh-CN" altLang="en-US" smtClean="0"/>
-              <a:t>单击此处编辑母版标题样式</a:t>
-            </a:r>
-            <a:endParaRPr lang="zh-CN" altLang="en-US"/>
-          </a:p>
-        </p:txBody>
-      </p:sp>
-      <p:sp>
-        <p:nvSpPr>
-          <p:cNvPr id="3" name="图片占位符 2"/>
-          <p:cNvSpPr>
-            <a:spLocks noGrp="1"/>
-          </p:cNvSpPr>
-          <p:nvPr>
-            <p:ph type="pic" idx="1"/>
-          </p:nvPr>
-        </p:nvSpPr>
-        <p:spPr>
-          <a:xfrm>
-            <a:off x="1792288" y="459581"/>
-            <a:ext cx="5486400" cy="3086100"/>
-          </a:xfrm>
-        </p:spPr>
-        <p:txBody>
-          <a:bodyPr/>
-          <a:lstStyle>
-            <a:lvl1pPr marL="0" indent="0">
-              <a:buNone/>
-              <a:defRPr sz="3200"/>
-            </a:lvl1pPr>
-            <a:lvl2pPr marL="457200" indent="0">
-              <a:buNone/>
-              <a:defRPr sz="2800"/>
-            </a:lvl2pPr>
-            <a:lvl3pPr marL="914400" indent="0">
-              <a:buNone/>
-              <a:defRPr sz="2400"/>
-            </a:lvl3pPr>
-            <a:lvl4pPr marL="1371600" indent="0">
-              <a:buNone/>
-              <a:defRPr sz="2000"/>
-            </a:lvl4pPr>
-            <a:lvl5pPr marL="1828800" indent="0">
-              <a:buNone/>
-              <a:defRPr sz="2000"/>
-            </a:lvl5pPr>
-            <a:lvl6pPr marL="2286000" indent="0">
-              <a:buNone/>
-              <a:defRPr sz="2000"/>
-            </a:lvl6pPr>
-            <a:lvl7pPr marL="2743200" indent="0">
-              <a:buNone/>
-              <a:defRPr sz="2000"/>
-            </a:lvl7pPr>
-            <a:lvl8pPr marL="3200400" indent="0">
-              <a:buNone/>
-              <a:defRPr sz="2000"/>
-            </a:lvl8pPr>
-            <a:lvl9pPr marL="3657600" indent="0">
-              <a:buNone/>
-              <a:defRPr sz="2000"/>
-            </a:lvl9pPr>
-          </a:lstStyle>
-          <a:p>
-            <a:endParaRPr lang="zh-CN" altLang="en-US"/>
-          </a:p>
-        </p:txBody>
-      </p:sp>
-      <p:sp>
-        <p:nvSpPr>
-          <p:cNvPr id="4" name="文本占位符 3"/>
-          <p:cNvSpPr>
-            <a:spLocks noGrp="1"/>
-          </p:cNvSpPr>
-          <p:nvPr>
-            <p:ph type="body" sz="half" idx="2"/>
-          </p:nvPr>
-        </p:nvSpPr>
-        <p:spPr>
-          <a:xfrm>
-            <a:off x="1792288" y="4025503"/>
-            <a:ext cx="5486400" cy="603647"/>
-          </a:xfrm>
-        </p:spPr>
-        <p:txBody>
-          <a:bodyPr/>
-          <a:lstStyle>
-            <a:lvl1pPr marL="0" indent="0">
-              <a:buNone/>
-              <a:defRPr sz="1400"/>
-            </a:lvl1pPr>
-            <a:lvl2pPr marL="457200" indent="0">
-              <a:buNone/>
-              <a:defRPr sz="1200"/>
-            </a:lvl2pPr>
-            <a:lvl3pPr marL="914400" indent="0">
-              <a:buNone/>
-              <a:defRPr sz="1000"/>
-            </a:lvl3pPr>
-            <a:lvl4pPr marL="1371600" indent="0">
-              <a:buNone/>
-              <a:defRPr sz="900"/>
-            </a:lvl4pPr>
-            <a:lvl5pPr marL="1828800" indent="0">
-              <a:buNone/>
-              <a:defRPr sz="900"/>
-            </a:lvl5pPr>
-            <a:lvl6pPr marL="2286000" indent="0">
-              <a:buNone/>
-              <a:defRPr sz="900"/>
-            </a:lvl6pPr>
-            <a:lvl7pPr marL="2743200" indent="0">
-              <a:buNone/>
-              <a:defRPr sz="900"/>
-            </a:lvl7pPr>
-            <a:lvl8pPr marL="3200400" indent="0">
-              <a:buNone/>
-              <a:defRPr sz="900"/>
-            </a:lvl8pPr>
-            <a:lvl9pPr marL="3657600" indent="0">
-              <a:buNone/>
-              <a:defRPr sz="900"/>
-            </a:lvl9pPr>
-          </a:lstStyle>
-          <a:p>
-            <a:pPr lvl="0"/>
-            <a:r>
-              <a:rPr lang="zh-CN" altLang="en-US" smtClean="0"/>
-              <a:t>单击此处编辑母版文本样式</a:t>
-            </a:r>
-          </a:p>
-        </p:txBody>
-      </p:sp>
-      <p:sp>
-        <p:nvSpPr>
-          <p:cNvPr id="5" name="日期占位符 4"/>
-          <p:cNvSpPr>
-            <a:spLocks noGrp="1"/>
-          </p:cNvSpPr>
-          <p:nvPr>
-            <p:ph type="dt" sz="half" idx="10"/>
-          </p:nvPr>
-        </p:nvSpPr>
-        <p:spPr/>
-        <p:txBody>
-          <a:bodyPr/>
-          <a:lstStyle/>
-          <a:p>
-            <a:fld id="{530820CF-B880-4189-942D-D702A7CBA730}" type="datetimeFigureOut">
-              <a:rPr lang="zh-CN" altLang="en-US" smtClean="0">
-                <a:solidFill>
-                  <a:prstClr val="black">
-                    <a:tint val="75000"/>
-                  </a:prstClr>
-                </a:solidFill>
-              </a:rPr>
-              <a:pPr/>
-              <a:t>2024/8/12</a:t>
-            </a:fld>
-            <a:endParaRPr lang="zh-CN" altLang="en-US">
-              <a:solidFill>
-                <a:prstClr val="black">
-                  <a:tint val="75000"/>
-                </a:prstClr>
-              </a:solidFill>
-            </a:endParaRPr>
-          </a:p>
-        </p:txBody>
-      </p:sp>
-      <p:sp>
-        <p:nvSpPr>
-          <p:cNvPr id="6" name="页脚占位符 5"/>
-          <p:cNvSpPr>
-            <a:spLocks noGrp="1"/>
-          </p:cNvSpPr>
-          <p:nvPr>
-            <p:ph type="ftr" sz="quarter" idx="11"/>
-          </p:nvPr>
-        </p:nvSpPr>
-        <p:spPr/>
-        <p:txBody>
-          <a:bodyPr/>
-          <a:lstStyle/>
-          <a:p>
-            <a:endParaRPr lang="zh-CN" altLang="en-US">
-              <a:solidFill>
-                <a:prstClr val="black">
-                  <a:tint val="75000"/>
-                </a:prstClr>
-              </a:solidFill>
-            </a:endParaRPr>
-          </a:p>
-        </p:txBody>
-      </p:sp>
-      <p:sp>
-        <p:nvSpPr>
-          <p:cNvPr id="7" name="灯片编号占位符 6"/>
-          <p:cNvSpPr>
-            <a:spLocks noGrp="1"/>
-          </p:cNvSpPr>
-          <p:nvPr>
-            <p:ph type="sldNum" sz="quarter" idx="12"/>
-          </p:nvPr>
-        </p:nvSpPr>
-        <p:spPr/>
-        <p:txBody>
-          <a:bodyPr/>
-          <a:lstStyle/>
-          <a:p>
-            <a:fld id="{0C913308-F349-4B6D-A68A-DD1791B4A57B}" type="slidenum">
-              <a:rPr lang="zh-CN" altLang="en-US" smtClean="0">
-                <a:solidFill>
-                  <a:prstClr val="black">
-                    <a:tint val="75000"/>
-                  </a:prstClr>
-                </a:solidFill>
-              </a:rPr>
-              <a:pPr/>
-              <a:t>‹#›</a:t>
-            </a:fld>
-            <a:endParaRPr lang="zh-CN" altLang="en-US">
-              <a:solidFill>
-                <a:prstClr val="black">
-                  <a:tint val="75000"/>
-                </a:prstClr>
-              </a:solidFill>
-            </a:endParaRPr>
-          </a:p>
-        </p:txBody>
-      </p:sp>
-    </p:spTree>
-    <p:extLst>
-      <p:ext uri="{BB962C8B-B14F-4D97-AF65-F5344CB8AC3E}">
-        <p14:creationId xmlns:p14="http://schemas.microsoft.com/office/powerpoint/2010/main" val="634109582"/>
-      </p:ext>
-    </p:extLst>
-  </p:cSld>
-  <p:clrMapOvr>
-    <a:masterClrMapping/>
-  </p:clrMapOvr>
-</p:sldLayout>
-</file>
-
-<file path=ppt/slideLayouts/slideLayout28.xml><?xml version="1.0" encoding="utf-8"?>
-<p:sldLayout xmlns:a="http://schemas.openxmlformats.org/drawingml/2006/main" xmlns:r="http://schemas.openxmlformats.org/officeDocument/2006/relationships" xmlns:p="http://schemas.openxmlformats.org/presentationml/2006/main" type="vertTx" preserve="1">
-  <p:cSld name="标题和竖排文字">
-    <p:spTree>
-      <p:nvGrpSpPr>
-        <p:cNvPr id="1" name=""/>
-        <p:cNvGrpSpPr/>
-        <p:nvPr/>
-      </p:nvGrpSpPr>
-      <p:grpSpPr>
-        <a:xfrm>
-          <a:off x="0" y="0"/>
-          <a:ext cx="0" cy="0"/>
-          <a:chOff x="0" y="0"/>
-          <a:chExt cx="0" cy="0"/>
-        </a:xfrm>
-      </p:grpSpPr>
-      <p:sp>
-        <p:nvSpPr>
-          <p:cNvPr id="2" name="标题 1"/>
-          <p:cNvSpPr>
-            <a:spLocks noGrp="1"/>
-          </p:cNvSpPr>
-          <p:nvPr>
-            <p:ph type="title"/>
-          </p:nvPr>
-        </p:nvSpPr>
-        <p:spPr/>
-        <p:txBody>
-          <a:bodyPr/>
-          <a:lstStyle/>
-          <a:p>
-            <a:r>
-              <a:rPr lang="zh-CN" altLang="en-US" smtClean="0"/>
-              <a:t>单击此处编辑母版标题样式</a:t>
-            </a:r>
-            <a:endParaRPr lang="zh-CN" altLang="en-US"/>
-          </a:p>
-        </p:txBody>
-      </p:sp>
-      <p:sp>
-        <p:nvSpPr>
-          <p:cNvPr id="3" name="竖排文字占位符 2"/>
-          <p:cNvSpPr>
-            <a:spLocks noGrp="1"/>
-          </p:cNvSpPr>
-          <p:nvPr>
-            <p:ph type="body" orient="vert" idx="1"/>
-          </p:nvPr>
-        </p:nvSpPr>
-        <p:spPr/>
-        <p:txBody>
-          <a:bodyPr vert="eaVert"/>
-          <a:lstStyle/>
-          <a:p>
-            <a:pPr lvl="0"/>
-            <a:r>
-              <a:rPr lang="zh-CN" altLang="en-US" smtClean="0"/>
-              <a:t>单击此处编辑母版文本样式</a:t>
-            </a:r>
-          </a:p>
-          <a:p>
-            <a:pPr lvl="1"/>
-            <a:r>
-              <a:rPr lang="zh-CN" altLang="en-US" smtClean="0"/>
-              <a:t>第二级</a:t>
-            </a:r>
-          </a:p>
-          <a:p>
-            <a:pPr lvl="2"/>
-            <a:r>
-              <a:rPr lang="zh-CN" altLang="en-US" smtClean="0"/>
-              <a:t>第三级</a:t>
-            </a:r>
-          </a:p>
-          <a:p>
-            <a:pPr lvl="3"/>
-            <a:r>
-              <a:rPr lang="zh-CN" altLang="en-US" smtClean="0"/>
-              <a:t>第四级</a:t>
-            </a:r>
-          </a:p>
-          <a:p>
-            <a:pPr lvl="4"/>
-            <a:r>
-              <a:rPr lang="zh-CN" altLang="en-US" smtClean="0"/>
-              <a:t>第五级</a:t>
-            </a:r>
-            <a:endParaRPr lang="zh-CN" altLang="en-US"/>
-          </a:p>
-        </p:txBody>
-      </p:sp>
-      <p:sp>
-        <p:nvSpPr>
-          <p:cNvPr id="4" name="日期占位符 3"/>
-          <p:cNvSpPr>
-            <a:spLocks noGrp="1"/>
-          </p:cNvSpPr>
-          <p:nvPr>
-            <p:ph type="dt" sz="half" idx="10"/>
-          </p:nvPr>
-        </p:nvSpPr>
-        <p:spPr/>
-        <p:txBody>
-          <a:bodyPr/>
-          <a:lstStyle/>
-          <a:p>
-            <a:fld id="{530820CF-B880-4189-942D-D702A7CBA730}" type="datetimeFigureOut">
-              <a:rPr lang="zh-CN" altLang="en-US" smtClean="0">
-                <a:solidFill>
-                  <a:prstClr val="black">
-                    <a:tint val="75000"/>
-                  </a:prstClr>
-                </a:solidFill>
-              </a:rPr>
-              <a:pPr/>
-              <a:t>2024/8/12</a:t>
-            </a:fld>
-            <a:endParaRPr lang="zh-CN" altLang="en-US">
-              <a:solidFill>
-                <a:prstClr val="black">
-                  <a:tint val="75000"/>
-                </a:prstClr>
-              </a:solidFill>
-            </a:endParaRPr>
-          </a:p>
-        </p:txBody>
-      </p:sp>
-      <p:sp>
-        <p:nvSpPr>
-          <p:cNvPr id="5" name="页脚占位符 4"/>
-          <p:cNvSpPr>
-            <a:spLocks noGrp="1"/>
-          </p:cNvSpPr>
-          <p:nvPr>
-            <p:ph type="ftr" sz="quarter" idx="11"/>
-          </p:nvPr>
-        </p:nvSpPr>
-        <p:spPr/>
-        <p:txBody>
-          <a:bodyPr/>
-          <a:lstStyle/>
-          <a:p>
-            <a:endParaRPr lang="zh-CN" altLang="en-US">
-              <a:solidFill>
-                <a:prstClr val="black">
-                  <a:tint val="75000"/>
-                </a:prstClr>
-              </a:solidFill>
-            </a:endParaRPr>
-          </a:p>
-        </p:txBody>
-      </p:sp>
-      <p:sp>
-        <p:nvSpPr>
-          <p:cNvPr id="6" name="灯片编号占位符 5"/>
-          <p:cNvSpPr>
-            <a:spLocks noGrp="1"/>
-          </p:cNvSpPr>
-          <p:nvPr>
-            <p:ph type="sldNum" sz="quarter" idx="12"/>
-          </p:nvPr>
-        </p:nvSpPr>
-        <p:spPr/>
-        <p:txBody>
-          <a:bodyPr/>
-          <a:lstStyle/>
-          <a:p>
-            <a:fld id="{0C913308-F349-4B6D-A68A-DD1791B4A57B}" type="slidenum">
-              <a:rPr lang="zh-CN" altLang="en-US" smtClean="0">
-                <a:solidFill>
-                  <a:prstClr val="black">
-                    <a:tint val="75000"/>
-                  </a:prstClr>
-                </a:solidFill>
-              </a:rPr>
-              <a:pPr/>
-              <a:t>‹#›</a:t>
-            </a:fld>
-            <a:endParaRPr lang="zh-CN" altLang="en-US">
-              <a:solidFill>
-                <a:prstClr val="black">
-                  <a:tint val="75000"/>
-                </a:prstClr>
-              </a:solidFill>
-            </a:endParaRPr>
-          </a:p>
-        </p:txBody>
-      </p:sp>
-    </p:spTree>
-    <p:extLst>
-      <p:ext uri="{BB962C8B-B14F-4D97-AF65-F5344CB8AC3E}">
-        <p14:creationId xmlns:p14="http://schemas.microsoft.com/office/powerpoint/2010/main" val="180939191"/>
-      </p:ext>
-    </p:extLst>
-  </p:cSld>
-  <p:clrMapOvr>
-    <a:masterClrMapping/>
-  </p:clrMapOvr>
-</p:sldLayout>
-</file>
-
-<file path=ppt/slideLayouts/slideLayout29.xml><?xml version="1.0" encoding="utf-8"?>
-<p:sldLayout xmlns:a="http://schemas.openxmlformats.org/drawingml/2006/main" xmlns:r="http://schemas.openxmlformats.org/officeDocument/2006/relationships" xmlns:p="http://schemas.openxmlformats.org/presentationml/2006/main" type="vertTitleAndTx" preserve="1">
-  <p:cSld name="垂直排列标题与文本">
-    <p:spTree>
-      <p:nvGrpSpPr>
-        <p:cNvPr id="1" name=""/>
-        <p:cNvGrpSpPr/>
-        <p:nvPr/>
-      </p:nvGrpSpPr>
-      <p:grpSpPr>
-        <a:xfrm>
-          <a:off x="0" y="0"/>
-          <a:ext cx="0" cy="0"/>
-          <a:chOff x="0" y="0"/>
-          <a:chExt cx="0" cy="0"/>
-        </a:xfrm>
-      </p:grpSpPr>
-      <p:sp>
-        <p:nvSpPr>
-          <p:cNvPr id="2" name="竖排标题 1"/>
-          <p:cNvSpPr>
-            <a:spLocks noGrp="1"/>
-          </p:cNvSpPr>
-          <p:nvPr>
-            <p:ph type="title" orient="vert"/>
-          </p:nvPr>
-        </p:nvSpPr>
-        <p:spPr>
-          <a:xfrm>
-            <a:off x="6629400" y="205979"/>
-            <a:ext cx="2057400" cy="4388644"/>
-          </a:xfrm>
-        </p:spPr>
-        <p:txBody>
-          <a:bodyPr vert="eaVert"/>
-          <a:lstStyle/>
-          <a:p>
-            <a:r>
-              <a:rPr lang="zh-CN" altLang="en-US" smtClean="0"/>
-              <a:t>单击此处编辑母版标题样式</a:t>
-            </a:r>
-            <a:endParaRPr lang="zh-CN" altLang="en-US"/>
-          </a:p>
-        </p:txBody>
-      </p:sp>
-      <p:sp>
-        <p:nvSpPr>
-          <p:cNvPr id="3" name="竖排文字占位符 2"/>
-          <p:cNvSpPr>
-            <a:spLocks noGrp="1"/>
-          </p:cNvSpPr>
-          <p:nvPr>
-            <p:ph type="body" orient="vert" idx="1"/>
-          </p:nvPr>
-        </p:nvSpPr>
-        <p:spPr>
-          <a:xfrm>
-            <a:off x="457200" y="205979"/>
-            <a:ext cx="6019800" cy="4388644"/>
-          </a:xfrm>
-        </p:spPr>
-        <p:txBody>
-          <a:bodyPr vert="eaVert"/>
-          <a:lstStyle/>
-          <a:p>
-            <a:pPr lvl="0"/>
-            <a:r>
-              <a:rPr lang="zh-CN" altLang="en-US" smtClean="0"/>
-              <a:t>单击此处编辑母版文本样式</a:t>
-            </a:r>
-          </a:p>
-          <a:p>
-            <a:pPr lvl="1"/>
-            <a:r>
-              <a:rPr lang="zh-CN" altLang="en-US" smtClean="0"/>
-              <a:t>第二级</a:t>
-            </a:r>
-          </a:p>
-          <a:p>
-            <a:pPr lvl="2"/>
-            <a:r>
-              <a:rPr lang="zh-CN" altLang="en-US" smtClean="0"/>
-              <a:t>第三级</a:t>
-            </a:r>
-          </a:p>
-          <a:p>
-            <a:pPr lvl="3"/>
-            <a:r>
-              <a:rPr lang="zh-CN" altLang="en-US" smtClean="0"/>
-              <a:t>第四级</a:t>
-            </a:r>
-          </a:p>
-          <a:p>
-            <a:pPr lvl="4"/>
-            <a:r>
-              <a:rPr lang="zh-CN" altLang="en-US" smtClean="0"/>
-              <a:t>第五级</a:t>
-            </a:r>
-            <a:endParaRPr lang="zh-CN" altLang="en-US"/>
-          </a:p>
-        </p:txBody>
-      </p:sp>
-      <p:sp>
-        <p:nvSpPr>
-          <p:cNvPr id="4" name="日期占位符 3"/>
-          <p:cNvSpPr>
-            <a:spLocks noGrp="1"/>
-          </p:cNvSpPr>
-          <p:nvPr>
-            <p:ph type="dt" sz="half" idx="10"/>
-          </p:nvPr>
-        </p:nvSpPr>
-        <p:spPr/>
-        <p:txBody>
-          <a:bodyPr/>
-          <a:lstStyle/>
-          <a:p>
-            <a:fld id="{530820CF-B880-4189-942D-D702A7CBA730}" type="datetimeFigureOut">
-              <a:rPr lang="zh-CN" altLang="en-US" smtClean="0">
-                <a:solidFill>
-                  <a:prstClr val="black">
-                    <a:tint val="75000"/>
-                  </a:prstClr>
-                </a:solidFill>
-              </a:rPr>
-              <a:pPr/>
-              <a:t>2024/8/12</a:t>
-            </a:fld>
-            <a:endParaRPr lang="zh-CN" altLang="en-US">
-              <a:solidFill>
-                <a:prstClr val="black">
-                  <a:tint val="75000"/>
-                </a:prstClr>
-              </a:solidFill>
-            </a:endParaRPr>
-          </a:p>
-        </p:txBody>
-      </p:sp>
-      <p:sp>
-        <p:nvSpPr>
-          <p:cNvPr id="5" name="页脚占位符 4"/>
-          <p:cNvSpPr>
-            <a:spLocks noGrp="1"/>
-          </p:cNvSpPr>
-          <p:nvPr>
-            <p:ph type="ftr" sz="quarter" idx="11"/>
-          </p:nvPr>
-        </p:nvSpPr>
-        <p:spPr/>
-        <p:txBody>
-          <a:bodyPr/>
-          <a:lstStyle/>
-          <a:p>
-            <a:endParaRPr lang="zh-CN" altLang="en-US">
-              <a:solidFill>
-                <a:prstClr val="black">
-                  <a:tint val="75000"/>
-                </a:prstClr>
-              </a:solidFill>
-            </a:endParaRPr>
-          </a:p>
-        </p:txBody>
-      </p:sp>
-      <p:sp>
-        <p:nvSpPr>
-          <p:cNvPr id="6" name="灯片编号占位符 5"/>
-          <p:cNvSpPr>
-            <a:spLocks noGrp="1"/>
-          </p:cNvSpPr>
-          <p:nvPr>
-            <p:ph type="sldNum" sz="quarter" idx="12"/>
-          </p:nvPr>
-        </p:nvSpPr>
-        <p:spPr/>
-        <p:txBody>
-          <a:bodyPr/>
-          <a:lstStyle/>
-          <a:p>
-            <a:fld id="{0C913308-F349-4B6D-A68A-DD1791B4A57B}" type="slidenum">
-              <a:rPr lang="zh-CN" altLang="en-US" smtClean="0">
-                <a:solidFill>
-                  <a:prstClr val="black">
-                    <a:tint val="75000"/>
-                  </a:prstClr>
-                </a:solidFill>
-              </a:rPr>
-              <a:pPr/>
-              <a:t>‹#›</a:t>
-            </a:fld>
-            <a:endParaRPr lang="zh-CN" altLang="en-US">
-              <a:solidFill>
-                <a:prstClr val="black">
-                  <a:tint val="75000"/>
-                </a:prstClr>
-              </a:solidFill>
-            </a:endParaRPr>
-          </a:p>
-        </p:txBody>
-      </p:sp>
-    </p:spTree>
-    <p:extLst>
-      <p:ext uri="{BB962C8B-B14F-4D97-AF65-F5344CB8AC3E}">
-        <p14:creationId xmlns:p14="http://schemas.microsoft.com/office/powerpoint/2010/main" val="3318375096"/>
-      </p:ext>
-    </p:extLst>
-  </p:cSld>
-  <p:clrMapOvr>
-    <a:masterClrMapping/>
-  </p:clrMapOvr>
-</p:sldLayout>
-</file>
-
-<file path=ppt/slideLayouts/slideLayout3.xml><?xml version="1.0" encoding="utf-8"?>
-<p:sldLayout xmlns:a="http://schemas.openxmlformats.org/drawingml/2006/main" xmlns:r="http://schemas.openxmlformats.org/officeDocument/2006/relationships" xmlns:p="http://schemas.openxmlformats.org/presentationml/2006/main" preserve="1">
-  <p:cSld name="学习目标">
-    <p:spTree>
-      <p:nvGrpSpPr>
-        <p:cNvPr id="1" name=""/>
-        <p:cNvGrpSpPr/>
-        <p:nvPr/>
-      </p:nvGrpSpPr>
-      <p:grpSpPr>
-        <a:xfrm>
-          <a:off x="0" y="0"/>
-          <a:ext cx="0" cy="0"/>
-          <a:chOff x="0" y="0"/>
-          <a:chExt cx="0" cy="0"/>
-        </a:xfrm>
-      </p:grpSpPr>
-      <p:sp>
-        <p:nvSpPr>
-          <p:cNvPr id="2" name="文本框 5"/>
-          <p:cNvSpPr txBox="1"/>
-          <p:nvPr userDrawn="1"/>
-        </p:nvSpPr>
-        <p:spPr>
-          <a:xfrm>
-            <a:off x="621888" y="96858"/>
-            <a:ext cx="1656184" cy="438580"/>
-          </a:xfrm>
-          <a:prstGeom prst="rect">
-            <a:avLst/>
-          </a:prstGeom>
-          <a:noFill/>
-        </p:spPr>
-        <p:txBody>
-          <a:bodyPr wrap="square" lIns="68570" tIns="34289" rIns="68570" bIns="34289" rtlCol="0">
-            <a:spAutoFit/>
-          </a:bodyPr>
-          <a:lstStyle/>
-          <a:p>
-            <a:r>
-              <a:rPr lang="zh-CN" altLang="en-US" sz="2400" dirty="0" smtClean="0">
-                <a:latin typeface="黑体" panose="02010609060101010101" pitchFamily="49" charset="-122"/>
-                <a:ea typeface="黑体" panose="02010609060101010101" pitchFamily="49" charset="-122"/>
-              </a:rPr>
-              <a:t>学习目标</a:t>
             </a:r>
             <a:endParaRPr lang="zh-CN" altLang="en-US" sz="2400" dirty="0">
               <a:latin typeface="黑体" panose="02010609060101010101" pitchFamily="49" charset="-122"/>
@@ -6889,7 +3907,225 @@
           <p:cNvCxnSpPr/>
           <p:nvPr userDrawn="1">
             <p:custDataLst>
-              <p:tags r:id="rId1"/>
+              <p:tags r:id="rId4"/>
+            </p:custDataLst>
+          </p:nvPr>
+        </p:nvCxnSpPr>
+        <p:spPr>
+          <a:xfrm>
+            <a:off x="0" y="699542"/>
+            <a:ext cx="9144000" cy="0"/>
+          </a:xfrm>
+          <a:prstGeom prst="line">
+            <a:avLst/>
+          </a:prstGeom>
+          <a:ln w="44450">
+            <a:solidFill>
+              <a:srgbClr val="E0F1EF"/>
+            </a:solidFill>
+          </a:ln>
+        </p:spPr>
+        <p:style>
+          <a:lnRef idx="1">
+            <a:schemeClr val="accent1"/>
+          </a:lnRef>
+          <a:fillRef idx="0">
+            <a:schemeClr val="accent1"/>
+          </a:fillRef>
+          <a:effectRef idx="0">
+            <a:schemeClr val="accent1"/>
+          </a:effectRef>
+          <a:fontRef idx="minor">
+            <a:schemeClr val="tx1"/>
+          </a:fontRef>
+        </p:style>
+      </p:cxnSp>
+    </p:spTree>
+  </p:cSld>
+  <p:clrMapOvr>
+    <a:masterClrMapping/>
+  </p:clrMapOvr>
+  <p:transition/>
+</p:sldLayout>
+</file>
+
+<file path=ppt/slideLayouts/slideLayout3.xml><?xml version="1.0" encoding="utf-8"?>
+<p:sldLayout xmlns:a="http://schemas.openxmlformats.org/drawingml/2006/main" xmlns:r="http://schemas.openxmlformats.org/officeDocument/2006/relationships" xmlns:p="http://schemas.openxmlformats.org/presentationml/2006/main" preserve="1">
+  <p:cSld name="学习目标">
+    <p:spTree>
+      <p:nvGrpSpPr>
+        <p:cNvPr id="1" name=""/>
+        <p:cNvGrpSpPr/>
+        <p:nvPr/>
+      </p:nvGrpSpPr>
+      <p:grpSpPr>
+        <a:xfrm>
+          <a:off x="0" y="0"/>
+          <a:ext cx="0" cy="0"/>
+          <a:chOff x="0" y="0"/>
+          <a:chExt cx="0" cy="0"/>
+        </a:xfrm>
+      </p:grpSpPr>
+      <p:sp>
+        <p:nvSpPr>
+          <p:cNvPr id="2" name="文本框 5"/>
+          <p:cNvSpPr txBox="1"/>
+          <p:nvPr userDrawn="1"/>
+        </p:nvSpPr>
+        <p:spPr>
+          <a:xfrm>
+            <a:off x="621888" y="96858"/>
+            <a:ext cx="1656184" cy="438580"/>
+          </a:xfrm>
+          <a:prstGeom prst="rect">
+            <a:avLst/>
+          </a:prstGeom>
+          <a:noFill/>
+        </p:spPr>
+        <p:txBody>
+          <a:bodyPr wrap="square" lIns="68570" tIns="34289" rIns="68570" bIns="34289" rtlCol="0">
+            <a:spAutoFit/>
+          </a:bodyPr>
+          <a:lstStyle/>
+          <a:p>
+            <a:r>
+              <a:rPr lang="zh-CN" altLang="en-US" sz="2400" dirty="0" smtClean="0">
+                <a:latin typeface="黑体" panose="02010609060101010101" pitchFamily="49" charset="-122"/>
+                <a:ea typeface="黑体" panose="02010609060101010101" pitchFamily="49" charset="-122"/>
+              </a:rPr>
+              <a:t>学习目标</a:t>
+            </a:r>
+            <a:endParaRPr lang="zh-CN" altLang="en-US" sz="2400" dirty="0">
+              <a:latin typeface="黑体" panose="02010609060101010101" pitchFamily="49" charset="-122"/>
+              <a:ea typeface="黑体" panose="02010609060101010101" pitchFamily="49" charset="-122"/>
+            </a:endParaRPr>
+          </a:p>
+        </p:txBody>
+      </p:sp>
+      <p:grpSp>
+        <p:nvGrpSpPr>
+          <p:cNvPr id="3" name="组合 2"/>
+          <p:cNvGrpSpPr/>
+          <p:nvPr userDrawn="1"/>
+        </p:nvGrpSpPr>
+        <p:grpSpPr>
+          <a:xfrm>
+            <a:off x="294084" y="195486"/>
+            <a:ext cx="1685628" cy="354827"/>
+            <a:chOff x="392112" y="375411"/>
+            <a:chExt cx="2247503" cy="473102"/>
+          </a:xfrm>
+        </p:grpSpPr>
+        <p:sp>
+          <p:nvSpPr>
+            <p:cNvPr id="4" name="菱形 3"/>
+            <p:cNvSpPr/>
+            <p:nvPr>
+              <p:custDataLst>
+                <p:tags r:id="rId2"/>
+              </p:custDataLst>
+            </p:nvPr>
+          </p:nvSpPr>
+          <p:spPr>
+            <a:xfrm>
+              <a:off x="392112" y="375411"/>
+              <a:ext cx="384000" cy="384000"/>
+            </a:xfrm>
+            <a:prstGeom prst="diamond">
+              <a:avLst/>
+            </a:prstGeom>
+            <a:solidFill>
+              <a:srgbClr val="009FB0"/>
+            </a:solidFill>
+            <a:ln>
+              <a:noFill/>
+            </a:ln>
+            <a:effectLst/>
+          </p:spPr>
+          <p:style>
+            <a:lnRef idx="2">
+              <a:schemeClr val="accent1">
+                <a:shade val="50000"/>
+              </a:schemeClr>
+            </a:lnRef>
+            <a:fillRef idx="1">
+              <a:schemeClr val="accent1"/>
+            </a:fillRef>
+            <a:effectRef idx="0">
+              <a:schemeClr val="accent1"/>
+            </a:effectRef>
+            <a:fontRef idx="minor">
+              <a:schemeClr val="lt1"/>
+            </a:fontRef>
+          </p:style>
+          <p:txBody>
+            <a:bodyPr anchor="ctr"/>
+            <a:lstStyle/>
+            <a:p>
+              <a:pPr algn="ctr" fontAlgn="auto">
+                <a:defRPr/>
+              </a:pPr>
+              <a:endParaRPr kumimoji="1" lang="zh-CN" altLang="en-US" sz="100" strike="noStrike" noProof="1">
+                <a:ln>
+                  <a:solidFill>
+                    <a:srgbClr val="E6A774"/>
+                  </a:solidFill>
+                </a:ln>
+                <a:solidFill>
+                  <a:srgbClr val="E6A774"/>
+                </a:solidFill>
+                <a:ea typeface="黑体" panose="02010609060101010101" pitchFamily="49" charset="-122"/>
+              </a:endParaRPr>
+            </a:p>
+          </p:txBody>
+        </p:sp>
+        <p:cxnSp>
+          <p:nvCxnSpPr>
+            <p:cNvPr id="5" name="直接连接符 4"/>
+            <p:cNvCxnSpPr/>
+            <p:nvPr>
+              <p:custDataLst>
+                <p:tags r:id="rId3"/>
+              </p:custDataLst>
+            </p:nvPr>
+          </p:nvCxnSpPr>
+          <p:spPr>
+            <a:xfrm>
+              <a:off x="421415" y="848513"/>
+              <a:ext cx="2218200" cy="0"/>
+            </a:xfrm>
+            <a:prstGeom prst="line">
+              <a:avLst/>
+            </a:prstGeom>
+            <a:ln w="25400">
+              <a:solidFill>
+                <a:srgbClr val="009FB0"/>
+              </a:solidFill>
+            </a:ln>
+          </p:spPr>
+          <p:style>
+            <a:lnRef idx="1">
+              <a:schemeClr val="accent1"/>
+            </a:lnRef>
+            <a:fillRef idx="0">
+              <a:schemeClr val="accent1"/>
+            </a:fillRef>
+            <a:effectRef idx="0">
+              <a:schemeClr val="accent1"/>
+            </a:effectRef>
+            <a:fontRef idx="minor">
+              <a:schemeClr val="tx1"/>
+            </a:fontRef>
+          </p:style>
+        </p:cxnSp>
+      </p:grpSp>
+      <p:cxnSp>
+        <p:nvCxnSpPr>
+          <p:cNvPr id="6" name="直接连接符 5"/>
+          <p:cNvCxnSpPr/>
+          <p:nvPr userDrawn="1">
+            <p:custDataLst>
+              <p:tags r:id="rId4"/>
             </p:custDataLst>
           </p:nvPr>
         </p:nvCxnSpPr>
@@ -7114,7 +4350,7 @@
           <p:cNvCxnSpPr/>
           <p:nvPr userDrawn="1">
             <p:custDataLst>
-              <p:tags r:id="rId1"/>
+              <p:tags r:id="rId4"/>
             </p:custDataLst>
           </p:nvPr>
         </p:nvCxnSpPr>
@@ -7332,7 +4568,7 @@
           <p:cNvCxnSpPr/>
           <p:nvPr userDrawn="1">
             <p:custDataLst>
-              <p:tags r:id="rId1"/>
+              <p:tags r:id="rId4"/>
             </p:custDataLst>
           </p:nvPr>
         </p:nvCxnSpPr>
@@ -7433,7 +4669,7 @@
           <p:cNvCxnSpPr/>
           <p:nvPr userDrawn="1">
             <p:custDataLst>
-              <p:tags r:id="rId1"/>
+              <p:tags r:id="rId2"/>
             </p:custDataLst>
           </p:nvPr>
         </p:nvCxnSpPr>
@@ -7486,7 +4722,7 @@
             <p:cNvSpPr/>
             <p:nvPr>
               <p:custDataLst>
-                <p:tags r:id="rId2"/>
+                <p:tags r:id="rId3"/>
               </p:custDataLst>
             </p:nvPr>
           </p:nvSpPr>
@@ -7549,7 +4785,7 @@
             <p:cNvCxnSpPr/>
             <p:nvPr>
               <p:custDataLst>
-                <p:tags r:id="rId3"/>
+                <p:tags r:id="rId4"/>
               </p:custDataLst>
             </p:nvPr>
           </p:nvCxnSpPr>
@@ -7651,7 +4887,7 @@
           <p:cNvCxnSpPr/>
           <p:nvPr userDrawn="1">
             <p:custDataLst>
-              <p:tags r:id="rId1"/>
+              <p:tags r:id="rId2"/>
             </p:custDataLst>
           </p:nvPr>
         </p:nvCxnSpPr>
@@ -7704,7 +4940,7 @@
             <p:cNvSpPr/>
             <p:nvPr>
               <p:custDataLst>
-                <p:tags r:id="rId2"/>
+                <p:tags r:id="rId3"/>
               </p:custDataLst>
             </p:nvPr>
           </p:nvSpPr>
@@ -7767,7 +5003,7 @@
             <p:cNvCxnSpPr/>
             <p:nvPr>
               <p:custDataLst>
-                <p:tags r:id="rId3"/>
+                <p:tags r:id="rId4"/>
               </p:custDataLst>
             </p:nvPr>
           </p:nvCxnSpPr>
@@ -7869,7 +5105,7 @@
           <p:cNvCxnSpPr/>
           <p:nvPr userDrawn="1">
             <p:custDataLst>
-              <p:tags r:id="rId1"/>
+              <p:tags r:id="rId2"/>
             </p:custDataLst>
           </p:nvPr>
         </p:nvCxnSpPr>
@@ -7922,7 +5158,7 @@
             <p:cNvSpPr/>
             <p:nvPr>
               <p:custDataLst>
-                <p:tags r:id="rId2"/>
+                <p:tags r:id="rId3"/>
               </p:custDataLst>
             </p:nvPr>
           </p:nvSpPr>
@@ -7985,7 +5221,7 @@
             <p:cNvCxnSpPr/>
             <p:nvPr>
               <p:custDataLst>
-                <p:tags r:id="rId3"/>
+                <p:tags r:id="rId4"/>
               </p:custDataLst>
             </p:nvPr>
           </p:nvCxnSpPr>
@@ -8094,7 +5330,7 @@
           <p:cNvCxnSpPr/>
           <p:nvPr userDrawn="1">
             <p:custDataLst>
-              <p:tags r:id="rId1"/>
+              <p:tags r:id="rId2"/>
             </p:custDataLst>
           </p:nvPr>
         </p:nvCxnSpPr>
@@ -8147,7 +5383,7 @@
             <p:cNvSpPr/>
             <p:nvPr>
               <p:custDataLst>
-                <p:tags r:id="rId2"/>
+                <p:tags r:id="rId3"/>
               </p:custDataLst>
             </p:nvPr>
           </p:nvSpPr>
@@ -8210,7 +5446,7 @@
             <p:cNvCxnSpPr/>
             <p:nvPr>
               <p:custDataLst>
-                <p:tags r:id="rId3"/>
+                <p:tags r:id="rId4"/>
               </p:custDataLst>
             </p:nvPr>
           </p:nvCxnSpPr>
@@ -8735,18 +5971,12 @@
           </p:cNvPicPr>
           <p:nvPr userDrawn="1">
             <p:custDataLst>
-              <p:tags r:id="rId3"/>
+              <p:tags r:id="rId2"/>
             </p:custDataLst>
           </p:nvPr>
         </p:nvPicPr>
         <p:blipFill>
-          <a:blip r:embed="rId5" cstate="email">
-            <a:extLst>
-              <a:ext uri="{28A0092B-C50C-407E-A947-70E740481C1C}">
-                <a14:useLocalDpi xmlns:a14="http://schemas.microsoft.com/office/drawing/2010/main"/>
-              </a:ext>
-            </a:extLst>
-          </a:blip>
+          <a:blip r:embed="rId3" cstate="email"/>
           <a:srcRect/>
           <a:stretch>
             <a:fillRect/>
@@ -8779,13 +6009,8 @@
           </p:nvPr>
         </p:nvPicPr>
         <p:blipFill>
-          <a:blip r:embed="rId6" cstate="email">
+          <a:blip r:embed="rId5" cstate="email">
             <a:lum contrast="-12001"/>
-            <a:extLst>
-              <a:ext uri="{28A0092B-C50C-407E-A947-70E740481C1C}">
-                <a14:useLocalDpi xmlns:a14="http://schemas.microsoft.com/office/drawing/2010/main"/>
-              </a:ext>
-            </a:extLst>
           </a:blip>
           <a:srcRect/>
           <a:stretch>
@@ -9110,606 +6335,6 @@
 </p:sldMaster>
 </file>
 
-<file path=ppt/slideMasters/slideMaster3.xml><?xml version="1.0" encoding="utf-8"?>
-<p:sldMaster xmlns:a="http://schemas.openxmlformats.org/drawingml/2006/main" xmlns:r="http://schemas.openxmlformats.org/officeDocument/2006/relationships" xmlns:p="http://schemas.openxmlformats.org/presentationml/2006/main">
-  <p:cSld>
-    <p:bg>
-      <p:bgRef idx="1001">
-        <a:schemeClr val="bg1"/>
-      </p:bgRef>
-    </p:bg>
-    <p:spTree>
-      <p:nvGrpSpPr>
-        <p:cNvPr id="1" name=""/>
-        <p:cNvGrpSpPr/>
-        <p:nvPr/>
-      </p:nvGrpSpPr>
-      <p:grpSpPr>
-        <a:xfrm>
-          <a:off x="0" y="0"/>
-          <a:ext cx="0" cy="0"/>
-          <a:chOff x="0" y="0"/>
-          <a:chExt cx="0" cy="0"/>
-        </a:xfrm>
-      </p:grpSpPr>
-      <p:sp>
-        <p:nvSpPr>
-          <p:cNvPr id="2" name="标题占位符 1"/>
-          <p:cNvSpPr>
-            <a:spLocks noGrp="1"/>
-          </p:cNvSpPr>
-          <p:nvPr>
-            <p:ph type="title"/>
-          </p:nvPr>
-        </p:nvSpPr>
-        <p:spPr>
-          <a:xfrm>
-            <a:off x="457200" y="205979"/>
-            <a:ext cx="8229600" cy="857250"/>
-          </a:xfrm>
-          <a:prstGeom prst="rect">
-            <a:avLst/>
-          </a:prstGeom>
-        </p:spPr>
-        <p:txBody>
-          <a:bodyPr vert="horz" lIns="91440" tIns="45720" rIns="91440" bIns="45720" rtlCol="0" anchor="ctr">
-            <a:normAutofit/>
-          </a:bodyPr>
-          <a:lstStyle/>
-          <a:p>
-            <a:r>
-              <a:rPr lang="zh-CN" altLang="en-US" smtClean="0"/>
-              <a:t>单击此处编辑母版标题样式</a:t>
-            </a:r>
-            <a:endParaRPr lang="zh-CN" altLang="en-US"/>
-          </a:p>
-        </p:txBody>
-      </p:sp>
-      <p:sp>
-        <p:nvSpPr>
-          <p:cNvPr id="3" name="文本占位符 2"/>
-          <p:cNvSpPr>
-            <a:spLocks noGrp="1"/>
-          </p:cNvSpPr>
-          <p:nvPr>
-            <p:ph type="body" idx="1"/>
-          </p:nvPr>
-        </p:nvSpPr>
-        <p:spPr>
-          <a:xfrm>
-            <a:off x="457200" y="1200151"/>
-            <a:ext cx="8229600" cy="3394472"/>
-          </a:xfrm>
-          <a:prstGeom prst="rect">
-            <a:avLst/>
-          </a:prstGeom>
-        </p:spPr>
-        <p:txBody>
-          <a:bodyPr vert="horz" lIns="91440" tIns="45720" rIns="91440" bIns="45720" rtlCol="0">
-            <a:normAutofit/>
-          </a:bodyPr>
-          <a:lstStyle/>
-          <a:p>
-            <a:pPr lvl="0"/>
-            <a:r>
-              <a:rPr lang="zh-CN" altLang="en-US" smtClean="0"/>
-              <a:t>单击此处编辑母版文本样式</a:t>
-            </a:r>
-          </a:p>
-          <a:p>
-            <a:pPr lvl="1"/>
-            <a:r>
-              <a:rPr lang="zh-CN" altLang="en-US" smtClean="0"/>
-              <a:t>第二级</a:t>
-            </a:r>
-          </a:p>
-          <a:p>
-            <a:pPr lvl="2"/>
-            <a:r>
-              <a:rPr lang="zh-CN" altLang="en-US" smtClean="0"/>
-              <a:t>第三级</a:t>
-            </a:r>
-          </a:p>
-          <a:p>
-            <a:pPr lvl="3"/>
-            <a:r>
-              <a:rPr lang="zh-CN" altLang="en-US" smtClean="0"/>
-              <a:t>第四级</a:t>
-            </a:r>
-          </a:p>
-          <a:p>
-            <a:pPr lvl="4"/>
-            <a:r>
-              <a:rPr lang="zh-CN" altLang="en-US" smtClean="0"/>
-              <a:t>第五级</a:t>
-            </a:r>
-            <a:endParaRPr lang="zh-CN" altLang="en-US"/>
-          </a:p>
-        </p:txBody>
-      </p:sp>
-      <p:sp>
-        <p:nvSpPr>
-          <p:cNvPr id="4" name="日期占位符 3"/>
-          <p:cNvSpPr>
-            <a:spLocks noGrp="1"/>
-          </p:cNvSpPr>
-          <p:nvPr>
-            <p:ph type="dt" sz="half" idx="2"/>
-          </p:nvPr>
-        </p:nvSpPr>
-        <p:spPr>
-          <a:xfrm>
-            <a:off x="457200" y="4767263"/>
-            <a:ext cx="2133600" cy="273844"/>
-          </a:xfrm>
-          <a:prstGeom prst="rect">
-            <a:avLst/>
-          </a:prstGeom>
-        </p:spPr>
-        <p:txBody>
-          <a:bodyPr vert="horz" lIns="91440" tIns="45720" rIns="91440" bIns="45720" rtlCol="0" anchor="ctr"/>
-          <a:lstStyle>
-            <a:lvl1pPr algn="l">
-              <a:defRPr sz="1200">
-                <a:solidFill>
-                  <a:schemeClr val="tx1">
-                    <a:tint val="75000"/>
-                  </a:schemeClr>
-                </a:solidFill>
-              </a:defRPr>
-            </a:lvl1pPr>
-          </a:lstStyle>
-          <a:p>
-            <a:pPr fontAlgn="auto">
-              <a:spcBef>
-                <a:spcPts val="0"/>
-              </a:spcBef>
-              <a:spcAft>
-                <a:spcPts val="0"/>
-              </a:spcAft>
-              <a:buFontTx/>
-              <a:buNone/>
-            </a:pPr>
-            <a:fld id="{530820CF-B880-4189-942D-D702A7CBA730}" type="datetimeFigureOut">
-              <a:rPr lang="zh-CN" altLang="en-US" smtClean="0">
-                <a:solidFill>
-                  <a:prstClr val="black">
-                    <a:tint val="75000"/>
-                  </a:prstClr>
-                </a:solidFill>
-                <a:latin typeface="Calibri"/>
-                <a:ea typeface="宋体"/>
-              </a:rPr>
-              <a:pPr fontAlgn="auto">
-                <a:spcBef>
-                  <a:spcPts val="0"/>
-                </a:spcBef>
-                <a:spcAft>
-                  <a:spcPts val="0"/>
-                </a:spcAft>
-                <a:buFontTx/>
-                <a:buNone/>
-              </a:pPr>
-              <a:t>2024/8/12</a:t>
-            </a:fld>
-            <a:endParaRPr lang="zh-CN" altLang="en-US">
-              <a:solidFill>
-                <a:prstClr val="black">
-                  <a:tint val="75000"/>
-                </a:prstClr>
-              </a:solidFill>
-              <a:latin typeface="Calibri"/>
-              <a:ea typeface="宋体"/>
-            </a:endParaRPr>
-          </a:p>
-        </p:txBody>
-      </p:sp>
-      <p:sp>
-        <p:nvSpPr>
-          <p:cNvPr id="5" name="页脚占位符 4"/>
-          <p:cNvSpPr>
-            <a:spLocks noGrp="1"/>
-          </p:cNvSpPr>
-          <p:nvPr>
-            <p:ph type="ftr" sz="quarter" idx="3"/>
-          </p:nvPr>
-        </p:nvSpPr>
-        <p:spPr>
-          <a:xfrm>
-            <a:off x="3124200" y="4767263"/>
-            <a:ext cx="2895600" cy="273844"/>
-          </a:xfrm>
-          <a:prstGeom prst="rect">
-            <a:avLst/>
-          </a:prstGeom>
-        </p:spPr>
-        <p:txBody>
-          <a:bodyPr vert="horz" lIns="91440" tIns="45720" rIns="91440" bIns="45720" rtlCol="0" anchor="ctr"/>
-          <a:lstStyle>
-            <a:lvl1pPr algn="ctr">
-              <a:defRPr sz="1200">
-                <a:solidFill>
-                  <a:schemeClr val="tx1">
-                    <a:tint val="75000"/>
-                  </a:schemeClr>
-                </a:solidFill>
-              </a:defRPr>
-            </a:lvl1pPr>
-          </a:lstStyle>
-          <a:p>
-            <a:pPr fontAlgn="auto">
-              <a:spcBef>
-                <a:spcPts val="0"/>
-              </a:spcBef>
-              <a:spcAft>
-                <a:spcPts val="0"/>
-              </a:spcAft>
-              <a:buFontTx/>
-              <a:buNone/>
-            </a:pPr>
-            <a:endParaRPr lang="zh-CN" altLang="en-US">
-              <a:solidFill>
-                <a:prstClr val="black">
-                  <a:tint val="75000"/>
-                </a:prstClr>
-              </a:solidFill>
-              <a:latin typeface="Calibri"/>
-              <a:ea typeface="宋体"/>
-            </a:endParaRPr>
-          </a:p>
-        </p:txBody>
-      </p:sp>
-      <p:sp>
-        <p:nvSpPr>
-          <p:cNvPr id="6" name="灯片编号占位符 5"/>
-          <p:cNvSpPr>
-            <a:spLocks noGrp="1"/>
-          </p:cNvSpPr>
-          <p:nvPr>
-            <p:ph type="sldNum" sz="quarter" idx="4"/>
-          </p:nvPr>
-        </p:nvSpPr>
-        <p:spPr>
-          <a:xfrm>
-            <a:off x="6553200" y="4767263"/>
-            <a:ext cx="2133600" cy="273844"/>
-          </a:xfrm>
-          <a:prstGeom prst="rect">
-            <a:avLst/>
-          </a:prstGeom>
-        </p:spPr>
-        <p:txBody>
-          <a:bodyPr vert="horz" lIns="91440" tIns="45720" rIns="91440" bIns="45720" rtlCol="0" anchor="ctr"/>
-          <a:lstStyle>
-            <a:lvl1pPr algn="r">
-              <a:defRPr sz="1200">
-                <a:solidFill>
-                  <a:schemeClr val="tx1">
-                    <a:tint val="75000"/>
-                  </a:schemeClr>
-                </a:solidFill>
-              </a:defRPr>
-            </a:lvl1pPr>
-          </a:lstStyle>
-          <a:p>
-            <a:pPr fontAlgn="auto">
-              <a:spcBef>
-                <a:spcPts val="0"/>
-              </a:spcBef>
-              <a:spcAft>
-                <a:spcPts val="0"/>
-              </a:spcAft>
-              <a:buFontTx/>
-              <a:buNone/>
-            </a:pPr>
-            <a:fld id="{0C913308-F349-4B6D-A68A-DD1791B4A57B}" type="slidenum">
-              <a:rPr lang="zh-CN" altLang="en-US" smtClean="0">
-                <a:solidFill>
-                  <a:prstClr val="black">
-                    <a:tint val="75000"/>
-                  </a:prstClr>
-                </a:solidFill>
-                <a:latin typeface="Calibri"/>
-                <a:ea typeface="宋体"/>
-              </a:rPr>
-              <a:pPr fontAlgn="auto">
-                <a:spcBef>
-                  <a:spcPts val="0"/>
-                </a:spcBef>
-                <a:spcAft>
-                  <a:spcPts val="0"/>
-                </a:spcAft>
-                <a:buFontTx/>
-                <a:buNone/>
-              </a:pPr>
-              <a:t>‹#›</a:t>
-            </a:fld>
-            <a:endParaRPr lang="zh-CN" altLang="en-US">
-              <a:solidFill>
-                <a:prstClr val="black">
-                  <a:tint val="75000"/>
-                </a:prstClr>
-              </a:solidFill>
-              <a:latin typeface="Calibri"/>
-              <a:ea typeface="宋体"/>
-            </a:endParaRPr>
-          </a:p>
-        </p:txBody>
-      </p:sp>
-    </p:spTree>
-    <p:extLst>
-      <p:ext uri="{BB962C8B-B14F-4D97-AF65-F5344CB8AC3E}">
-        <p14:creationId xmlns:p14="http://schemas.microsoft.com/office/powerpoint/2010/main" val="401629461"/>
-      </p:ext>
-    </p:extLst>
-  </p:cSld>
-  <p:clrMap bg1="lt1" tx1="dk1" bg2="lt2" tx2="dk2" accent1="accent1" accent2="accent2" accent3="accent3" accent4="accent4" accent5="accent5" accent6="accent6" hlink="hlink" folHlink="folHlink"/>
-  <p:sldLayoutIdLst>
-    <p:sldLayoutId id="2147483669" r:id="rId1"/>
-    <p:sldLayoutId id="2147483670" r:id="rId2"/>
-    <p:sldLayoutId id="2147483671" r:id="rId3"/>
-    <p:sldLayoutId id="2147483672" r:id="rId4"/>
-    <p:sldLayoutId id="2147483673" r:id="rId5"/>
-    <p:sldLayoutId id="2147483674" r:id="rId6"/>
-    <p:sldLayoutId id="2147483675" r:id="rId7"/>
-    <p:sldLayoutId id="2147483676" r:id="rId8"/>
-    <p:sldLayoutId id="2147483677" r:id="rId9"/>
-    <p:sldLayoutId id="2147483678" r:id="rId10"/>
-    <p:sldLayoutId id="2147483679" r:id="rId11"/>
-  </p:sldLayoutIdLst>
-  <p:txStyles>
-    <p:titleStyle>
-      <a:lvl1pPr algn="ctr" defTabSz="914400" rtl="0" eaLnBrk="1" latinLnBrk="0" hangingPunct="1">
-        <a:spcBef>
-          <a:spcPct val="0"/>
-        </a:spcBef>
-        <a:buNone/>
-        <a:defRPr sz="4400" kern="1200">
-          <a:solidFill>
-            <a:schemeClr val="tx1"/>
-          </a:solidFill>
-          <a:latin typeface="+mj-lt"/>
-          <a:ea typeface="+mj-ea"/>
-          <a:cs typeface="+mj-cs"/>
-        </a:defRPr>
-      </a:lvl1pPr>
-    </p:titleStyle>
-    <p:bodyStyle>
-      <a:lvl1pPr marL="342900" indent="-342900" algn="l" defTabSz="914400" rtl="0" eaLnBrk="1" latinLnBrk="0" hangingPunct="1">
-        <a:spcBef>
-          <a:spcPct val="20000"/>
-        </a:spcBef>
-        <a:buFont typeface="Arial" pitchFamily="34" charset="0"/>
-        <a:buChar char="•"/>
-        <a:defRPr sz="3200" kern="1200">
-          <a:solidFill>
-            <a:schemeClr val="tx1"/>
-          </a:solidFill>
-          <a:latin typeface="+mn-lt"/>
-          <a:ea typeface="+mn-ea"/>
-          <a:cs typeface="+mn-cs"/>
-        </a:defRPr>
-      </a:lvl1pPr>
-      <a:lvl2pPr marL="742950" indent="-285750" algn="l" defTabSz="914400" rtl="0" eaLnBrk="1" latinLnBrk="0" hangingPunct="1">
-        <a:spcBef>
-          <a:spcPct val="20000"/>
-        </a:spcBef>
-        <a:buFont typeface="Arial" pitchFamily="34" charset="0"/>
-        <a:buChar char="–"/>
-        <a:defRPr sz="2800" kern="1200">
-          <a:solidFill>
-            <a:schemeClr val="tx1"/>
-          </a:solidFill>
-          <a:latin typeface="+mn-lt"/>
-          <a:ea typeface="+mn-ea"/>
-          <a:cs typeface="+mn-cs"/>
-        </a:defRPr>
-      </a:lvl2pPr>
-      <a:lvl3pPr marL="1143000" indent="-228600" algn="l" defTabSz="914400" rtl="0" eaLnBrk="1" latinLnBrk="0" hangingPunct="1">
-        <a:spcBef>
-          <a:spcPct val="20000"/>
-        </a:spcBef>
-        <a:buFont typeface="Arial" pitchFamily="34" charset="0"/>
-        <a:buChar char="•"/>
-        <a:defRPr sz="2400" kern="1200">
-          <a:solidFill>
-            <a:schemeClr val="tx1"/>
-          </a:solidFill>
-          <a:latin typeface="+mn-lt"/>
-          <a:ea typeface="+mn-ea"/>
-          <a:cs typeface="+mn-cs"/>
-        </a:defRPr>
-      </a:lvl3pPr>
-      <a:lvl4pPr marL="1600200" indent="-228600" algn="l" defTabSz="914400" rtl="0" eaLnBrk="1" latinLnBrk="0" hangingPunct="1">
-        <a:spcBef>
-          <a:spcPct val="20000"/>
-        </a:spcBef>
-        <a:buFont typeface="Arial" pitchFamily="34" charset="0"/>
-        <a:buChar char="–"/>
-        <a:defRPr sz="2000" kern="1200">
-          <a:solidFill>
-            <a:schemeClr val="tx1"/>
-          </a:solidFill>
-          <a:latin typeface="+mn-lt"/>
-          <a:ea typeface="+mn-ea"/>
-          <a:cs typeface="+mn-cs"/>
-        </a:defRPr>
-      </a:lvl4pPr>
-      <a:lvl5pPr marL="2057400" indent="-228600" algn="l" defTabSz="914400" rtl="0" eaLnBrk="1" latinLnBrk="0" hangingPunct="1">
-        <a:spcBef>
-          <a:spcPct val="20000"/>
-        </a:spcBef>
-        <a:buFont typeface="Arial" pitchFamily="34" charset="0"/>
-        <a:buChar char="»"/>
-        <a:defRPr sz="2000" kern="1200">
-          <a:solidFill>
-            <a:schemeClr val="tx1"/>
-          </a:solidFill>
-          <a:latin typeface="+mn-lt"/>
-          <a:ea typeface="+mn-ea"/>
-          <a:cs typeface="+mn-cs"/>
-        </a:defRPr>
-      </a:lvl5pPr>
-      <a:lvl6pPr marL="2514600" indent="-228600" algn="l" defTabSz="914400" rtl="0" eaLnBrk="1" latinLnBrk="0" hangingPunct="1">
-        <a:spcBef>
-          <a:spcPct val="20000"/>
-        </a:spcBef>
-        <a:buFont typeface="Arial" pitchFamily="34" charset="0"/>
-        <a:buChar char="•"/>
-        <a:defRPr sz="2000" kern="1200">
-          <a:solidFill>
-            <a:schemeClr val="tx1"/>
-          </a:solidFill>
-          <a:latin typeface="+mn-lt"/>
-          <a:ea typeface="+mn-ea"/>
-          <a:cs typeface="+mn-cs"/>
-        </a:defRPr>
-      </a:lvl6pPr>
-      <a:lvl7pPr marL="2971800" indent="-228600" algn="l" defTabSz="914400" rtl="0" eaLnBrk="1" latinLnBrk="0" hangingPunct="1">
-        <a:spcBef>
-          <a:spcPct val="20000"/>
-        </a:spcBef>
-        <a:buFont typeface="Arial" pitchFamily="34" charset="0"/>
-        <a:buChar char="•"/>
-        <a:defRPr sz="2000" kern="1200">
-          <a:solidFill>
-            <a:schemeClr val="tx1"/>
-          </a:solidFill>
-          <a:latin typeface="+mn-lt"/>
-          <a:ea typeface="+mn-ea"/>
-          <a:cs typeface="+mn-cs"/>
-        </a:defRPr>
-      </a:lvl7pPr>
-      <a:lvl8pPr marL="3429000" indent="-228600" algn="l" defTabSz="914400" rtl="0" eaLnBrk="1" latinLnBrk="0" hangingPunct="1">
-        <a:spcBef>
-          <a:spcPct val="20000"/>
-        </a:spcBef>
-        <a:buFont typeface="Arial" pitchFamily="34" charset="0"/>
-        <a:buChar char="•"/>
-        <a:defRPr sz="2000" kern="1200">
-          <a:solidFill>
-            <a:schemeClr val="tx1"/>
-          </a:solidFill>
-          <a:latin typeface="+mn-lt"/>
-          <a:ea typeface="+mn-ea"/>
-          <a:cs typeface="+mn-cs"/>
-        </a:defRPr>
-      </a:lvl8pPr>
-      <a:lvl9pPr marL="3886200" indent="-228600" algn="l" defTabSz="914400" rtl="0" eaLnBrk="1" latinLnBrk="0" hangingPunct="1">
-        <a:spcBef>
-          <a:spcPct val="20000"/>
-        </a:spcBef>
-        <a:buFont typeface="Arial" pitchFamily="34" charset="0"/>
-        <a:buChar char="•"/>
-        <a:defRPr sz="2000" kern="1200">
-          <a:solidFill>
-            <a:schemeClr val="tx1"/>
-          </a:solidFill>
-          <a:latin typeface="+mn-lt"/>
-          <a:ea typeface="+mn-ea"/>
-          <a:cs typeface="+mn-cs"/>
-        </a:defRPr>
-      </a:lvl9pPr>
-    </p:bodyStyle>
-    <p:otherStyle>
-      <a:defPPr>
-        <a:defRPr lang="zh-CN"/>
-      </a:defPPr>
-      <a:lvl1pPr marL="0" algn="l" defTabSz="914400" rtl="0" eaLnBrk="1" latinLnBrk="0" hangingPunct="1">
-        <a:defRPr sz="1800" kern="1200">
-          <a:solidFill>
-            <a:schemeClr val="tx1"/>
-          </a:solidFill>
-          <a:latin typeface="+mn-lt"/>
-          <a:ea typeface="+mn-ea"/>
-          <a:cs typeface="+mn-cs"/>
-        </a:defRPr>
-      </a:lvl1pPr>
-      <a:lvl2pPr marL="457200" algn="l" defTabSz="914400" rtl="0" eaLnBrk="1" latinLnBrk="0" hangingPunct="1">
-        <a:defRPr sz="1800" kern="1200">
-          <a:solidFill>
-            <a:schemeClr val="tx1"/>
-          </a:solidFill>
-          <a:latin typeface="+mn-lt"/>
-          <a:ea typeface="+mn-ea"/>
-          <a:cs typeface="+mn-cs"/>
-        </a:defRPr>
-      </a:lvl2pPr>
-      <a:lvl3pPr marL="914400" algn="l" defTabSz="914400" rtl="0" eaLnBrk="1" latinLnBrk="0" hangingPunct="1">
-        <a:defRPr sz="1800" kern="1200">
-          <a:solidFill>
-            <a:schemeClr val="tx1"/>
-          </a:solidFill>
-          <a:latin typeface="+mn-lt"/>
-          <a:ea typeface="+mn-ea"/>
-          <a:cs typeface="+mn-cs"/>
-        </a:defRPr>
-      </a:lvl3pPr>
-      <a:lvl4pPr marL="1371600" algn="l" defTabSz="914400" rtl="0" eaLnBrk="1" latinLnBrk="0" hangingPunct="1">
-        <a:defRPr sz="1800" kern="1200">
-          <a:solidFill>
-            <a:schemeClr val="tx1"/>
-          </a:solidFill>
-          <a:latin typeface="+mn-lt"/>
-          <a:ea typeface="+mn-ea"/>
-          <a:cs typeface="+mn-cs"/>
-        </a:defRPr>
-      </a:lvl4pPr>
-      <a:lvl5pPr marL="1828800" algn="l" defTabSz="914400" rtl="0" eaLnBrk="1" latinLnBrk="0" hangingPunct="1">
-        <a:defRPr sz="1800" kern="1200">
-          <a:solidFill>
-            <a:schemeClr val="tx1"/>
-          </a:solidFill>
-          <a:latin typeface="+mn-lt"/>
-          <a:ea typeface="+mn-ea"/>
-          <a:cs typeface="+mn-cs"/>
-        </a:defRPr>
-      </a:lvl5pPr>
-      <a:lvl6pPr marL="2286000" algn="l" defTabSz="914400" rtl="0" eaLnBrk="1" latinLnBrk="0" hangingPunct="1">
-        <a:defRPr sz="1800" kern="1200">
-          <a:solidFill>
-            <a:schemeClr val="tx1"/>
-          </a:solidFill>
-          <a:latin typeface="+mn-lt"/>
-          <a:ea typeface="+mn-ea"/>
-          <a:cs typeface="+mn-cs"/>
-        </a:defRPr>
-      </a:lvl6pPr>
-      <a:lvl7pPr marL="2743200" algn="l" defTabSz="914400" rtl="0" eaLnBrk="1" latinLnBrk="0" hangingPunct="1">
-        <a:defRPr sz="1800" kern="1200">
-          <a:solidFill>
-            <a:schemeClr val="tx1"/>
-          </a:solidFill>
-          <a:latin typeface="+mn-lt"/>
-          <a:ea typeface="+mn-ea"/>
-          <a:cs typeface="+mn-cs"/>
-        </a:defRPr>
-      </a:lvl7pPr>
-      <a:lvl8pPr marL="3200400" algn="l" defTabSz="914400" rtl="0" eaLnBrk="1" latinLnBrk="0" hangingPunct="1">
-        <a:defRPr sz="1800" kern="1200">
-          <a:solidFill>
-            <a:schemeClr val="tx1"/>
-          </a:solidFill>
-          <a:latin typeface="+mn-lt"/>
-          <a:ea typeface="+mn-ea"/>
-          <a:cs typeface="+mn-cs"/>
-        </a:defRPr>
-      </a:lvl8pPr>
-      <a:lvl9pPr marL="3657600" algn="l" defTabSz="914400" rtl="0" eaLnBrk="1" latinLnBrk="0" hangingPunct="1">
-        <a:defRPr sz="1800" kern="1200">
-          <a:solidFill>
-            <a:schemeClr val="tx1"/>
-          </a:solidFill>
-          <a:latin typeface="+mn-lt"/>
-          <a:ea typeface="+mn-ea"/>
-          <a:cs typeface="+mn-cs"/>
-        </a:defRPr>
-      </a:lvl9pPr>
-    </p:otherStyle>
-  </p:txStyles>
-</p:sldMaster>
-</file>
-
 <file path=ppt/slides/slide1.xml><?xml version="1.0" encoding="utf-8"?>
 <p:sld xmlns:a="http://schemas.openxmlformats.org/drawingml/2006/main" xmlns:r="http://schemas.openxmlformats.org/officeDocument/2006/relationships" xmlns:p="http://schemas.openxmlformats.org/presentationml/2006/main">
   <p:cSld>
@@ -10141,13 +6766,7 @@
           </p:nvPr>
         </p:nvPicPr>
         <p:blipFill>
-          <a:blip r:embed="rId6" cstate="email">
-            <a:extLst>
-              <a:ext uri="{28A0092B-C50C-407E-A947-70E740481C1C}">
-                <a14:useLocalDpi xmlns:a14="http://schemas.microsoft.com/office/drawing/2010/main"/>
-              </a:ext>
-            </a:extLst>
-          </a:blip>
+          <a:blip r:embed="rId2" cstate="email"/>
           <a:stretch>
             <a:fillRect/>
           </a:stretch>
@@ -10172,7 +6791,7 @@
           <p:cNvSpPr/>
           <p:nvPr>
             <p:custDataLst>
-              <p:tags r:id="rId2"/>
+              <p:tags r:id="rId3"/>
             </p:custDataLst>
           </p:nvPr>
         </p:nvSpPr>
@@ -10222,7 +6841,7 @@
           <p:cNvSpPr txBox="1"/>
           <p:nvPr>
             <p:custDataLst>
-              <p:tags r:id="rId3"/>
+              <p:tags r:id="rId4"/>
             </p:custDataLst>
           </p:nvPr>
         </p:nvSpPr>
@@ -10367,6 +6986,15 @@
               </a:rPr>
               <a:t>为何会产生这种信心？</a:t>
             </a:r>
+            <a:endParaRPr lang="zh-CN" altLang="en-US" sz="2400" b="1" dirty="0">
+              <a:solidFill>
+                <a:schemeClr val="tx1"/>
+              </a:solidFill>
+              <a:latin typeface="+mn-ea"/>
+              <a:ea typeface="+mn-ea"/>
+              <a:cs typeface="楷体" panose="02010609060101010101" pitchFamily="49" charset="-122"/>
+              <a:sym typeface="+mn-ea"/>
+            </a:endParaRPr>
           </a:p>
         </p:txBody>
       </p:sp>
@@ -10376,7 +7004,7 @@
           <p:cNvSpPr txBox="1"/>
           <p:nvPr>
             <p:custDataLst>
-              <p:tags r:id="rId4"/>
+              <p:tags r:id="rId5"/>
             </p:custDataLst>
           </p:nvPr>
         </p:nvSpPr>
@@ -10404,6 +7032,11 @@
               </a:rPr>
               <a:t>思考：</a:t>
             </a:r>
+            <a:endParaRPr lang="zh-CN" altLang="en-US" sz="2800" dirty="0">
+              <a:latin typeface="+mn-ea"/>
+              <a:ea typeface="+mn-ea"/>
+              <a:cs typeface="MiSans Bold" panose="00000800000000000000" charset="-122"/>
+            </a:endParaRPr>
           </a:p>
         </p:txBody>
       </p:sp>
@@ -10534,6 +7167,11 @@
               </a:rPr>
               <a:t>：</a:t>
             </a:r>
+            <a:endParaRPr lang="zh-CN" altLang="en-US" sz="2300" b="1" dirty="0">
+              <a:latin typeface="黑体" panose="02010609060101010101" pitchFamily="49" charset="-122"/>
+              <a:ea typeface="黑体" panose="02010609060101010101" pitchFamily="49" charset="-122"/>
+              <a:sym typeface="微软雅黑" panose="020B0503020204020204" pitchFamily="34" charset="-122"/>
+            </a:endParaRPr>
           </a:p>
           <a:p>
             <a:pPr marL="0" lvl="0" indent="0" algn="l" fontAlgn="ctr">
@@ -10622,6 +7260,15 @@
               </a:rPr>
               <a:t>；</a:t>
             </a:r>
+            <a:endParaRPr lang="zh-CN" altLang="en-US" sz="2300" b="1" spc="160" dirty="0">
+              <a:solidFill>
+                <a:schemeClr val="tx1"/>
+              </a:solidFill>
+              <a:uFillTx/>
+              <a:latin typeface="黑体" panose="02010609060101010101" pitchFamily="49" charset="-122"/>
+              <a:ea typeface="黑体" panose="02010609060101010101" pitchFamily="49" charset="-122"/>
+              <a:sym typeface="+mn-ea"/>
+            </a:endParaRPr>
           </a:p>
           <a:p>
             <a:pPr marL="0" lvl="0" indent="0" algn="l" fontAlgn="ctr">
@@ -10698,6 +7345,15 @@
               </a:rPr>
               <a:t>；</a:t>
             </a:r>
+            <a:endParaRPr lang="zh-CN" altLang="en-US" sz="2300" b="1" spc="160" dirty="0">
+              <a:solidFill>
+                <a:schemeClr val="tx1"/>
+              </a:solidFill>
+              <a:uFillTx/>
+              <a:latin typeface="黑体" panose="02010609060101010101" pitchFamily="49" charset="-122"/>
+              <a:ea typeface="黑体" panose="02010609060101010101" pitchFamily="49" charset="-122"/>
+              <a:sym typeface="+mn-ea"/>
+            </a:endParaRPr>
           </a:p>
           <a:p>
             <a:pPr marL="0" lvl="0" indent="0" algn="l" fontAlgn="ctr">
@@ -10774,6 +7430,15 @@
               </a:rPr>
               <a:t>；</a:t>
             </a:r>
+            <a:endParaRPr lang="zh-CN" altLang="en-US" sz="2300" b="1" spc="160" dirty="0">
+              <a:solidFill>
+                <a:schemeClr val="tx1"/>
+              </a:solidFill>
+              <a:uFillTx/>
+              <a:latin typeface="黑体" panose="02010609060101010101" pitchFamily="49" charset="-122"/>
+              <a:ea typeface="黑体" panose="02010609060101010101" pitchFamily="49" charset="-122"/>
+              <a:sym typeface="+mn-ea"/>
+            </a:endParaRPr>
           </a:p>
           <a:p>
             <a:pPr marL="0" lvl="0" indent="0" algn="l" fontAlgn="ctr">
@@ -10954,6 +7619,11 @@
               </a:rPr>
               <a:t>让中国人更加自信</a:t>
             </a:r>
+            <a:endParaRPr lang="zh-CN" altLang="en-US" sz="2300" b="1" dirty="0">
+              <a:latin typeface="黑体" panose="02010609060101010101" pitchFamily="49" charset="-122"/>
+              <a:ea typeface="黑体" panose="02010609060101010101" pitchFamily="49" charset="-122"/>
+              <a:sym typeface="微软雅黑" panose="020B0503020204020204" pitchFamily="34" charset="-122"/>
+            </a:endParaRPr>
           </a:p>
         </p:txBody>
       </p:sp>
@@ -11102,6 +7772,13 @@
               </a:rPr>
               <a:t>道路自信</a:t>
             </a:r>
+            <a:endParaRPr lang="zh-CN" altLang="en-US" sz="2200" b="1" dirty="0">
+              <a:solidFill>
+                <a:schemeClr val="bg1"/>
+              </a:solidFill>
+              <a:latin typeface="+mj-ea"/>
+              <a:ea typeface="+mj-ea"/>
+            </a:endParaRPr>
           </a:p>
         </p:txBody>
       </p:sp>
@@ -11146,6 +7823,7 @@
               <a:rPr lang="zh-CN" altLang="en-US" sz="2200" dirty="0"/>
               <a:t>理论自信</a:t>
             </a:r>
+            <a:endParaRPr lang="zh-CN" altLang="en-US" sz="2200" dirty="0"/>
           </a:p>
         </p:txBody>
       </p:sp>
@@ -11190,6 +7868,7 @@
               <a:rPr lang="zh-CN" altLang="en-US" sz="2200" dirty="0"/>
               <a:t>制度自信</a:t>
             </a:r>
+            <a:endParaRPr lang="zh-CN" altLang="en-US" sz="2200" dirty="0"/>
           </a:p>
         </p:txBody>
       </p:sp>
@@ -11234,6 +7913,7 @@
               <a:rPr lang="zh-CN" altLang="en-US" sz="2200" dirty="0"/>
               <a:t>文化自信</a:t>
             </a:r>
+            <a:endParaRPr lang="zh-CN" altLang="en-US" sz="2200" dirty="0"/>
           </a:p>
         </p:txBody>
       </p:sp>
@@ -12166,6 +8846,17 @@
               </a:rPr>
               <a:t>。</a:t>
             </a:r>
+            <a:endParaRPr lang="zh-CN" altLang="en-US" sz="2400" b="1" u="sng" spc="160" dirty="0">
+              <a:solidFill>
+                <a:schemeClr val="tx1">
+                  <a:lumMod val="75000"/>
+                  <a:lumOff val="25000"/>
+                </a:schemeClr>
+              </a:solidFill>
+              <a:latin typeface="+mj-ea"/>
+              <a:ea typeface="+mj-ea"/>
+              <a:sym typeface="+mn-ea"/>
+            </a:endParaRPr>
           </a:p>
         </p:txBody>
       </p:sp>
@@ -12222,6 +8913,14 @@
               </a:rPr>
               <a:t>“三感”</a:t>
             </a:r>
+            <a:endParaRPr kumimoji="0" lang="zh-CN" altLang="en-US" sz="2400" b="1" i="0" kern="0" cap="none" spc="0" normalizeH="0" baseline="0" noProof="0" dirty="0">
+              <a:solidFill>
+                <a:srgbClr val="C00000"/>
+              </a:solidFill>
+              <a:latin typeface="+mj-ea"/>
+              <a:ea typeface="+mj-ea"/>
+              <a:cs typeface="汉仪颜楷简" panose="02010600030101010101" charset="-122"/>
+            </a:endParaRPr>
           </a:p>
         </p:txBody>
       </p:sp>
@@ -12322,6 +9021,10 @@
               </a:rPr>
               <a:t>、</a:t>
             </a:r>
+            <a:endParaRPr lang="zh-CN" altLang="en-US" sz="2400" b="1" dirty="0">
+              <a:latin typeface="+mj-ea"/>
+              <a:ea typeface="+mj-ea"/>
+            </a:endParaRPr>
           </a:p>
           <a:p>
             <a:pPr marL="457200" indent="-457200" eaLnBrk="0" hangingPunct="0">
@@ -12357,6 +9060,10 @@
               </a:rPr>
               <a:t>。</a:t>
             </a:r>
+            <a:endParaRPr lang="zh-CN" altLang="en-US" sz="2400" b="1" dirty="0">
+              <a:latin typeface="+mj-ea"/>
+              <a:ea typeface="+mj-ea"/>
+            </a:endParaRPr>
           </a:p>
         </p:txBody>
       </p:sp>
@@ -12413,6 +9120,14 @@
               </a:rPr>
               <a:t>“两自觉”</a:t>
             </a:r>
+            <a:endParaRPr kumimoji="0" lang="zh-CN" altLang="en-US" sz="2400" b="1" i="0" kern="0" cap="none" spc="0" normalizeH="0" baseline="0" noProof="0" dirty="0">
+              <a:solidFill>
+                <a:srgbClr val="C00000"/>
+              </a:solidFill>
+              <a:latin typeface="+mj-ea"/>
+              <a:ea typeface="+mj-ea"/>
+              <a:cs typeface="汉仪颜楷简" panose="02010600030101010101" charset="-122"/>
+            </a:endParaRPr>
           </a:p>
         </p:txBody>
       </p:sp>
@@ -12491,6 +9206,10 @@
               </a:rPr>
               <a:t>，</a:t>
             </a:r>
+            <a:endParaRPr lang="zh-CN" altLang="en-US" sz="2400" b="1" dirty="0">
+              <a:latin typeface="+mj-ea"/>
+              <a:ea typeface="+mj-ea"/>
+            </a:endParaRPr>
           </a:p>
           <a:p>
             <a:pPr marL="457200" indent="-457200" eaLnBrk="0" hangingPunct="0">
@@ -12547,6 +9266,10 @@
               </a:rPr>
               <a:t>。</a:t>
             </a:r>
+            <a:endParaRPr lang="zh-CN" altLang="en-US" sz="2400" b="1" dirty="0">
+              <a:latin typeface="+mj-ea"/>
+              <a:ea typeface="+mj-ea"/>
+            </a:endParaRPr>
           </a:p>
         </p:txBody>
       </p:sp>
@@ -12643,6 +9366,20 @@
               </a:rPr>
               <a:t> </a:t>
             </a:r>
+            <a:endParaRPr kumimoji="0" lang="en-US" altLang="zh-CN" sz="2400" b="1" i="0" u="none" strike="noStrike" kern="1200" cap="none" spc="0" normalizeH="0" baseline="0" noProof="0" dirty="0">
+              <a:ln>
+                <a:noFill/>
+              </a:ln>
+              <a:solidFill>
+                <a:srgbClr val="C00000"/>
+              </a:solidFill>
+              <a:effectLst/>
+              <a:uLnTx/>
+              <a:uFillTx/>
+              <a:latin typeface="+mj-ea"/>
+              <a:ea typeface="+mj-ea"/>
+              <a:cs typeface="Arial" panose="020B0604020202020204"/>
+            </a:endParaRPr>
           </a:p>
         </p:txBody>
       </p:sp>
@@ -13232,6 +9969,13 @@
               </a:rPr>
               <a:t>对文化有底气</a:t>
             </a:r>
+            <a:endParaRPr lang="zh-CN" altLang="en-US" sz="2800" b="1" dirty="0">
+              <a:solidFill>
+                <a:schemeClr val="bg1"/>
+              </a:solidFill>
+              <a:ea typeface="黑体" panose="02010609060101010101" pitchFamily="49" charset="-122"/>
+              <a:sym typeface="Arial" panose="020B0604020202020204" pitchFamily="34" charset="0"/>
+            </a:endParaRPr>
           </a:p>
         </p:txBody>
       </p:sp>
@@ -13248,13 +9992,7 @@
           </p:nvPr>
         </p:nvPicPr>
         <p:blipFill>
-          <a:blip r:embed="rId5" cstate="email">
-            <a:extLst>
-              <a:ext uri="{28A0092B-C50C-407E-A947-70E740481C1C}">
-                <a14:useLocalDpi xmlns:a14="http://schemas.microsoft.com/office/drawing/2010/main"/>
-              </a:ext>
-            </a:extLst>
-          </a:blip>
+          <a:blip r:embed="rId3" cstate="email"/>
           <a:stretch>
             <a:fillRect/>
           </a:stretch>
@@ -13284,12 +10022,12 @@
           </p:cNvPicPr>
           <p:nvPr>
             <p:custDataLst>
-              <p:tags r:id="rId3"/>
+              <p:tags r:id="rId4"/>
             </p:custDataLst>
           </p:nvPr>
         </p:nvPicPr>
         <p:blipFill>
-          <a:blip r:embed="rId6"/>
+          <a:blip r:embed="rId5"/>
           <a:stretch>
             <a:fillRect/>
           </a:stretch>
@@ -13648,6 +10386,14 @@
               </a:rPr>
               <a:t>对国家有认同</a:t>
             </a:r>
+            <a:endParaRPr lang="zh-CN" altLang="en-US" sz="2800" b="1" dirty="0">
+              <a:solidFill>
+                <a:srgbClr val="C00000"/>
+              </a:solidFill>
+              <a:latin typeface="黑体" panose="02010609060101010101" pitchFamily="49" charset="-122"/>
+              <a:ea typeface="黑体" panose="02010609060101010101" pitchFamily="49" charset="-122"/>
+              <a:sym typeface="微软雅黑" panose="020B0503020204020204" pitchFamily="34" charset="-122"/>
+            </a:endParaRPr>
           </a:p>
           <a:p>
             <a:pPr lvl="0" fontAlgn="auto">
@@ -13685,6 +10431,14 @@
               </a:rPr>
               <a:t>对文化有底气</a:t>
             </a:r>
+            <a:endParaRPr lang="zh-CN" altLang="en-US" sz="2800" b="1" dirty="0">
+              <a:solidFill>
+                <a:srgbClr val="C00000"/>
+              </a:solidFill>
+              <a:latin typeface="黑体" panose="02010609060101010101" pitchFamily="49" charset="-122"/>
+              <a:ea typeface="黑体" panose="02010609060101010101" pitchFamily="49" charset="-122"/>
+              <a:sym typeface="+mn-ea"/>
+            </a:endParaRPr>
           </a:p>
           <a:p>
             <a:pPr lvl="0" fontAlgn="auto">
@@ -13951,6 +10705,14 @@
               </a:rPr>
               <a:t>理性平和、不卑不亢、开放包容的心态。</a:t>
             </a:r>
+            <a:endParaRPr lang="zh-CN" altLang="en-US" sz="2400" b="1" dirty="0">
+              <a:solidFill>
+                <a:srgbClr val="C00000"/>
+              </a:solidFill>
+              <a:latin typeface="黑体" panose="02010609060101010101" pitchFamily="49" charset="-122"/>
+              <a:ea typeface="黑体" panose="02010609060101010101" pitchFamily="49" charset="-122"/>
+              <a:sym typeface="+mn-ea"/>
+            </a:endParaRPr>
           </a:p>
           <a:p>
             <a:pPr>
@@ -14425,7 +11187,7 @@
             <p:cNvSpPr txBox="1"/>
             <p:nvPr>
               <p:custDataLst>
-                <p:tags r:id="rId6"/>
+                <p:tags r:id="rId3"/>
               </p:custDataLst>
             </p:nvPr>
           </p:nvSpPr>
@@ -14456,6 +11218,13 @@
                 </a:rPr>
                 <a:t>共圆中国梦</a:t>
               </a:r>
+              <a:endParaRPr lang="zh-CN" altLang="en-US" sz="2800" b="1" dirty="0">
+                <a:solidFill>
+                  <a:srgbClr val="FF0000"/>
+                </a:solidFill>
+                <a:latin typeface="黑体" panose="02010609060101010101" pitchFamily="49" charset="-122"/>
+                <a:ea typeface="黑体" panose="02010609060101010101" pitchFamily="49" charset="-122"/>
+              </a:endParaRPr>
             </a:p>
           </p:txBody>
         </p:sp>
@@ -14465,7 +11234,7 @@
             <p:cNvSpPr txBox="1"/>
             <p:nvPr>
               <p:custDataLst>
-                <p:tags r:id="rId7"/>
+                <p:tags r:id="rId4"/>
               </p:custDataLst>
             </p:nvPr>
           </p:nvSpPr>
@@ -14498,6 +11267,11 @@
                 </a:rPr>
                 <a:t>圆梦大舞台</a:t>
               </a:r>
+              <a:endParaRPr lang="zh-CN" altLang="en-US" sz="2400" b="1" dirty="0">
+                <a:latin typeface="黑体" panose="02010609060101010101" pitchFamily="49" charset="-122"/>
+                <a:ea typeface="黑体" panose="02010609060101010101" pitchFamily="49" charset="-122"/>
+                <a:sym typeface="+mn-ea"/>
+              </a:endParaRPr>
             </a:p>
           </p:txBody>
         </p:sp>
@@ -14507,7 +11281,7 @@
             <p:cNvSpPr/>
             <p:nvPr>
               <p:custDataLst>
-                <p:tags r:id="rId8"/>
+                <p:tags r:id="rId5"/>
               </p:custDataLst>
             </p:nvPr>
           </p:nvSpPr>
@@ -14559,7 +11333,7 @@
             <p:cNvSpPr txBox="1"/>
             <p:nvPr>
               <p:custDataLst>
-                <p:tags r:id="rId9"/>
+                <p:tags r:id="rId6"/>
               </p:custDataLst>
             </p:nvPr>
           </p:nvSpPr>
@@ -14592,6 +11366,11 @@
                 </a:rPr>
                 <a:t>自信的中国人</a:t>
               </a:r>
+              <a:endParaRPr lang="zh-CN" altLang="en-US" sz="2400" b="1" dirty="0">
+                <a:latin typeface="黑体" panose="02010609060101010101" pitchFamily="49" charset="-122"/>
+                <a:ea typeface="黑体" panose="02010609060101010101" pitchFamily="49" charset="-122"/>
+                <a:sym typeface="+mn-ea"/>
+              </a:endParaRPr>
             </a:p>
           </p:txBody>
         </p:sp>
@@ -14602,7 +11381,7 @@
           <p:cNvSpPr/>
           <p:nvPr>
             <p:custDataLst>
-              <p:tags r:id="rId3"/>
+              <p:tags r:id="rId7"/>
             </p:custDataLst>
           </p:nvPr>
         </p:nvSpPr>
@@ -14661,7 +11440,7 @@
           <p:cNvSpPr/>
           <p:nvPr>
             <p:custDataLst>
-              <p:tags r:id="rId4"/>
+              <p:tags r:id="rId8"/>
             </p:custDataLst>
           </p:nvPr>
         </p:nvSpPr>
@@ -14749,6 +11528,18 @@
               </a:rPr>
               <a:t>知道如何实现中国梦</a:t>
             </a:r>
+            <a:endParaRPr kumimoji="0" lang="zh-CN" altLang="en-US" sz="2400" b="1" i="0" u="none" strike="noStrike" kern="0" cap="none" spc="0" normalizeH="0" baseline="0" noProof="0" dirty="0">
+              <a:ln>
+                <a:noFill/>
+              </a:ln>
+              <a:effectLst/>
+              <a:uLnTx/>
+              <a:uFillTx/>
+              <a:latin typeface="黑体" panose="02010609060101010101" pitchFamily="49" charset="-122"/>
+              <a:ea typeface="黑体" panose="02010609060101010101" pitchFamily="49" charset="-122"/>
+              <a:cs typeface="微软雅黑" panose="020B0503020204020204" pitchFamily="34" charset="-122"/>
+              <a:sym typeface="Arial" panose="020B0604020202020204" pitchFamily="34" charset="0"/>
+            </a:endParaRPr>
           </a:p>
           <a:p>
             <a:pPr indent="0">
@@ -14815,6 +11606,18 @@
               </a:rPr>
               <a:t>新时代需要奋斗的原因</a:t>
             </a:r>
+            <a:endParaRPr kumimoji="0" lang="zh-CN" altLang="en-US" sz="2400" b="1" i="0" u="none" strike="noStrike" kern="0" cap="none" spc="0" normalizeH="0" baseline="0" noProof="0" dirty="0">
+              <a:ln>
+                <a:noFill/>
+              </a:ln>
+              <a:effectLst/>
+              <a:uLnTx/>
+              <a:uFillTx/>
+              <a:latin typeface="黑体" panose="02010609060101010101" pitchFamily="49" charset="-122"/>
+              <a:ea typeface="黑体" panose="02010609060101010101" pitchFamily="49" charset="-122"/>
+              <a:cs typeface="微软雅黑" panose="020B0503020204020204" pitchFamily="34" charset="-122"/>
+              <a:sym typeface="Arial" panose="020B0604020202020204" pitchFamily="34" charset="0"/>
+            </a:endParaRPr>
           </a:p>
           <a:p>
             <a:pPr indent="0">
@@ -14848,7 +11651,7 @@
           <p:cNvSpPr txBox="1"/>
           <p:nvPr>
             <p:custDataLst>
-              <p:tags r:id="rId5"/>
+              <p:tags r:id="rId9"/>
             </p:custDataLst>
           </p:nvPr>
         </p:nvSpPr>
@@ -14903,6 +11706,18 @@
               </a:rPr>
               <a:t>中国人自信的原因</a:t>
             </a:r>
+            <a:endParaRPr lang="zh-CN" altLang="en-US" sz="2400" b="1" kern="0" noProof="0" dirty="0">
+              <a:ln>
+                <a:noFill/>
+              </a:ln>
+              <a:effectLst/>
+              <a:uLnTx/>
+              <a:uFillTx/>
+              <a:latin typeface="黑体" panose="02010609060101010101" pitchFamily="49" charset="-122"/>
+              <a:ea typeface="黑体" panose="02010609060101010101" pitchFamily="49" charset="-122"/>
+              <a:cs typeface="+mj-ea"/>
+              <a:sym typeface="+mn-ea"/>
+            </a:endParaRPr>
           </a:p>
           <a:p>
             <a:pPr>
@@ -14959,6 +11774,18 @@
               </a:rPr>
               <a:t>自信中国人的表现</a:t>
             </a:r>
+            <a:endParaRPr lang="zh-CN" altLang="en-US" sz="2400" b="1" kern="0" noProof="0" dirty="0">
+              <a:ln>
+                <a:noFill/>
+              </a:ln>
+              <a:effectLst/>
+              <a:uLnTx/>
+              <a:uFillTx/>
+              <a:latin typeface="黑体" panose="02010609060101010101" pitchFamily="49" charset="-122"/>
+              <a:ea typeface="黑体" panose="02010609060101010101" pitchFamily="49" charset="-122"/>
+              <a:cs typeface="+mj-ea"/>
+              <a:sym typeface="+mn-ea"/>
+            </a:endParaRPr>
           </a:p>
           <a:p>
             <a:pPr>
@@ -15015,6 +11842,18 @@
               </a:rPr>
               <a:t>如何做自信中国人</a:t>
             </a:r>
+            <a:endParaRPr lang="zh-CN" altLang="en-US" sz="2400" b="1" kern="0" noProof="0" dirty="0">
+              <a:ln>
+                <a:noFill/>
+              </a:ln>
+              <a:effectLst/>
+              <a:uLnTx/>
+              <a:uFillTx/>
+              <a:latin typeface="黑体" panose="02010609060101010101" pitchFamily="49" charset="-122"/>
+              <a:ea typeface="黑体" panose="02010609060101010101" pitchFamily="49" charset="-122"/>
+              <a:cs typeface="+mj-ea"/>
+              <a:sym typeface="+mn-ea"/>
+            </a:endParaRPr>
           </a:p>
           <a:p>
             <a:endParaRPr lang="zh-CN" altLang="en-US" sz="2400" b="1" kern="0" noProof="0" dirty="0">
@@ -15112,6 +11951,9 @@
               </a:rPr>
               <a:t>1.“中国力量”，归根结底还是人民的力量。“全国各族人民一定要牢记使命，心往一处想，劲往一处使，用十三亿人的智慧和力量汇集起不可战胜的磅礴力量。”这说明(　　)</a:t>
             </a:r>
+            <a:endParaRPr lang="zh-CN" altLang="en-US" sz="2400" dirty="0">
+              <a:ea typeface="黑体" panose="02010609060101010101" pitchFamily="49" charset="-122"/>
+            </a:endParaRPr>
           </a:p>
           <a:p>
             <a:pPr algn="just">
@@ -15125,6 +11967,9 @@
               </a:rPr>
               <a:t>①中国力量就是全国各族人民大团结的力量 </a:t>
             </a:r>
+            <a:endParaRPr lang="zh-CN" altLang="en-US" sz="2400" dirty="0">
+              <a:ea typeface="黑体" panose="02010609060101010101" pitchFamily="49" charset="-122"/>
+            </a:endParaRPr>
           </a:p>
           <a:p>
             <a:pPr algn="just">
@@ -15138,6 +11983,9 @@
               </a:rPr>
               <a:t>②人民是历史的创造者，是梦想的实现者</a:t>
             </a:r>
+            <a:endParaRPr lang="zh-CN" altLang="en-US" sz="2400" dirty="0">
+              <a:ea typeface="黑体" panose="02010609060101010101" pitchFamily="49" charset="-122"/>
+            </a:endParaRPr>
           </a:p>
           <a:p>
             <a:pPr algn="just">
@@ -15151,6 +11999,9 @@
               </a:rPr>
               <a:t>③个人的力量对于实现中国梦是可有可无的 </a:t>
             </a:r>
+            <a:endParaRPr lang="zh-CN" altLang="en-US" sz="2400" dirty="0">
+              <a:ea typeface="黑体" panose="02010609060101010101" pitchFamily="49" charset="-122"/>
+            </a:endParaRPr>
           </a:p>
           <a:p>
             <a:pPr algn="just">
@@ -15164,6 +12015,9 @@
               </a:rPr>
               <a:t>④实现中国梦必须凝聚中国力量</a:t>
             </a:r>
+            <a:endParaRPr lang="zh-CN" altLang="en-US" sz="2400" dirty="0">
+              <a:ea typeface="黑体" panose="02010609060101010101" pitchFamily="49" charset="-122"/>
+            </a:endParaRPr>
           </a:p>
           <a:p>
             <a:pPr algn="just">
@@ -15223,6 +12077,15 @@
               </a:rPr>
               <a:t>C</a:t>
             </a:r>
+            <a:endParaRPr lang="en-US" altLang="zh-CN" sz="2800" b="1" dirty="0">
+              <a:solidFill>
+                <a:srgbClr val="FF0000"/>
+              </a:solidFill>
+              <a:latin typeface="Times New Roman" panose="02020603050405020304" pitchFamily="18" charset="0"/>
+              <a:ea typeface="黑体" panose="02010609060101010101" pitchFamily="49" charset="-122"/>
+              <a:cs typeface="Times New Roman" panose="02020603050405020304" pitchFamily="18" charset="0"/>
+              <a:sym typeface="+mn-ea"/>
+            </a:endParaRPr>
           </a:p>
         </p:txBody>
       </p:sp>
@@ -15384,6 +12247,9 @@
               </a:rPr>
               <a:t>)</a:t>
             </a:r>
+            <a:endParaRPr lang="zh-CN" altLang="en-US" sz="2400" dirty="0">
+              <a:ea typeface="黑体" panose="02010609060101010101" pitchFamily="49" charset="-122"/>
+            </a:endParaRPr>
           </a:p>
           <a:p>
             <a:pPr algn="just">
@@ -15397,6 +12263,9 @@
               </a:rPr>
               <a:t>①民族精神        ②时代精神   </a:t>
             </a:r>
+            <a:endParaRPr lang="zh-CN" altLang="en-US" sz="2400" dirty="0">
+              <a:ea typeface="黑体" panose="02010609060101010101" pitchFamily="49" charset="-122"/>
+            </a:endParaRPr>
           </a:p>
           <a:p>
             <a:pPr algn="just">
@@ -15410,6 +12279,9 @@
               </a:rPr>
               <a:t>③奥运精神        ④雷锋精神</a:t>
             </a:r>
+            <a:endParaRPr lang="zh-CN" altLang="en-US" sz="2400" dirty="0">
+              <a:ea typeface="黑体" panose="02010609060101010101" pitchFamily="49" charset="-122"/>
+            </a:endParaRPr>
           </a:p>
           <a:p>
             <a:pPr algn="just">
@@ -15435,6 +12307,9 @@
               </a:rPr>
               <a:t>C.①③            D.②④</a:t>
             </a:r>
+            <a:endParaRPr lang="zh-CN" altLang="en-US" sz="2400" dirty="0">
+              <a:ea typeface="黑体" panose="02010609060101010101" pitchFamily="49" charset="-122"/>
+            </a:endParaRPr>
           </a:p>
         </p:txBody>
       </p:sp>
@@ -15472,6 +12347,15 @@
               </a:rPr>
               <a:t>A</a:t>
             </a:r>
+            <a:endParaRPr lang="zh-CN" sz="2800" b="1" dirty="0">
+              <a:solidFill>
+                <a:srgbClr val="FF0000"/>
+              </a:solidFill>
+              <a:latin typeface="Times New Roman" panose="02020603050405020304" pitchFamily="18" charset="0"/>
+              <a:ea typeface="黑体" panose="02010609060101010101" pitchFamily="49" charset="-122"/>
+              <a:cs typeface="Times New Roman" panose="02020603050405020304" pitchFamily="18" charset="0"/>
+              <a:sym typeface="+mn-ea"/>
+            </a:endParaRPr>
           </a:p>
         </p:txBody>
       </p:sp>
@@ -15641,6 +12525,13 @@
               </a:rPr>
               <a:t>基础型作业：梳理本节课知识整理。</a:t>
             </a:r>
+            <a:endParaRPr lang="zh-CN" altLang="en-US" sz="2400" dirty="0">
+              <a:solidFill>
+                <a:schemeClr val="bg1"/>
+              </a:solidFill>
+              <a:latin typeface="黑体" panose="02010609060101010101" pitchFamily="49" charset="-122"/>
+              <a:ea typeface="黑体" panose="02010609060101010101" pitchFamily="49" charset="-122"/>
+            </a:endParaRPr>
           </a:p>
           <a:p>
             <a:pPr>
@@ -15668,6 +12559,13 @@
               </a:rPr>
               <a:t>发展型作业：完成课时练习。</a:t>
             </a:r>
+            <a:endParaRPr lang="zh-CN" altLang="en-US" sz="2400" dirty="0">
+              <a:solidFill>
+                <a:schemeClr val="bg1"/>
+              </a:solidFill>
+              <a:latin typeface="黑体" panose="02010609060101010101" pitchFamily="49" charset="-122"/>
+              <a:ea typeface="黑体" panose="02010609060101010101" pitchFamily="49" charset="-122"/>
+            </a:endParaRPr>
           </a:p>
         </p:txBody>
       </p:sp>
@@ -15884,1558 +12782,6 @@
 </p:sld>
 </file>
 
-<file path=ppt/slides/slide20.xml><?xml version="1.0" encoding="utf-8"?>
-<p:sld xmlns:a="http://schemas.openxmlformats.org/drawingml/2006/main" xmlns:r="http://schemas.openxmlformats.org/officeDocument/2006/relationships" xmlns:p="http://schemas.openxmlformats.org/presentationml/2006/main">
-  <p:cSld>
-    <p:spTree>
-      <p:nvGrpSpPr>
-        <p:cNvPr id="1" name=""/>
-        <p:cNvGrpSpPr/>
-        <p:nvPr/>
-      </p:nvGrpSpPr>
-      <p:grpSpPr>
-        <a:xfrm>
-          <a:off x="0" y="0"/>
-          <a:ext cx="0" cy="0"/>
-          <a:chOff x="0" y="0"/>
-          <a:chExt cx="0" cy="0"/>
-        </a:xfrm>
-      </p:grpSpPr>
-      <p:sp>
-        <p:nvSpPr>
-          <p:cNvPr id="5" name="矩形 4"/>
-          <p:cNvSpPr/>
-          <p:nvPr/>
-        </p:nvSpPr>
-        <p:spPr>
-          <a:xfrm>
-            <a:off x="948169" y="3294106"/>
-            <a:ext cx="7247667" cy="1620180"/>
-          </a:xfrm>
-          <a:prstGeom prst="rect">
-            <a:avLst/>
-          </a:prstGeom>
-          <a:noFill/>
-          <a:ln>
-            <a:noFill/>
-          </a:ln>
-        </p:spPr>
-        <p:style>
-          <a:lnRef idx="2">
-            <a:schemeClr val="accent1">
-              <a:shade val="50000"/>
-            </a:schemeClr>
-          </a:lnRef>
-          <a:fillRef idx="1">
-            <a:schemeClr val="accent1"/>
-          </a:fillRef>
-          <a:effectRef idx="0">
-            <a:schemeClr val="accent1"/>
-          </a:effectRef>
-          <a:fontRef idx="minor">
-            <a:schemeClr val="lt1"/>
-          </a:fontRef>
-        </p:style>
-        <p:txBody>
-          <a:bodyPr rtlCol="0" anchor="ctr"/>
-          <a:lstStyle/>
-          <a:p>
-            <a:pPr fontAlgn="auto">
-              <a:spcBef>
-                <a:spcPts val="0"/>
-              </a:spcBef>
-              <a:spcAft>
-                <a:spcPts val="0"/>
-              </a:spcAft>
-              <a:buFontTx/>
-              <a:buNone/>
-            </a:pPr>
-            <a:r>
-              <a:rPr lang="en-US" altLang="zh-CN" sz="1200" dirty="0">
-                <a:solidFill>
-                  <a:srgbClr val="EEECE1">
-                    <a:lumMod val="25000"/>
-                  </a:srgbClr>
-                </a:solidFill>
-                <a:latin typeface="微软雅黑" panose="020B0503020204020204" pitchFamily="34" charset="-122"/>
-                <a:ea typeface="微软雅黑" panose="020B0503020204020204" pitchFamily="34" charset="-122"/>
-              </a:rPr>
-              <a:t>PPT</a:t>
-            </a:r>
-            <a:r>
-              <a:rPr lang="zh-CN" altLang="en-US" sz="1200" dirty="0">
-                <a:solidFill>
-                  <a:srgbClr val="EEECE1">
-                    <a:lumMod val="25000"/>
-                  </a:srgbClr>
-                </a:solidFill>
-                <a:latin typeface="微软雅黑" panose="020B0503020204020204" pitchFamily="34" charset="-122"/>
-                <a:ea typeface="微软雅黑" panose="020B0503020204020204" pitchFamily="34" charset="-122"/>
-              </a:rPr>
-              <a:t>模</a:t>
-            </a:r>
-            <a:r>
-              <a:rPr lang="zh-CN" altLang="en-US" sz="1200" dirty="0" smtClean="0">
-                <a:solidFill>
-                  <a:srgbClr val="EEECE1">
-                    <a:lumMod val="25000"/>
-                  </a:srgbClr>
-                </a:solidFill>
-                <a:latin typeface="微软雅黑" panose="020B0503020204020204" pitchFamily="34" charset="-122"/>
-                <a:ea typeface="微软雅黑" panose="020B0503020204020204" pitchFamily="34" charset="-122"/>
-              </a:rPr>
-              <a:t>板：       </a:t>
-            </a:r>
-            <a:r>
-              <a:rPr lang="en-US" altLang="zh-CN" sz="1200" dirty="0" smtClean="0">
-                <a:solidFill>
-                  <a:srgbClr val="EEECE1">
-                    <a:lumMod val="25000"/>
-                  </a:srgbClr>
-                </a:solidFill>
-                <a:latin typeface="微软雅黑" panose="020B0503020204020204" pitchFamily="34" charset="-122"/>
-                <a:ea typeface="微软雅黑" panose="020B0503020204020204" pitchFamily="34" charset="-122"/>
-                <a:hlinkClick r:id="rId2"/>
-              </a:rPr>
-              <a:t>www.1ppt.com/moban</a:t>
-            </a:r>
-            <a:r>
-              <a:rPr lang="en-US" altLang="zh-CN" sz="1200" dirty="0">
-                <a:solidFill>
-                  <a:srgbClr val="EEECE1">
-                    <a:lumMod val="25000"/>
-                  </a:srgbClr>
-                </a:solidFill>
-                <a:latin typeface="微软雅黑" panose="020B0503020204020204" pitchFamily="34" charset="-122"/>
-                <a:ea typeface="微软雅黑" panose="020B0503020204020204" pitchFamily="34" charset="-122"/>
-                <a:hlinkClick r:id="rId2"/>
-              </a:rPr>
-              <a:t>/</a:t>
-            </a:r>
-            <a:r>
-              <a:rPr lang="en-US" altLang="zh-CN" sz="1200" dirty="0">
-                <a:solidFill>
-                  <a:srgbClr val="EEECE1">
-                    <a:lumMod val="25000"/>
-                  </a:srgbClr>
-                </a:solidFill>
-                <a:latin typeface="微软雅黑" panose="020B0503020204020204" pitchFamily="34" charset="-122"/>
-                <a:ea typeface="微软雅黑" panose="020B0503020204020204" pitchFamily="34" charset="-122"/>
-              </a:rPr>
-              <a:t>     </a:t>
-            </a:r>
-            <a:r>
-              <a:rPr lang="en-US" altLang="zh-CN" sz="1200" dirty="0" smtClean="0">
-                <a:solidFill>
-                  <a:srgbClr val="EEECE1">
-                    <a:lumMod val="25000"/>
-                  </a:srgbClr>
-                </a:solidFill>
-                <a:latin typeface="微软雅黑" panose="020B0503020204020204" pitchFamily="34" charset="-122"/>
-                <a:ea typeface="微软雅黑" panose="020B0503020204020204" pitchFamily="34" charset="-122"/>
-              </a:rPr>
-              <a:t>               </a:t>
-            </a:r>
-            <a:r>
-              <a:rPr lang="zh-CN" altLang="en-US" sz="1200" dirty="0" smtClean="0">
-                <a:solidFill>
-                  <a:srgbClr val="EEECE1">
-                    <a:lumMod val="25000"/>
-                  </a:srgbClr>
-                </a:solidFill>
-                <a:latin typeface="微软雅黑" panose="020B0503020204020204" pitchFamily="34" charset="-122"/>
-                <a:ea typeface="微软雅黑" panose="020B0503020204020204" pitchFamily="34" charset="-122"/>
-              </a:rPr>
-              <a:t>行业</a:t>
-            </a:r>
-            <a:r>
-              <a:rPr lang="en-US" altLang="zh-CN" sz="1200" dirty="0">
-                <a:solidFill>
-                  <a:srgbClr val="EEECE1">
-                    <a:lumMod val="25000"/>
-                  </a:srgbClr>
-                </a:solidFill>
-                <a:latin typeface="微软雅黑" panose="020B0503020204020204" pitchFamily="34" charset="-122"/>
-                <a:ea typeface="微软雅黑" panose="020B0503020204020204" pitchFamily="34" charset="-122"/>
-              </a:rPr>
-              <a:t>PPT</a:t>
-            </a:r>
-            <a:r>
-              <a:rPr lang="zh-CN" altLang="en-US" sz="1200" dirty="0">
-                <a:solidFill>
-                  <a:srgbClr val="EEECE1">
-                    <a:lumMod val="25000"/>
-                  </a:srgbClr>
-                </a:solidFill>
-                <a:latin typeface="微软雅黑" panose="020B0503020204020204" pitchFamily="34" charset="-122"/>
-                <a:ea typeface="微软雅黑" panose="020B0503020204020204" pitchFamily="34" charset="-122"/>
-              </a:rPr>
-              <a:t>模板：</a:t>
-            </a:r>
-            <a:r>
-              <a:rPr lang="en-US" altLang="zh-CN" sz="1200" dirty="0">
-                <a:solidFill>
-                  <a:srgbClr val="EEECE1">
-                    <a:lumMod val="25000"/>
-                  </a:srgbClr>
-                </a:solidFill>
-                <a:latin typeface="微软雅黑" panose="020B0503020204020204" pitchFamily="34" charset="-122"/>
-                <a:ea typeface="微软雅黑" panose="020B0503020204020204" pitchFamily="34" charset="-122"/>
-                <a:hlinkClick r:id="rId3"/>
-              </a:rPr>
-              <a:t>www.1ppt.com/hangye/</a:t>
-            </a:r>
-            <a:r>
-              <a:rPr lang="en-US" altLang="zh-CN" sz="1200" dirty="0">
-                <a:solidFill>
-                  <a:srgbClr val="EEECE1">
-                    <a:lumMod val="25000"/>
-                  </a:srgbClr>
-                </a:solidFill>
-                <a:latin typeface="微软雅黑" panose="020B0503020204020204" pitchFamily="34" charset="-122"/>
-                <a:ea typeface="微软雅黑" panose="020B0503020204020204" pitchFamily="34" charset="-122"/>
-              </a:rPr>
-              <a:t> </a:t>
-            </a:r>
-          </a:p>
-          <a:p>
-            <a:pPr fontAlgn="auto">
-              <a:spcBef>
-                <a:spcPts val="0"/>
-              </a:spcBef>
-              <a:spcAft>
-                <a:spcPts val="0"/>
-              </a:spcAft>
-              <a:buFontTx/>
-              <a:buNone/>
-            </a:pPr>
-            <a:r>
-              <a:rPr lang="zh-CN" altLang="en-US" sz="1200" dirty="0">
-                <a:solidFill>
-                  <a:srgbClr val="EEECE1">
-                    <a:lumMod val="25000"/>
-                  </a:srgbClr>
-                </a:solidFill>
-                <a:latin typeface="微软雅黑" panose="020B0503020204020204" pitchFamily="34" charset="-122"/>
-                <a:ea typeface="微软雅黑" panose="020B0503020204020204" pitchFamily="34" charset="-122"/>
-              </a:rPr>
-              <a:t>节日</a:t>
-            </a:r>
-            <a:r>
-              <a:rPr lang="en-US" altLang="zh-CN" sz="1200" dirty="0">
-                <a:solidFill>
-                  <a:srgbClr val="EEECE1">
-                    <a:lumMod val="25000"/>
-                  </a:srgbClr>
-                </a:solidFill>
-                <a:latin typeface="微软雅黑" panose="020B0503020204020204" pitchFamily="34" charset="-122"/>
-                <a:ea typeface="微软雅黑" panose="020B0503020204020204" pitchFamily="34" charset="-122"/>
-              </a:rPr>
-              <a:t>PPT</a:t>
-            </a:r>
-            <a:r>
-              <a:rPr lang="zh-CN" altLang="en-US" sz="1200" dirty="0">
-                <a:solidFill>
-                  <a:srgbClr val="EEECE1">
-                    <a:lumMod val="25000"/>
-                  </a:srgbClr>
-                </a:solidFill>
-                <a:latin typeface="微软雅黑" panose="020B0503020204020204" pitchFamily="34" charset="-122"/>
-                <a:ea typeface="微软雅黑" panose="020B0503020204020204" pitchFamily="34" charset="-122"/>
-              </a:rPr>
-              <a:t>模板：</a:t>
-            </a:r>
-            <a:r>
-              <a:rPr lang="en-US" altLang="zh-CN" sz="1200" dirty="0">
-                <a:solidFill>
-                  <a:srgbClr val="EEECE1">
-                    <a:lumMod val="25000"/>
-                  </a:srgbClr>
-                </a:solidFill>
-                <a:latin typeface="微软雅黑" panose="020B0503020204020204" pitchFamily="34" charset="-122"/>
-                <a:ea typeface="微软雅黑" panose="020B0503020204020204" pitchFamily="34" charset="-122"/>
-                <a:hlinkClick r:id="rId4"/>
-              </a:rPr>
-              <a:t>www.1ppt.com/jieri/</a:t>
-            </a:r>
-            <a:r>
-              <a:rPr lang="en-US" altLang="zh-CN" sz="1200" dirty="0">
-                <a:solidFill>
-                  <a:srgbClr val="EEECE1">
-                    <a:lumMod val="25000"/>
-                  </a:srgbClr>
-                </a:solidFill>
-                <a:latin typeface="微软雅黑" panose="020B0503020204020204" pitchFamily="34" charset="-122"/>
-                <a:ea typeface="微软雅黑" panose="020B0503020204020204" pitchFamily="34" charset="-122"/>
-              </a:rPr>
-              <a:t>          </a:t>
-            </a:r>
-            <a:r>
-              <a:rPr lang="en-US" altLang="zh-CN" sz="1200" dirty="0" smtClean="0">
-                <a:solidFill>
-                  <a:srgbClr val="EEECE1">
-                    <a:lumMod val="25000"/>
-                  </a:srgbClr>
-                </a:solidFill>
-                <a:latin typeface="微软雅黑" panose="020B0503020204020204" pitchFamily="34" charset="-122"/>
-                <a:ea typeface="微软雅黑" panose="020B0503020204020204" pitchFamily="34" charset="-122"/>
-              </a:rPr>
-              <a:t>                PPT</a:t>
-            </a:r>
-            <a:r>
-              <a:rPr lang="zh-CN" altLang="en-US" sz="1200" dirty="0">
-                <a:solidFill>
-                  <a:srgbClr val="EEECE1">
-                    <a:lumMod val="25000"/>
-                  </a:srgbClr>
-                </a:solidFill>
-                <a:latin typeface="微软雅黑" panose="020B0503020204020204" pitchFamily="34" charset="-122"/>
-                <a:ea typeface="微软雅黑" panose="020B0503020204020204" pitchFamily="34" charset="-122"/>
-              </a:rPr>
-              <a:t>素</a:t>
-            </a:r>
-            <a:r>
-              <a:rPr lang="zh-CN" altLang="en-US" sz="1200" dirty="0" smtClean="0">
-                <a:solidFill>
-                  <a:srgbClr val="EEECE1">
-                    <a:lumMod val="25000"/>
-                  </a:srgbClr>
-                </a:solidFill>
-                <a:latin typeface="微软雅黑" panose="020B0503020204020204" pitchFamily="34" charset="-122"/>
-                <a:ea typeface="微软雅黑" panose="020B0503020204020204" pitchFamily="34" charset="-122"/>
-              </a:rPr>
-              <a:t>材：       </a:t>
-            </a:r>
-            <a:r>
-              <a:rPr lang="en-US" altLang="zh-CN" sz="1200" dirty="0" smtClean="0">
-                <a:solidFill>
-                  <a:srgbClr val="EEECE1">
-                    <a:lumMod val="25000"/>
-                  </a:srgbClr>
-                </a:solidFill>
-                <a:latin typeface="微软雅黑" panose="020B0503020204020204" pitchFamily="34" charset="-122"/>
-                <a:ea typeface="微软雅黑" panose="020B0503020204020204" pitchFamily="34" charset="-122"/>
-                <a:hlinkClick r:id="rId5"/>
-              </a:rPr>
-              <a:t>www.1ppt.com/sucai</a:t>
-            </a:r>
-            <a:r>
-              <a:rPr lang="en-US" altLang="zh-CN" sz="1200" dirty="0">
-                <a:solidFill>
-                  <a:srgbClr val="EEECE1">
-                    <a:lumMod val="25000"/>
-                  </a:srgbClr>
-                </a:solidFill>
-                <a:latin typeface="微软雅黑" panose="020B0503020204020204" pitchFamily="34" charset="-122"/>
-                <a:ea typeface="微软雅黑" panose="020B0503020204020204" pitchFamily="34" charset="-122"/>
-                <a:hlinkClick r:id="rId5"/>
-              </a:rPr>
-              <a:t>/</a:t>
-            </a:r>
-            <a:endParaRPr lang="en-US" altLang="zh-CN" sz="1200" dirty="0">
-              <a:solidFill>
-                <a:srgbClr val="EEECE1">
-                  <a:lumMod val="25000"/>
-                </a:srgbClr>
-              </a:solidFill>
-              <a:latin typeface="微软雅黑" panose="020B0503020204020204" pitchFamily="34" charset="-122"/>
-              <a:ea typeface="微软雅黑" panose="020B0503020204020204" pitchFamily="34" charset="-122"/>
-            </a:endParaRPr>
-          </a:p>
-          <a:p>
-            <a:pPr fontAlgn="auto">
-              <a:spcBef>
-                <a:spcPts val="0"/>
-              </a:spcBef>
-              <a:spcAft>
-                <a:spcPts val="0"/>
-              </a:spcAft>
-              <a:buFontTx/>
-              <a:buNone/>
-            </a:pPr>
-            <a:r>
-              <a:rPr lang="en-US" altLang="zh-CN" sz="1200" dirty="0">
-                <a:solidFill>
-                  <a:srgbClr val="EEECE1">
-                    <a:lumMod val="25000"/>
-                  </a:srgbClr>
-                </a:solidFill>
-                <a:latin typeface="微软雅黑" panose="020B0503020204020204" pitchFamily="34" charset="-122"/>
-                <a:ea typeface="微软雅黑" panose="020B0503020204020204" pitchFamily="34" charset="-122"/>
-              </a:rPr>
-              <a:t>PPT</a:t>
-            </a:r>
-            <a:r>
-              <a:rPr lang="zh-CN" altLang="en-US" sz="1200" dirty="0">
-                <a:solidFill>
-                  <a:srgbClr val="EEECE1">
-                    <a:lumMod val="25000"/>
-                  </a:srgbClr>
-                </a:solidFill>
-                <a:latin typeface="微软雅黑" panose="020B0503020204020204" pitchFamily="34" charset="-122"/>
-                <a:ea typeface="微软雅黑" panose="020B0503020204020204" pitchFamily="34" charset="-122"/>
-              </a:rPr>
-              <a:t>背景图片：</a:t>
-            </a:r>
-            <a:r>
-              <a:rPr lang="en-US" altLang="zh-CN" sz="1200" dirty="0">
-                <a:solidFill>
-                  <a:srgbClr val="EEECE1">
-                    <a:lumMod val="25000"/>
-                  </a:srgbClr>
-                </a:solidFill>
-                <a:latin typeface="微软雅黑" panose="020B0503020204020204" pitchFamily="34" charset="-122"/>
-                <a:ea typeface="微软雅黑" panose="020B0503020204020204" pitchFamily="34" charset="-122"/>
-                <a:hlinkClick r:id="rId6"/>
-              </a:rPr>
-              <a:t>www.1ppt.com/beijing/</a:t>
-            </a:r>
-            <a:r>
-              <a:rPr lang="en-US" altLang="zh-CN" sz="1200" dirty="0">
-                <a:solidFill>
-                  <a:srgbClr val="EEECE1">
-                    <a:lumMod val="25000"/>
-                  </a:srgbClr>
-                </a:solidFill>
-                <a:latin typeface="微软雅黑" panose="020B0503020204020204" pitchFamily="34" charset="-122"/>
-                <a:ea typeface="微软雅黑" panose="020B0503020204020204" pitchFamily="34" charset="-122"/>
-              </a:rPr>
-              <a:t>     </a:t>
-            </a:r>
-            <a:r>
-              <a:rPr lang="en-US" altLang="zh-CN" sz="1200" dirty="0" smtClean="0">
-                <a:solidFill>
-                  <a:srgbClr val="EEECE1">
-                    <a:lumMod val="25000"/>
-                  </a:srgbClr>
-                </a:solidFill>
-                <a:latin typeface="微软雅黑" panose="020B0503020204020204" pitchFamily="34" charset="-122"/>
-                <a:ea typeface="微软雅黑" panose="020B0503020204020204" pitchFamily="34" charset="-122"/>
-              </a:rPr>
-              <a:t>                PPT</a:t>
-            </a:r>
-            <a:r>
-              <a:rPr lang="zh-CN" altLang="en-US" sz="1200" dirty="0">
-                <a:solidFill>
-                  <a:srgbClr val="EEECE1">
-                    <a:lumMod val="25000"/>
-                  </a:srgbClr>
-                </a:solidFill>
-                <a:latin typeface="微软雅黑" panose="020B0503020204020204" pitchFamily="34" charset="-122"/>
-                <a:ea typeface="微软雅黑" panose="020B0503020204020204" pitchFamily="34" charset="-122"/>
-              </a:rPr>
-              <a:t>图</a:t>
-            </a:r>
-            <a:r>
-              <a:rPr lang="zh-CN" altLang="en-US" sz="1200" dirty="0" smtClean="0">
-                <a:solidFill>
-                  <a:srgbClr val="EEECE1">
-                    <a:lumMod val="25000"/>
-                  </a:srgbClr>
-                </a:solidFill>
-                <a:latin typeface="微软雅黑" panose="020B0503020204020204" pitchFamily="34" charset="-122"/>
-                <a:ea typeface="微软雅黑" panose="020B0503020204020204" pitchFamily="34" charset="-122"/>
-              </a:rPr>
-              <a:t>表：       </a:t>
-            </a:r>
-            <a:r>
-              <a:rPr lang="en-US" altLang="zh-CN" sz="1200" dirty="0" smtClean="0">
-                <a:solidFill>
-                  <a:srgbClr val="EEECE1">
-                    <a:lumMod val="25000"/>
-                  </a:srgbClr>
-                </a:solidFill>
-                <a:latin typeface="微软雅黑" panose="020B0503020204020204" pitchFamily="34" charset="-122"/>
-                <a:ea typeface="微软雅黑" panose="020B0503020204020204" pitchFamily="34" charset="-122"/>
-                <a:hlinkClick r:id="rId7"/>
-              </a:rPr>
-              <a:t>www.1ppt.com/tubiao</a:t>
-            </a:r>
-            <a:r>
-              <a:rPr lang="en-US" altLang="zh-CN" sz="1200" dirty="0">
-                <a:solidFill>
-                  <a:srgbClr val="EEECE1">
-                    <a:lumMod val="25000"/>
-                  </a:srgbClr>
-                </a:solidFill>
-                <a:latin typeface="微软雅黑" panose="020B0503020204020204" pitchFamily="34" charset="-122"/>
-                <a:ea typeface="微软雅黑" panose="020B0503020204020204" pitchFamily="34" charset="-122"/>
-                <a:hlinkClick r:id="rId7"/>
-              </a:rPr>
-              <a:t>/</a:t>
-            </a:r>
-            <a:r>
-              <a:rPr lang="en-US" altLang="zh-CN" sz="1200" dirty="0">
-                <a:solidFill>
-                  <a:srgbClr val="EEECE1">
-                    <a:lumMod val="25000"/>
-                  </a:srgbClr>
-                </a:solidFill>
-                <a:latin typeface="微软雅黑" panose="020B0503020204020204" pitchFamily="34" charset="-122"/>
-                <a:ea typeface="微软雅黑" panose="020B0503020204020204" pitchFamily="34" charset="-122"/>
-              </a:rPr>
-              <a:t>      </a:t>
-            </a:r>
-          </a:p>
-          <a:p>
-            <a:pPr fontAlgn="auto">
-              <a:spcBef>
-                <a:spcPts val="0"/>
-              </a:spcBef>
-              <a:spcAft>
-                <a:spcPts val="0"/>
-              </a:spcAft>
-              <a:buFontTx/>
-              <a:buNone/>
-            </a:pPr>
-            <a:r>
-              <a:rPr lang="zh-CN" altLang="en-US" sz="1200" dirty="0">
-                <a:solidFill>
-                  <a:srgbClr val="EEECE1">
-                    <a:lumMod val="25000"/>
-                  </a:srgbClr>
-                </a:solidFill>
-                <a:latin typeface="微软雅黑" panose="020B0503020204020204" pitchFamily="34" charset="-122"/>
-                <a:ea typeface="微软雅黑" panose="020B0503020204020204" pitchFamily="34" charset="-122"/>
-              </a:rPr>
-              <a:t>优秀</a:t>
-            </a:r>
-            <a:r>
-              <a:rPr lang="en-US" altLang="zh-CN" sz="1200" dirty="0">
-                <a:solidFill>
-                  <a:srgbClr val="EEECE1">
-                    <a:lumMod val="25000"/>
-                  </a:srgbClr>
-                </a:solidFill>
-                <a:latin typeface="微软雅黑" panose="020B0503020204020204" pitchFamily="34" charset="-122"/>
-                <a:ea typeface="微软雅黑" panose="020B0503020204020204" pitchFamily="34" charset="-122"/>
-              </a:rPr>
-              <a:t>PPT</a:t>
-            </a:r>
-            <a:r>
-              <a:rPr lang="zh-CN" altLang="en-US" sz="1200" dirty="0">
-                <a:solidFill>
-                  <a:srgbClr val="EEECE1">
-                    <a:lumMod val="25000"/>
-                  </a:srgbClr>
-                </a:solidFill>
-                <a:latin typeface="微软雅黑" panose="020B0503020204020204" pitchFamily="34" charset="-122"/>
-                <a:ea typeface="微软雅黑" panose="020B0503020204020204" pitchFamily="34" charset="-122"/>
-              </a:rPr>
-              <a:t>下载：</a:t>
-            </a:r>
-            <a:r>
-              <a:rPr lang="en-US" altLang="zh-CN" sz="1200" dirty="0">
-                <a:solidFill>
-                  <a:srgbClr val="EEECE1">
-                    <a:lumMod val="25000"/>
-                  </a:srgbClr>
-                </a:solidFill>
-                <a:latin typeface="微软雅黑" panose="020B0503020204020204" pitchFamily="34" charset="-122"/>
-                <a:ea typeface="微软雅黑" panose="020B0503020204020204" pitchFamily="34" charset="-122"/>
-                <a:hlinkClick r:id="rId8"/>
-              </a:rPr>
-              <a:t>www.1ppt.com/xiazai/</a:t>
-            </a:r>
-            <a:r>
-              <a:rPr lang="en-US" altLang="zh-CN" sz="1200" dirty="0">
-                <a:solidFill>
-                  <a:srgbClr val="EEECE1">
-                    <a:lumMod val="25000"/>
-                  </a:srgbClr>
-                </a:solidFill>
-                <a:latin typeface="微软雅黑" panose="020B0503020204020204" pitchFamily="34" charset="-122"/>
-                <a:ea typeface="微软雅黑" panose="020B0503020204020204" pitchFamily="34" charset="-122"/>
-              </a:rPr>
-              <a:t>      </a:t>
-            </a:r>
-            <a:r>
-              <a:rPr lang="en-US" altLang="zh-CN" sz="1200" dirty="0" smtClean="0">
-                <a:solidFill>
-                  <a:srgbClr val="EEECE1">
-                    <a:lumMod val="25000"/>
-                  </a:srgbClr>
-                </a:solidFill>
-                <a:latin typeface="微软雅黑" panose="020B0503020204020204" pitchFamily="34" charset="-122"/>
-                <a:ea typeface="微软雅黑" panose="020B0503020204020204" pitchFamily="34" charset="-122"/>
-              </a:rPr>
-              <a:t>                 PPT</a:t>
-            </a:r>
-            <a:r>
-              <a:rPr lang="zh-CN" altLang="en-US" sz="1200" dirty="0">
-                <a:solidFill>
-                  <a:srgbClr val="EEECE1">
-                    <a:lumMod val="25000"/>
-                  </a:srgbClr>
-                </a:solidFill>
-                <a:latin typeface="微软雅黑" panose="020B0503020204020204" pitchFamily="34" charset="-122"/>
-                <a:ea typeface="微软雅黑" panose="020B0503020204020204" pitchFamily="34" charset="-122"/>
-              </a:rPr>
-              <a:t>教程</a:t>
-            </a:r>
-            <a:r>
-              <a:rPr lang="zh-CN" altLang="en-US" sz="1200" dirty="0" smtClean="0">
-                <a:solidFill>
-                  <a:srgbClr val="EEECE1">
-                    <a:lumMod val="25000"/>
-                  </a:srgbClr>
-                </a:solidFill>
-                <a:latin typeface="微软雅黑" panose="020B0503020204020204" pitchFamily="34" charset="-122"/>
-                <a:ea typeface="微软雅黑" panose="020B0503020204020204" pitchFamily="34" charset="-122"/>
-              </a:rPr>
-              <a:t>：       </a:t>
-            </a:r>
-            <a:r>
-              <a:rPr lang="en-US" altLang="zh-CN" sz="1200" dirty="0" smtClean="0">
-                <a:solidFill>
-                  <a:srgbClr val="EEECE1">
-                    <a:lumMod val="25000"/>
-                  </a:srgbClr>
-                </a:solidFill>
-                <a:latin typeface="微软雅黑" panose="020B0503020204020204" pitchFamily="34" charset="-122"/>
-                <a:ea typeface="微软雅黑" panose="020B0503020204020204" pitchFamily="34" charset="-122"/>
-                <a:hlinkClick r:id="rId9"/>
-              </a:rPr>
-              <a:t>www.1ppt.com/powerpoint</a:t>
-            </a:r>
-            <a:r>
-              <a:rPr lang="en-US" altLang="zh-CN" sz="1200" dirty="0">
-                <a:solidFill>
-                  <a:srgbClr val="EEECE1">
-                    <a:lumMod val="25000"/>
-                  </a:srgbClr>
-                </a:solidFill>
-                <a:latin typeface="微软雅黑" panose="020B0503020204020204" pitchFamily="34" charset="-122"/>
-                <a:ea typeface="微软雅黑" panose="020B0503020204020204" pitchFamily="34" charset="-122"/>
-                <a:hlinkClick r:id="rId9"/>
-              </a:rPr>
-              <a:t>/</a:t>
-            </a:r>
-            <a:r>
-              <a:rPr lang="en-US" altLang="zh-CN" sz="1200" dirty="0">
-                <a:solidFill>
-                  <a:srgbClr val="EEECE1">
-                    <a:lumMod val="25000"/>
-                  </a:srgbClr>
-                </a:solidFill>
-                <a:latin typeface="微软雅黑" panose="020B0503020204020204" pitchFamily="34" charset="-122"/>
-                <a:ea typeface="微软雅黑" panose="020B0503020204020204" pitchFamily="34" charset="-122"/>
-              </a:rPr>
-              <a:t>      </a:t>
-            </a:r>
-          </a:p>
-          <a:p>
-            <a:pPr fontAlgn="auto">
-              <a:spcBef>
-                <a:spcPts val="0"/>
-              </a:spcBef>
-              <a:spcAft>
-                <a:spcPts val="0"/>
-              </a:spcAft>
-              <a:buFontTx/>
-              <a:buNone/>
-            </a:pPr>
-            <a:r>
-              <a:rPr lang="en-US" altLang="zh-CN" sz="1200" dirty="0" smtClean="0">
-                <a:solidFill>
-                  <a:srgbClr val="EEECE1">
-                    <a:lumMod val="25000"/>
-                  </a:srgbClr>
-                </a:solidFill>
-                <a:latin typeface="微软雅黑" panose="020B0503020204020204" pitchFamily="34" charset="-122"/>
-                <a:ea typeface="微软雅黑" panose="020B0503020204020204" pitchFamily="34" charset="-122"/>
-              </a:rPr>
-              <a:t>Word</a:t>
-            </a:r>
-            <a:r>
-              <a:rPr lang="zh-CN" altLang="en-US" sz="1200" dirty="0" smtClean="0">
-                <a:solidFill>
-                  <a:srgbClr val="EEECE1">
-                    <a:lumMod val="25000"/>
-                  </a:srgbClr>
-                </a:solidFill>
-                <a:latin typeface="微软雅黑" panose="020B0503020204020204" pitchFamily="34" charset="-122"/>
-                <a:ea typeface="微软雅黑" panose="020B0503020204020204" pitchFamily="34" charset="-122"/>
-              </a:rPr>
-              <a:t>模板：    </a:t>
-            </a:r>
-            <a:r>
-              <a:rPr lang="en-US" altLang="zh-CN" sz="1200" dirty="0" smtClean="0">
-                <a:solidFill>
-                  <a:srgbClr val="EEECE1">
-                    <a:lumMod val="25000"/>
-                  </a:srgbClr>
-                </a:solidFill>
-                <a:latin typeface="微软雅黑" panose="020B0503020204020204" pitchFamily="34" charset="-122"/>
-                <a:ea typeface="微软雅黑" panose="020B0503020204020204" pitchFamily="34" charset="-122"/>
-                <a:hlinkClick r:id="rId10"/>
-              </a:rPr>
-              <a:t>www.1ppt.com/word</a:t>
-            </a:r>
-            <a:r>
-              <a:rPr lang="en-US" altLang="zh-CN" sz="1200" dirty="0">
-                <a:solidFill>
-                  <a:srgbClr val="EEECE1">
-                    <a:lumMod val="25000"/>
-                  </a:srgbClr>
-                </a:solidFill>
-                <a:latin typeface="微软雅黑" panose="020B0503020204020204" pitchFamily="34" charset="-122"/>
-                <a:ea typeface="微软雅黑" panose="020B0503020204020204" pitchFamily="34" charset="-122"/>
-                <a:hlinkClick r:id="rId10"/>
-              </a:rPr>
-              <a:t>/</a:t>
-            </a:r>
-            <a:r>
-              <a:rPr lang="en-US" altLang="zh-CN" sz="1200" dirty="0">
-                <a:solidFill>
-                  <a:srgbClr val="EEECE1">
-                    <a:lumMod val="25000"/>
-                  </a:srgbClr>
-                </a:solidFill>
-                <a:latin typeface="微软雅黑" panose="020B0503020204020204" pitchFamily="34" charset="-122"/>
-                <a:ea typeface="微软雅黑" panose="020B0503020204020204" pitchFamily="34" charset="-122"/>
-              </a:rPr>
-              <a:t>      </a:t>
-            </a:r>
-            <a:r>
-              <a:rPr lang="en-US" altLang="zh-CN" sz="1200" dirty="0" smtClean="0">
-                <a:solidFill>
-                  <a:srgbClr val="EEECE1">
-                    <a:lumMod val="25000"/>
-                  </a:srgbClr>
-                </a:solidFill>
-                <a:latin typeface="微软雅黑" panose="020B0503020204020204" pitchFamily="34" charset="-122"/>
-                <a:ea typeface="微软雅黑" panose="020B0503020204020204" pitchFamily="34" charset="-122"/>
-              </a:rPr>
-              <a:t>                  Excel</a:t>
-            </a:r>
-            <a:r>
-              <a:rPr lang="zh-CN" altLang="en-US" sz="1200" dirty="0" smtClean="0">
-                <a:solidFill>
-                  <a:srgbClr val="EEECE1">
-                    <a:lumMod val="25000"/>
-                  </a:srgbClr>
-                </a:solidFill>
-                <a:latin typeface="微软雅黑" panose="020B0503020204020204" pitchFamily="34" charset="-122"/>
-                <a:ea typeface="微软雅黑" panose="020B0503020204020204" pitchFamily="34" charset="-122"/>
-              </a:rPr>
-              <a:t>模板：     </a:t>
-            </a:r>
-            <a:r>
-              <a:rPr lang="en-US" altLang="zh-CN" sz="1200" dirty="0" smtClean="0">
-                <a:solidFill>
-                  <a:srgbClr val="EEECE1">
-                    <a:lumMod val="25000"/>
-                  </a:srgbClr>
-                </a:solidFill>
-                <a:latin typeface="微软雅黑" panose="020B0503020204020204" pitchFamily="34" charset="-122"/>
-                <a:ea typeface="微软雅黑" panose="020B0503020204020204" pitchFamily="34" charset="-122"/>
-                <a:hlinkClick r:id="rId11"/>
-              </a:rPr>
-              <a:t>www.1ppt.com/excel</a:t>
-            </a:r>
-            <a:r>
-              <a:rPr lang="en-US" altLang="zh-CN" sz="1200" dirty="0">
-                <a:solidFill>
-                  <a:srgbClr val="EEECE1">
-                    <a:lumMod val="25000"/>
-                  </a:srgbClr>
-                </a:solidFill>
-                <a:latin typeface="微软雅黑" panose="020B0503020204020204" pitchFamily="34" charset="-122"/>
-                <a:ea typeface="微软雅黑" panose="020B0503020204020204" pitchFamily="34" charset="-122"/>
-                <a:hlinkClick r:id="rId11"/>
-              </a:rPr>
-              <a:t>/</a:t>
-            </a:r>
-            <a:r>
-              <a:rPr lang="en-US" altLang="zh-CN" sz="1200" dirty="0">
-                <a:solidFill>
-                  <a:srgbClr val="EEECE1">
-                    <a:lumMod val="25000"/>
-                  </a:srgbClr>
-                </a:solidFill>
-                <a:latin typeface="微软雅黑" panose="020B0503020204020204" pitchFamily="34" charset="-122"/>
-                <a:ea typeface="微软雅黑" panose="020B0503020204020204" pitchFamily="34" charset="-122"/>
-              </a:rPr>
-              <a:t>  </a:t>
-            </a:r>
-          </a:p>
-          <a:p>
-            <a:pPr fontAlgn="auto">
-              <a:spcBef>
-                <a:spcPts val="0"/>
-              </a:spcBef>
-              <a:spcAft>
-                <a:spcPts val="0"/>
-              </a:spcAft>
-              <a:buFontTx/>
-              <a:buNone/>
-            </a:pPr>
-            <a:r>
-              <a:rPr lang="zh-CN" altLang="en-US" sz="1200" dirty="0">
-                <a:solidFill>
-                  <a:srgbClr val="EEECE1">
-                    <a:lumMod val="25000"/>
-                  </a:srgbClr>
-                </a:solidFill>
-                <a:latin typeface="微软雅黑" panose="020B0503020204020204" pitchFamily="34" charset="-122"/>
-                <a:ea typeface="微软雅黑" panose="020B0503020204020204" pitchFamily="34" charset="-122"/>
-              </a:rPr>
-              <a:t>个人简历</a:t>
-            </a:r>
-            <a:r>
-              <a:rPr lang="zh-CN" altLang="en-US" sz="1200" dirty="0" smtClean="0">
-                <a:solidFill>
-                  <a:srgbClr val="EEECE1">
-                    <a:lumMod val="25000"/>
-                  </a:srgbClr>
-                </a:solidFill>
-                <a:latin typeface="微软雅黑" panose="020B0503020204020204" pitchFamily="34" charset="-122"/>
-                <a:ea typeface="微软雅黑" panose="020B0503020204020204" pitchFamily="34" charset="-122"/>
-              </a:rPr>
-              <a:t>：      </a:t>
-            </a:r>
-            <a:r>
-              <a:rPr lang="en-US" altLang="zh-CN" sz="1200" dirty="0" smtClean="0">
-                <a:solidFill>
-                  <a:srgbClr val="EEECE1">
-                    <a:lumMod val="25000"/>
-                  </a:srgbClr>
-                </a:solidFill>
-                <a:latin typeface="微软雅黑" panose="020B0503020204020204" pitchFamily="34" charset="-122"/>
-                <a:ea typeface="微软雅黑" panose="020B0503020204020204" pitchFamily="34" charset="-122"/>
-                <a:hlinkClick r:id="rId12"/>
-              </a:rPr>
-              <a:t>www.1ppt.com/jianli/</a:t>
-            </a:r>
-            <a:r>
-              <a:rPr lang="en-US" altLang="zh-CN" sz="1200" dirty="0" smtClean="0">
-                <a:solidFill>
-                  <a:srgbClr val="EEECE1">
-                    <a:lumMod val="25000"/>
-                  </a:srgbClr>
-                </a:solidFill>
-                <a:latin typeface="微软雅黑" panose="020B0503020204020204" pitchFamily="34" charset="-122"/>
-                <a:ea typeface="微软雅黑" panose="020B0503020204020204" pitchFamily="34" charset="-122"/>
-              </a:rPr>
-              <a:t>                         PPT</a:t>
-            </a:r>
-            <a:r>
-              <a:rPr lang="zh-CN" altLang="en-US" sz="1200" dirty="0">
-                <a:solidFill>
-                  <a:srgbClr val="EEECE1">
-                    <a:lumMod val="25000"/>
-                  </a:srgbClr>
-                </a:solidFill>
-                <a:latin typeface="微软雅黑" panose="020B0503020204020204" pitchFamily="34" charset="-122"/>
-                <a:ea typeface="微软雅黑" panose="020B0503020204020204" pitchFamily="34" charset="-122"/>
-              </a:rPr>
-              <a:t>课</a:t>
-            </a:r>
-            <a:r>
-              <a:rPr lang="zh-CN" altLang="en-US" sz="1200" dirty="0" smtClean="0">
-                <a:solidFill>
-                  <a:srgbClr val="EEECE1">
-                    <a:lumMod val="25000"/>
-                  </a:srgbClr>
-                </a:solidFill>
-                <a:latin typeface="微软雅黑" panose="020B0503020204020204" pitchFamily="34" charset="-122"/>
-                <a:ea typeface="微软雅黑" panose="020B0503020204020204" pitchFamily="34" charset="-122"/>
-              </a:rPr>
-              <a:t>件：       </a:t>
-            </a:r>
-            <a:r>
-              <a:rPr lang="en-US" altLang="zh-CN" sz="1200" dirty="0" smtClean="0">
-                <a:solidFill>
-                  <a:srgbClr val="EEECE1">
-                    <a:lumMod val="25000"/>
-                  </a:srgbClr>
-                </a:solidFill>
-                <a:latin typeface="微软雅黑" panose="020B0503020204020204" pitchFamily="34" charset="-122"/>
-                <a:ea typeface="微软雅黑" panose="020B0503020204020204" pitchFamily="34" charset="-122"/>
-                <a:hlinkClick r:id="rId13"/>
-              </a:rPr>
-              <a:t>www.1ppt.com/kejian</a:t>
-            </a:r>
-            <a:r>
-              <a:rPr lang="en-US" altLang="zh-CN" sz="1200" dirty="0">
-                <a:solidFill>
-                  <a:srgbClr val="EEECE1">
-                    <a:lumMod val="25000"/>
-                  </a:srgbClr>
-                </a:solidFill>
-                <a:latin typeface="微软雅黑" panose="020B0503020204020204" pitchFamily="34" charset="-122"/>
-                <a:ea typeface="微软雅黑" panose="020B0503020204020204" pitchFamily="34" charset="-122"/>
-                <a:hlinkClick r:id="rId13"/>
-              </a:rPr>
-              <a:t>/</a:t>
-            </a:r>
-            <a:r>
-              <a:rPr lang="en-US" altLang="zh-CN" sz="1200" dirty="0">
-                <a:solidFill>
-                  <a:srgbClr val="EEECE1">
-                    <a:lumMod val="25000"/>
-                  </a:srgbClr>
-                </a:solidFill>
-                <a:latin typeface="微软雅黑" panose="020B0503020204020204" pitchFamily="34" charset="-122"/>
-                <a:ea typeface="微软雅黑" panose="020B0503020204020204" pitchFamily="34" charset="-122"/>
-              </a:rPr>
-              <a:t> </a:t>
-            </a:r>
-          </a:p>
-          <a:p>
-            <a:pPr fontAlgn="auto">
-              <a:spcBef>
-                <a:spcPts val="0"/>
-              </a:spcBef>
-              <a:spcAft>
-                <a:spcPts val="0"/>
-              </a:spcAft>
-              <a:buFontTx/>
-              <a:buNone/>
-            </a:pPr>
-            <a:r>
-              <a:rPr lang="zh-CN" altLang="en-US" sz="1200" dirty="0">
-                <a:solidFill>
-                  <a:srgbClr val="EEECE1">
-                    <a:lumMod val="25000"/>
-                  </a:srgbClr>
-                </a:solidFill>
-                <a:latin typeface="微软雅黑" panose="020B0503020204020204" pitchFamily="34" charset="-122"/>
-                <a:ea typeface="微软雅黑" panose="020B0503020204020204" pitchFamily="34" charset="-122"/>
-              </a:rPr>
-              <a:t>手抄报</a:t>
-            </a:r>
-            <a:r>
-              <a:rPr lang="zh-CN" altLang="en-US" sz="1200" dirty="0" smtClean="0">
-                <a:solidFill>
-                  <a:srgbClr val="EEECE1">
-                    <a:lumMod val="25000"/>
-                  </a:srgbClr>
-                </a:solidFill>
-                <a:latin typeface="微软雅黑" panose="020B0503020204020204" pitchFamily="34" charset="-122"/>
-                <a:ea typeface="微软雅黑" panose="020B0503020204020204" pitchFamily="34" charset="-122"/>
-              </a:rPr>
-              <a:t>：          </a:t>
-            </a:r>
-            <a:r>
-              <a:rPr lang="en-US" altLang="zh-CN" sz="1200" dirty="0" smtClean="0">
-                <a:solidFill>
-                  <a:srgbClr val="EEECE1">
-                    <a:lumMod val="25000"/>
-                  </a:srgbClr>
-                </a:solidFill>
-                <a:latin typeface="微软雅黑" panose="020B0503020204020204" pitchFamily="34" charset="-122"/>
-                <a:ea typeface="微软雅黑" panose="020B0503020204020204" pitchFamily="34" charset="-122"/>
-                <a:hlinkClick r:id="rId14"/>
-              </a:rPr>
-              <a:t>www.1ppt.com/shouchaobao/</a:t>
-            </a:r>
-            <a:r>
-              <a:rPr lang="en-US" altLang="zh-CN" sz="1200" dirty="0" smtClean="0">
-                <a:solidFill>
-                  <a:srgbClr val="EEECE1">
-                    <a:lumMod val="25000"/>
-                  </a:srgbClr>
-                </a:solidFill>
-                <a:latin typeface="微软雅黑" panose="020B0503020204020204" pitchFamily="34" charset="-122"/>
-                <a:ea typeface="微软雅黑" panose="020B0503020204020204" pitchFamily="34" charset="-122"/>
-              </a:rPr>
-              <a:t>          </a:t>
-            </a:r>
-            <a:r>
-              <a:rPr lang="zh-CN" altLang="en-US" sz="1200" dirty="0" smtClean="0">
-                <a:solidFill>
-                  <a:srgbClr val="EEECE1">
-                    <a:lumMod val="25000"/>
-                  </a:srgbClr>
-                </a:solidFill>
-                <a:latin typeface="微软雅黑" panose="020B0503020204020204" pitchFamily="34" charset="-122"/>
-                <a:ea typeface="微软雅黑" panose="020B0503020204020204" pitchFamily="34" charset="-122"/>
-              </a:rPr>
-              <a:t>试</a:t>
-            </a:r>
-            <a:r>
-              <a:rPr lang="zh-CN" altLang="en-US" sz="1200" dirty="0">
-                <a:solidFill>
-                  <a:srgbClr val="EEECE1">
-                    <a:lumMod val="25000"/>
-                  </a:srgbClr>
-                </a:solidFill>
-                <a:latin typeface="微软雅黑" panose="020B0503020204020204" pitchFamily="34" charset="-122"/>
-                <a:ea typeface="微软雅黑" panose="020B0503020204020204" pitchFamily="34" charset="-122"/>
-              </a:rPr>
-              <a:t>题</a:t>
-            </a:r>
-            <a:r>
-              <a:rPr lang="zh-CN" altLang="en-US" sz="1200" dirty="0" smtClean="0">
-                <a:solidFill>
-                  <a:srgbClr val="EEECE1">
-                    <a:lumMod val="25000"/>
-                  </a:srgbClr>
-                </a:solidFill>
-                <a:latin typeface="微软雅黑" panose="020B0503020204020204" pitchFamily="34" charset="-122"/>
-                <a:ea typeface="微软雅黑" panose="020B0503020204020204" pitchFamily="34" charset="-122"/>
-              </a:rPr>
-              <a:t>下载：      </a:t>
-            </a:r>
-            <a:r>
-              <a:rPr lang="en-US" altLang="zh-CN" sz="1200" dirty="0" smtClean="0">
-                <a:solidFill>
-                  <a:srgbClr val="EEECE1">
-                    <a:lumMod val="25000"/>
-                  </a:srgbClr>
-                </a:solidFill>
-                <a:latin typeface="微软雅黑" panose="020B0503020204020204" pitchFamily="34" charset="-122"/>
-                <a:ea typeface="微软雅黑" panose="020B0503020204020204" pitchFamily="34" charset="-122"/>
-                <a:hlinkClick r:id="rId15"/>
-              </a:rPr>
-              <a:t>www.1ppt.com/shiti/</a:t>
-            </a:r>
-            <a:r>
-              <a:rPr lang="en-US" altLang="zh-CN" sz="1200" dirty="0" smtClean="0">
-                <a:solidFill>
-                  <a:srgbClr val="EEECE1">
-                    <a:lumMod val="25000"/>
-                  </a:srgbClr>
-                </a:solidFill>
-                <a:latin typeface="微软雅黑" panose="020B0503020204020204" pitchFamily="34" charset="-122"/>
-                <a:ea typeface="微软雅黑" panose="020B0503020204020204" pitchFamily="34" charset="-122"/>
-              </a:rPr>
-              <a:t>  </a:t>
-            </a:r>
-          </a:p>
-          <a:p>
-            <a:pPr fontAlgn="auto">
-              <a:spcBef>
-                <a:spcPts val="0"/>
-              </a:spcBef>
-              <a:spcAft>
-                <a:spcPts val="0"/>
-              </a:spcAft>
-              <a:buFontTx/>
-              <a:buNone/>
-            </a:pPr>
-            <a:r>
-              <a:rPr lang="zh-CN" altLang="en-US" sz="1200" dirty="0" smtClean="0">
-                <a:solidFill>
-                  <a:srgbClr val="EEECE1">
-                    <a:lumMod val="25000"/>
-                  </a:srgbClr>
-                </a:solidFill>
-                <a:latin typeface="微软雅黑" panose="020B0503020204020204" pitchFamily="34" charset="-122"/>
-                <a:ea typeface="微软雅黑" panose="020B0503020204020204" pitchFamily="34" charset="-122"/>
-              </a:rPr>
-              <a:t>教案下载：      </a:t>
-            </a:r>
-            <a:r>
-              <a:rPr lang="en-US" altLang="zh-CN" sz="1200" dirty="0" smtClean="0">
-                <a:solidFill>
-                  <a:srgbClr val="EEECE1">
-                    <a:lumMod val="25000"/>
-                  </a:srgbClr>
-                </a:solidFill>
-                <a:latin typeface="微软雅黑" panose="020B0503020204020204" pitchFamily="34" charset="-122"/>
-                <a:ea typeface="微软雅黑" panose="020B0503020204020204" pitchFamily="34" charset="-122"/>
-                <a:hlinkClick r:id="rId16"/>
-              </a:rPr>
-              <a:t>www.1ppt.com/jiaoan/</a:t>
-            </a:r>
-            <a:r>
-              <a:rPr lang="en-US" altLang="zh-CN" sz="1200" dirty="0" smtClean="0">
-                <a:solidFill>
-                  <a:srgbClr val="EEECE1">
-                    <a:lumMod val="25000"/>
-                  </a:srgbClr>
-                </a:solidFill>
-                <a:latin typeface="微软雅黑" panose="020B0503020204020204" pitchFamily="34" charset="-122"/>
-                <a:ea typeface="微软雅黑" panose="020B0503020204020204" pitchFamily="34" charset="-122"/>
-              </a:rPr>
-              <a:t>                       </a:t>
-            </a:r>
-            <a:r>
-              <a:rPr lang="zh-CN" altLang="en-US" sz="1200" dirty="0" smtClean="0">
-                <a:solidFill>
-                  <a:srgbClr val="EEECE1">
-                    <a:lumMod val="25000"/>
-                  </a:srgbClr>
-                </a:solidFill>
-                <a:latin typeface="微软雅黑" panose="020B0503020204020204" pitchFamily="34" charset="-122"/>
-                <a:ea typeface="微软雅黑" panose="020B0503020204020204" pitchFamily="34" charset="-122"/>
-              </a:rPr>
-              <a:t>字体下载：      </a:t>
-            </a:r>
-            <a:r>
-              <a:rPr lang="en-US" altLang="zh-CN" sz="1200" dirty="0" smtClean="0">
-                <a:solidFill>
-                  <a:srgbClr val="EEECE1">
-                    <a:lumMod val="25000"/>
-                  </a:srgbClr>
-                </a:solidFill>
-                <a:latin typeface="微软雅黑" panose="020B0503020204020204" pitchFamily="34" charset="-122"/>
-                <a:ea typeface="微软雅黑" panose="020B0503020204020204" pitchFamily="34" charset="-122"/>
-                <a:hlinkClick r:id="rId17"/>
-              </a:rPr>
-              <a:t>www.1ppt.com/ziti/</a:t>
-            </a:r>
-            <a:r>
-              <a:rPr lang="en-US" altLang="zh-CN" sz="1200" dirty="0" smtClean="0">
-                <a:solidFill>
-                  <a:srgbClr val="EEECE1">
-                    <a:lumMod val="25000"/>
-                  </a:srgbClr>
-                </a:solidFill>
-                <a:latin typeface="微软雅黑" panose="020B0503020204020204" pitchFamily="34" charset="-122"/>
-                <a:ea typeface="微软雅黑" panose="020B0503020204020204" pitchFamily="34" charset="-122"/>
-              </a:rPr>
-              <a:t>              </a:t>
-            </a:r>
-            <a:endParaRPr lang="zh-CN" altLang="en-US" sz="1200" dirty="0">
-              <a:solidFill>
-                <a:srgbClr val="EEECE1">
-                  <a:lumMod val="25000"/>
-                </a:srgbClr>
-              </a:solidFill>
-              <a:latin typeface="微软雅黑" panose="020B0503020204020204" pitchFamily="34" charset="-122"/>
-              <a:ea typeface="微软雅黑" panose="020B0503020204020204" pitchFamily="34" charset="-122"/>
-            </a:endParaRPr>
-          </a:p>
-        </p:txBody>
-      </p:sp>
-      <p:sp>
-        <p:nvSpPr>
-          <p:cNvPr id="3" name="Rectangle 17"/>
-          <p:cNvSpPr>
-            <a:spLocks noChangeArrowheads="1"/>
-          </p:cNvSpPr>
-          <p:nvPr/>
-        </p:nvSpPr>
-        <p:spPr bwMode="gray">
-          <a:xfrm>
-            <a:off x="0" y="2248707"/>
-            <a:ext cx="9144000" cy="1025122"/>
-          </a:xfrm>
-          <a:prstGeom prst="rect">
-            <a:avLst/>
-          </a:prstGeom>
-          <a:solidFill>
-            <a:schemeClr val="tx2">
-              <a:lumMod val="75000"/>
-            </a:schemeClr>
-          </a:solidFill>
-          <a:ln w="9525">
-            <a:noFill/>
-            <a:miter lim="800000"/>
-            <a:headEnd/>
-            <a:tailEnd/>
-          </a:ln>
-        </p:spPr>
-        <p:txBody>
-          <a:bodyPr wrap="none" anchor="ctr"/>
-          <a:lstStyle/>
-          <a:p>
-            <a:pPr fontAlgn="auto">
-              <a:spcBef>
-                <a:spcPts val="0"/>
-              </a:spcBef>
-              <a:spcAft>
-                <a:spcPts val="0"/>
-              </a:spcAft>
-              <a:buFontTx/>
-              <a:buNone/>
-              <a:defRPr/>
-            </a:pPr>
-            <a:endParaRPr lang="zh-CN" altLang="en-US" kern="0" dirty="0">
-              <a:solidFill>
-                <a:srgbClr val="005397"/>
-              </a:solidFill>
-              <a:latin typeface="Arial"/>
-              <a:ea typeface="微软雅黑"/>
-            </a:endParaRPr>
-          </a:p>
-        </p:txBody>
-      </p:sp>
-      <p:sp>
-        <p:nvSpPr>
-          <p:cNvPr id="15" name="Rectangle 3"/>
-          <p:cNvSpPr>
-            <a:spLocks noChangeArrowheads="1"/>
-          </p:cNvSpPr>
-          <p:nvPr/>
-        </p:nvSpPr>
-        <p:spPr bwMode="auto">
-          <a:xfrm>
-            <a:off x="396308" y="2323010"/>
-            <a:ext cx="4103687" cy="896813"/>
-          </a:xfrm>
-          <a:prstGeom prst="rect">
-            <a:avLst/>
-          </a:prstGeom>
-          <a:noFill/>
-          <a:ln w="3175" algn="ctr">
-            <a:noFill/>
-            <a:prstDash val="dash"/>
-            <a:miter lim="800000"/>
-            <a:headEnd/>
-            <a:tailEnd/>
-          </a:ln>
-          <a:effectLst/>
-          <a:extLst>
-            <a:ext uri="{909E8E84-426E-40DD-AFC4-6F175D3DCCD1}">
-              <a14:hiddenFill xmlns:a14="http://schemas.microsoft.com/office/drawing/2010/main">
-                <a:solidFill>
-                  <a:srgbClr val="FFFFFF"/>
-                </a:solidFill>
-              </a14:hiddenFill>
-            </a:ext>
-            <a:ext uri="{AF507438-7753-43E0-B8FC-AC1667EBCBE1}">
-              <a14:hiddenEffects xmlns:a14="http://schemas.microsoft.com/office/drawing/2010/main">
-                <a:effectLst>
-                  <a:outerShdw dist="35921" dir="2700000" algn="ctr" rotWithShape="0">
-                    <a:srgbClr val="808080"/>
-                  </a:outerShdw>
-                </a:effectLst>
-              </a14:hiddenEffects>
-            </a:ext>
-          </a:extLst>
-        </p:spPr>
-        <p:txBody>
-          <a:bodyPr/>
-          <a:lstStyle/>
-          <a:p>
-            <a:pPr fontAlgn="auto">
-              <a:spcBef>
-                <a:spcPct val="20000"/>
-              </a:spcBef>
-              <a:spcAft>
-                <a:spcPts val="0"/>
-              </a:spcAft>
-              <a:buClr>
-                <a:srgbClr val="5B8CC1"/>
-              </a:buClr>
-              <a:buFont typeface="Wingdings" pitchFamily="2" charset="2"/>
-              <a:buNone/>
-              <a:defRPr/>
-            </a:pPr>
-            <a:r>
-              <a:rPr lang="zh-CN" altLang="en-US" sz="2000" b="1" kern="0" dirty="0" smtClean="0">
-                <a:solidFill>
-                  <a:prstClr val="white"/>
-                </a:solidFill>
-                <a:latin typeface="微软雅黑" pitchFamily="34" charset="-122"/>
-                <a:ea typeface="微软雅黑" pitchFamily="34" charset="-122"/>
-              </a:rPr>
-              <a:t>可以在下列情况使用</a:t>
-            </a:r>
-            <a:endParaRPr lang="zh-CN" altLang="en-US" sz="1200" kern="0" dirty="0" smtClean="0">
-              <a:solidFill>
-                <a:prstClr val="white"/>
-              </a:solidFill>
-              <a:latin typeface="微软雅黑" pitchFamily="34" charset="-122"/>
-              <a:ea typeface="微软雅黑" pitchFamily="34" charset="-122"/>
-            </a:endParaRPr>
-          </a:p>
-          <a:p>
-            <a:pPr fontAlgn="auto">
-              <a:lnSpc>
-                <a:spcPct val="150000"/>
-              </a:lnSpc>
-              <a:spcBef>
-                <a:spcPts val="0"/>
-              </a:spcBef>
-              <a:spcAft>
-                <a:spcPts val="0"/>
-              </a:spcAft>
-              <a:buClr>
-                <a:srgbClr val="5B8CC1"/>
-              </a:buClr>
-              <a:buFont typeface="Wingdings" pitchFamily="2" charset="2"/>
-              <a:buChar char="n"/>
-              <a:defRPr/>
-            </a:pPr>
-            <a:r>
-              <a:rPr lang="zh-CN" altLang="en-US" sz="1200" kern="0" dirty="0">
-                <a:solidFill>
-                  <a:prstClr val="white"/>
-                </a:solidFill>
-                <a:latin typeface="微软雅黑" pitchFamily="34" charset="-122"/>
-                <a:ea typeface="微软雅黑" pitchFamily="34" charset="-122"/>
-              </a:rPr>
-              <a:t>个</a:t>
-            </a:r>
-            <a:r>
-              <a:rPr lang="zh-CN" altLang="en-US" sz="1200" kern="0" dirty="0" smtClean="0">
-                <a:solidFill>
-                  <a:prstClr val="white"/>
-                </a:solidFill>
-                <a:latin typeface="微软雅黑" pitchFamily="34" charset="-122"/>
-                <a:ea typeface="微软雅黑" pitchFamily="34" charset="-122"/>
-              </a:rPr>
-              <a:t>人学习、研究。</a:t>
-            </a:r>
-          </a:p>
-          <a:p>
-            <a:pPr fontAlgn="auto">
-              <a:lnSpc>
-                <a:spcPct val="150000"/>
-              </a:lnSpc>
-              <a:spcBef>
-                <a:spcPts val="0"/>
-              </a:spcBef>
-              <a:spcAft>
-                <a:spcPts val="0"/>
-              </a:spcAft>
-              <a:buClr>
-                <a:srgbClr val="5B8CC1"/>
-              </a:buClr>
-              <a:buFont typeface="Wingdings" pitchFamily="2" charset="2"/>
-              <a:buChar char="n"/>
-              <a:defRPr/>
-            </a:pPr>
-            <a:r>
-              <a:rPr lang="zh-CN" altLang="en-US" sz="1200" kern="0" dirty="0" smtClean="0">
-                <a:solidFill>
-                  <a:prstClr val="white"/>
-                </a:solidFill>
-                <a:latin typeface="微软雅黑" pitchFamily="34" charset="-122"/>
-                <a:ea typeface="微软雅黑" pitchFamily="34" charset="-122"/>
-              </a:rPr>
-              <a:t>拷贝模板中的内容用于其它幻灯片母版中使用。</a:t>
-            </a:r>
-          </a:p>
-        </p:txBody>
-      </p:sp>
-      <p:sp>
-        <p:nvSpPr>
-          <p:cNvPr id="16" name="Rectangle 4"/>
-          <p:cNvSpPr>
-            <a:spLocks noChangeArrowheads="1"/>
-          </p:cNvSpPr>
-          <p:nvPr/>
-        </p:nvSpPr>
-        <p:spPr bwMode="auto">
-          <a:xfrm>
-            <a:off x="4572000" y="2323010"/>
-            <a:ext cx="4103688" cy="896813"/>
-          </a:xfrm>
-          <a:prstGeom prst="rect">
-            <a:avLst/>
-          </a:prstGeom>
-          <a:noFill/>
-          <a:ln w="3175" algn="ctr">
-            <a:noFill/>
-            <a:prstDash val="dash"/>
-            <a:miter lim="800000"/>
-            <a:headEnd/>
-            <a:tailEnd/>
-          </a:ln>
-          <a:effectLst/>
-          <a:extLst>
-            <a:ext uri="{909E8E84-426E-40DD-AFC4-6F175D3DCCD1}">
-              <a14:hiddenFill xmlns:a14="http://schemas.microsoft.com/office/drawing/2010/main">
-                <a:solidFill>
-                  <a:srgbClr val="FFFFFF"/>
-                </a:solidFill>
-              </a14:hiddenFill>
-            </a:ext>
-            <a:ext uri="{AF507438-7753-43E0-B8FC-AC1667EBCBE1}">
-              <a14:hiddenEffects xmlns:a14="http://schemas.microsoft.com/office/drawing/2010/main">
-                <a:effectLst>
-                  <a:outerShdw dist="35921" dir="2700000" algn="ctr" rotWithShape="0">
-                    <a:srgbClr val="808080"/>
-                  </a:outerShdw>
-                </a:effectLst>
-              </a14:hiddenEffects>
-            </a:ext>
-          </a:extLst>
-        </p:spPr>
-        <p:txBody>
-          <a:bodyPr/>
-          <a:lstStyle/>
-          <a:p>
-            <a:pPr fontAlgn="auto">
-              <a:spcBef>
-                <a:spcPct val="20000"/>
-              </a:spcBef>
-              <a:spcAft>
-                <a:spcPts val="0"/>
-              </a:spcAft>
-              <a:buClr>
-                <a:srgbClr val="5B8CC1"/>
-              </a:buClr>
-              <a:buFont typeface="Wingdings" pitchFamily="2" charset="2"/>
-              <a:buNone/>
-              <a:defRPr/>
-            </a:pPr>
-            <a:r>
-              <a:rPr lang="zh-CN" altLang="en-US" sz="2000" b="1" kern="0" dirty="0" smtClean="0">
-                <a:solidFill>
-                  <a:prstClr val="white"/>
-                </a:solidFill>
-                <a:latin typeface="微软雅黑" pitchFamily="34" charset="-122"/>
-                <a:ea typeface="微软雅黑" pitchFamily="34" charset="-122"/>
-              </a:rPr>
-              <a:t>不可以在以下情况使用</a:t>
-            </a:r>
-            <a:endParaRPr lang="zh-CN" altLang="en-US" sz="1050" b="1" kern="0" dirty="0" smtClean="0">
-              <a:solidFill>
-                <a:prstClr val="white"/>
-              </a:solidFill>
-              <a:latin typeface="微软雅黑" pitchFamily="34" charset="-122"/>
-              <a:ea typeface="微软雅黑" pitchFamily="34" charset="-122"/>
-            </a:endParaRPr>
-          </a:p>
-          <a:p>
-            <a:pPr fontAlgn="auto">
-              <a:lnSpc>
-                <a:spcPct val="150000"/>
-              </a:lnSpc>
-              <a:spcBef>
-                <a:spcPts val="0"/>
-              </a:spcBef>
-              <a:spcAft>
-                <a:spcPts val="0"/>
-              </a:spcAft>
-              <a:buClr>
-                <a:srgbClr val="5B8CC1"/>
-              </a:buClr>
-              <a:buFont typeface="Wingdings" pitchFamily="2" charset="2"/>
-              <a:buChar char="n"/>
-              <a:defRPr/>
-            </a:pPr>
-            <a:r>
-              <a:rPr lang="zh-CN" altLang="en-US" sz="1200" kern="0" dirty="0" smtClean="0">
-                <a:solidFill>
-                  <a:prstClr val="white"/>
-                </a:solidFill>
-                <a:latin typeface="微软雅黑" pitchFamily="34" charset="-122"/>
-                <a:ea typeface="微软雅黑" pitchFamily="34" charset="-122"/>
-              </a:rPr>
-              <a:t>任何形式的在线付费下载。</a:t>
-            </a:r>
-          </a:p>
-          <a:p>
-            <a:pPr fontAlgn="auto">
-              <a:lnSpc>
-                <a:spcPct val="150000"/>
-              </a:lnSpc>
-              <a:spcBef>
-                <a:spcPts val="0"/>
-              </a:spcBef>
-              <a:spcAft>
-                <a:spcPts val="0"/>
-              </a:spcAft>
-              <a:buClr>
-                <a:srgbClr val="5B8CC1"/>
-              </a:buClr>
-              <a:buFont typeface="Wingdings" pitchFamily="2" charset="2"/>
-              <a:buChar char="n"/>
-              <a:defRPr/>
-            </a:pPr>
-            <a:r>
-              <a:rPr lang="zh-CN" altLang="en-US" sz="1200" kern="0" dirty="0" smtClean="0">
-                <a:solidFill>
-                  <a:prstClr val="white"/>
-                </a:solidFill>
-                <a:latin typeface="微软雅黑" pitchFamily="34" charset="-122"/>
-                <a:ea typeface="微软雅黑" pitchFamily="34" charset="-122"/>
-              </a:rPr>
-              <a:t>刻录光碟销售。</a:t>
-            </a:r>
-            <a:endParaRPr lang="zh-CN" altLang="en-GB" sz="1200" kern="0" dirty="0" smtClean="0">
-              <a:solidFill>
-                <a:prstClr val="white"/>
-              </a:solidFill>
-              <a:latin typeface="微软雅黑" pitchFamily="34" charset="-122"/>
-              <a:ea typeface="微软雅黑" pitchFamily="34" charset="-122"/>
-            </a:endParaRPr>
-          </a:p>
-        </p:txBody>
-      </p:sp>
-      <p:pic>
-        <p:nvPicPr>
-          <p:cNvPr id="1027" name="Picture 3"/>
-          <p:cNvPicPr>
-            <a:picLocks noChangeAspect="1" noChangeArrowheads="1"/>
-          </p:cNvPicPr>
-          <p:nvPr/>
-        </p:nvPicPr>
-        <p:blipFill>
-          <a:blip r:embed="rId18">
-            <a:extLst>
-              <a:ext uri="{28A0092B-C50C-407E-A947-70E740481C1C}">
-                <a14:useLocalDpi xmlns:a14="http://schemas.microsoft.com/office/drawing/2010/main" val="0"/>
-              </a:ext>
-            </a:extLst>
-          </a:blip>
-          <a:srcRect/>
-          <a:stretch>
-            <a:fillRect/>
-          </a:stretch>
-        </p:blipFill>
-        <p:spPr bwMode="auto">
-          <a:xfrm>
-            <a:off x="1612106" y="267184"/>
-            <a:ext cx="5919787" cy="1764506"/>
-          </a:xfrm>
-          <a:prstGeom prst="rect">
-            <a:avLst/>
-          </a:prstGeom>
-          <a:noFill/>
-          <a:ln>
-            <a:noFill/>
-          </a:ln>
-          <a:effectLst/>
-          <a:extLst>
-            <a:ext uri="{909E8E84-426E-40DD-AFC4-6F175D3DCCD1}">
-              <a14:hiddenFill xmlns:a14="http://schemas.microsoft.com/office/drawing/2010/main">
-                <a:solidFill>
-                  <a:schemeClr val="accent1"/>
-                </a:solidFill>
-              </a14:hiddenFill>
-            </a:ext>
-            <a:ext uri="{91240B29-F687-4F45-9708-019B960494DF}">
-              <a14:hiddenLine xmlns:a14="http://schemas.microsoft.com/office/drawing/2010/main" w="9525">
-                <a:solidFill>
-                  <a:schemeClr val="tx1"/>
-                </a:solidFill>
-                <a:miter lim="800000"/>
-                <a:headEnd/>
-                <a:tailEnd/>
-              </a14:hiddenLine>
-            </a:ext>
-            <a:ext uri="{AF507438-7753-43E0-B8FC-AC1667EBCBE1}">
-              <a14:hiddenEffects xmlns:a14="http://schemas.microsoft.com/office/drawing/2010/main">
-                <a:effectLst>
-                  <a:outerShdw dist="35921" dir="2700000" algn="ctr" rotWithShape="0">
-                    <a:schemeClr val="bg2"/>
-                  </a:outerShdw>
-                </a:effectLst>
-              </a14:hiddenEffects>
-            </a:ext>
-          </a:extLst>
-        </p:spPr>
-      </p:pic>
-    </p:spTree>
-    <p:extLst>
-      <p:ext uri="{BB962C8B-B14F-4D97-AF65-F5344CB8AC3E}">
-        <p14:creationId xmlns:p14="http://schemas.microsoft.com/office/powerpoint/2010/main" val="1855130544"/>
-      </p:ext>
-    </p:extLst>
-  </p:cSld>
-  <p:clrMapOvr>
-    <a:masterClrMapping/>
-  </p:clrMapOvr>
-  <p:timing>
-    <p:tnLst>
-      <p:par>
-        <p:cTn id="1" dur="indefinite" restart="never" nodeType="tmRoot"/>
-      </p:par>
-    </p:tnLst>
-  </p:timing>
-</p:sld>
-</file>
-
 <file path=ppt/slides/slide3.xml><?xml version="1.0" encoding="utf-8"?>
 <p:sld xmlns:a="http://schemas.openxmlformats.org/drawingml/2006/main" xmlns:r="http://schemas.openxmlformats.org/officeDocument/2006/relationships" xmlns:p="http://schemas.openxmlformats.org/presentationml/2006/main">
   <p:cSld>
@@ -17518,6 +12864,11 @@
               </a:rPr>
               <a:t>中国梦。</a:t>
             </a:r>
+            <a:endParaRPr lang="zh-CN" altLang="en-US" sz="2800" b="1" dirty="0">
+              <a:latin typeface="+mn-ea"/>
+              <a:ea typeface="+mn-ea"/>
+              <a:sym typeface="+mn-ea"/>
+            </a:endParaRPr>
           </a:p>
           <a:p>
             <a:pPr lvl="0" eaLnBrk="0" fontAlgn="auto" hangingPunct="0">
@@ -17559,6 +12910,11 @@
               </a:rPr>
               <a:t>想一想：他们实现梦想需要哪些条件？</a:t>
             </a:r>
+            <a:endParaRPr lang="zh-CN" altLang="en-US" sz="2800" b="1" dirty="0">
+              <a:latin typeface="+mn-ea"/>
+              <a:ea typeface="+mn-ea"/>
+              <a:sym typeface="+mn-ea"/>
+            </a:endParaRPr>
           </a:p>
         </p:txBody>
       </p:sp>
@@ -17946,6 +13302,13 @@
               </a:rPr>
               <a:t>中国梦能够实现？</a:t>
             </a:r>
+            <a:endParaRPr lang="zh-CN" altLang="en-US" sz="2800" b="1" dirty="0">
+              <a:solidFill>
+                <a:srgbClr val="FF0000"/>
+              </a:solidFill>
+              <a:latin typeface="黑体" panose="02010609060101010101" pitchFamily="49" charset="-122"/>
+              <a:ea typeface="黑体" panose="02010609060101010101" pitchFamily="49" charset="-122"/>
+            </a:endParaRPr>
           </a:p>
           <a:p>
             <a:pPr algn="just" fontAlgn="auto">
@@ -18003,6 +13366,10 @@
               </a:rPr>
               <a:t>实现这个目标。</a:t>
             </a:r>
+            <a:endParaRPr lang="zh-CN" altLang="en-US" sz="2800" b="1" dirty="0">
+              <a:latin typeface="Calibri" panose="020F0502020204030204"/>
+              <a:ea typeface="黑体" panose="02010609060101010101" pitchFamily="49" charset="-122"/>
+            </a:endParaRPr>
           </a:p>
         </p:txBody>
       </p:sp>
@@ -18234,6 +13601,14 @@
               </a:rPr>
               <a:t>怎样实现中国梦？（国家层面）</a:t>
             </a:r>
+            <a:endParaRPr lang="zh-CN" altLang="en-US" sz="2400" b="1" strike="noStrike" noProof="1">
+              <a:solidFill>
+                <a:srgbClr val="0070C0"/>
+              </a:solidFill>
+              <a:latin typeface="黑体" panose="02010609060101010101" pitchFamily="49" charset="-122"/>
+              <a:ea typeface="黑体" panose="02010609060101010101" pitchFamily="49" charset="-122"/>
+              <a:cs typeface="+mj-cs"/>
+            </a:endParaRPr>
           </a:p>
         </p:txBody>
       </p:sp>
@@ -18613,6 +13988,17 @@
               </a:rPr>
               <a:t>，即全国各族人民大团结的力量。</a:t>
             </a:r>
+            <a:endParaRPr lang="zh-CN" altLang="en-US" sz="2400" b="1" noProof="1">
+              <a:solidFill>
+                <a:schemeClr val="tx1">
+                  <a:lumMod val="95000"/>
+                  <a:lumOff val="5000"/>
+                </a:schemeClr>
+              </a:solidFill>
+              <a:latin typeface="黑体" panose="02010609060101010101" pitchFamily="49" charset="-122"/>
+              <a:ea typeface="黑体" panose="02010609060101010101" pitchFamily="49" charset="-122"/>
+              <a:sym typeface="+mn-ea"/>
+            </a:endParaRPr>
           </a:p>
           <a:p>
             <a:pPr algn="just" defTabSz="1219200">
@@ -18842,23 +14228,6 @@
               <a:rPr lang="zh-CN" altLang="en-US" sz="2200" dirty="0"/>
               <a:t>①树立崇高远大理想，努力学习科学文化知识，不断提高自身素质；</a:t>
             </a:r>
-          </a:p>
-          <a:p>
-            <a:pPr>
-              <a:lnSpc>
-                <a:spcPct val="125000"/>
-              </a:lnSpc>
-            </a:pPr>
-            <a:r>
-              <a:rPr lang="zh-CN" altLang="en-US" sz="2200" dirty="0"/>
-              <a:t>②</a:t>
-            </a:r>
-            <a:r>
-              <a:rPr lang="zh-CN" altLang="en-US" sz="2200" dirty="0">
-                <a:sym typeface="+mn-ea"/>
-              </a:rPr>
-              <a:t>弘扬民族精神和时代精神，继承和弘扬中华优秀传统文化；</a:t>
-            </a:r>
             <a:endParaRPr lang="zh-CN" altLang="en-US" sz="2200" dirty="0"/>
           </a:p>
           <a:p>
@@ -18869,8 +14238,15 @@
             </a:pPr>
             <a:r>
               <a:rPr lang="zh-CN" altLang="en-US" sz="2200" dirty="0"/>
-              <a:t>③从点滴做起，养成亲社会行为，积极承担责任；</a:t>
-            </a:r>
+              <a:t>②</a:t>
+            </a:r>
+            <a:r>
+              <a:rPr lang="zh-CN" altLang="en-US" sz="2200" dirty="0">
+                <a:sym typeface="+mn-ea"/>
+              </a:rPr>
+              <a:t>弘扬民族精神和时代精神，继承和弘扬中华优秀传统文化；</a:t>
+            </a:r>
+            <a:endParaRPr lang="zh-CN" altLang="en-US" sz="2200" dirty="0"/>
           </a:p>
           <a:p>
             <a:pPr>
@@ -18879,15 +14255,10 @@
               </a:lnSpc>
             </a:pPr>
             <a:r>
-              <a:rPr lang="zh-CN" altLang="en-US" sz="2200" dirty="0">
-                <a:sym typeface="+mn-ea"/>
-              </a:rPr>
-              <a:t>④</a:t>
-            </a:r>
-            <a:r>
               <a:rPr lang="zh-CN" altLang="en-US" sz="2200" dirty="0"/>
-              <a:t>积极参与社会实践，培养创新能力和实践能力；</a:t>
-            </a:r>
+              <a:t>③从点滴做起，养成亲社会行为，积极承担责任；</a:t>
+            </a:r>
+            <a:endParaRPr lang="zh-CN" altLang="en-US" sz="2200" dirty="0"/>
           </a:p>
           <a:p>
             <a:pPr>
@@ -18899,12 +14270,13 @@
               <a:rPr lang="zh-CN" altLang="en-US" sz="2200" dirty="0">
                 <a:sym typeface="+mn-ea"/>
               </a:rPr>
-              <a:t>⑤</a:t>
+              <a:t>④</a:t>
             </a:r>
             <a:r>
               <a:rPr lang="zh-CN" altLang="en-US" sz="2200" dirty="0"/>
-              <a:t>加强思想道德修养，自强不息、艰苦奋斗；</a:t>
-            </a:r>
+              <a:t>积极参与社会实践，培养创新能力和实践能力；</a:t>
+            </a:r>
+            <a:endParaRPr lang="zh-CN" altLang="en-US" sz="2200" dirty="0"/>
           </a:p>
           <a:p>
             <a:pPr>
@@ -18916,6 +14288,24 @@
               <a:rPr lang="zh-CN" altLang="en-US" sz="2200" dirty="0">
                 <a:sym typeface="+mn-ea"/>
               </a:rPr>
+              <a:t>⑤</a:t>
+            </a:r>
+            <a:r>
+              <a:rPr lang="zh-CN" altLang="en-US" sz="2200" dirty="0"/>
+              <a:t>加强思想道德修养，自强不息、艰苦奋斗；</a:t>
+            </a:r>
+            <a:endParaRPr lang="zh-CN" altLang="en-US" sz="2200" dirty="0"/>
+          </a:p>
+          <a:p>
+            <a:pPr>
+              <a:lnSpc>
+                <a:spcPct val="125000"/>
+              </a:lnSpc>
+            </a:pPr>
+            <a:r>
+              <a:rPr lang="zh-CN" altLang="en-US" sz="2200" dirty="0">
+                <a:sym typeface="+mn-ea"/>
+              </a:rPr>
               <a:t>⑥</a:t>
             </a:r>
             <a:r>
@@ -18932,6 +14322,7 @@
               <a:rPr lang="zh-CN" altLang="en-US" sz="2200" dirty="0"/>
               <a:t>依法维护国家利益。</a:t>
             </a:r>
+            <a:endParaRPr lang="zh-CN" altLang="en-US" sz="2200" dirty="0"/>
           </a:p>
         </p:txBody>
       </p:sp>
@@ -19007,7 +14398,7 @@
           </p:nvPr>
         </p:nvPicPr>
         <p:blipFill>
-          <a:blip r:embed="rId5"/>
+          <a:blip r:embed="rId4"/>
           <a:stretch>
             <a:fillRect/>
           </a:stretch>
@@ -19240,6 +14631,14 @@
               </a:rPr>
               <a:t>（奋斗的意义）？</a:t>
             </a:r>
+            <a:endParaRPr lang="zh-CN" altLang="zh-CN" sz="2400" b="1" dirty="0">
+              <a:solidFill>
+                <a:srgbClr val="0070C0"/>
+              </a:solidFill>
+              <a:latin typeface="黑体" panose="02010609060101010101" pitchFamily="49" charset="-122"/>
+              <a:ea typeface="黑体" panose="02010609060101010101" pitchFamily="49" charset="-122"/>
+              <a:cs typeface="+mj-cs"/>
+            </a:endParaRPr>
           </a:p>
         </p:txBody>
       </p:sp>
@@ -19306,6 +14705,13 @@
               </a:rPr>
               <a:t>；</a:t>
             </a:r>
+            <a:endParaRPr lang="zh-CN" altLang="en-US" sz="2400" b="1" dirty="0">
+              <a:solidFill>
+                <a:schemeClr val="tx1"/>
+              </a:solidFill>
+              <a:latin typeface="黑体" panose="02010609060101010101" pitchFamily="49" charset="-122"/>
+              <a:ea typeface="黑体" panose="02010609060101010101" pitchFamily="49" charset="-122"/>
+            </a:endParaRPr>
           </a:p>
           <a:p>
             <a:pPr marL="457200" indent="-457200">
@@ -19345,6 +14751,13 @@
               </a:rPr>
               <a:t>，也是最懂得幸福、最享受幸福的人；</a:t>
             </a:r>
+            <a:endParaRPr lang="zh-CN" altLang="en-US" sz="2400" b="1" dirty="0">
+              <a:solidFill>
+                <a:schemeClr val="tx1"/>
+              </a:solidFill>
+              <a:latin typeface="黑体" panose="02010609060101010101" pitchFamily="49" charset="-122"/>
+              <a:ea typeface="黑体" panose="02010609060101010101" pitchFamily="49" charset="-122"/>
+            </a:endParaRPr>
           </a:p>
           <a:p>
             <a:pPr marL="457200" indent="-457200">
@@ -19384,6 +14797,13 @@
               </a:rPr>
               <a:t>。</a:t>
             </a:r>
+            <a:endParaRPr lang="zh-CN" altLang="en-US" sz="2400" b="1" dirty="0">
+              <a:solidFill>
+                <a:schemeClr val="tx1"/>
+              </a:solidFill>
+              <a:latin typeface="黑体" panose="02010609060101010101" pitchFamily="49" charset="-122"/>
+              <a:ea typeface="黑体" panose="02010609060101010101" pitchFamily="49" charset="-122"/>
+            </a:endParaRPr>
           </a:p>
         </p:txBody>
       </p:sp>
@@ -19495,6 +14915,13 @@
                 </a:rPr>
                 <a:t>笔记区</a:t>
               </a:r>
+              <a:endParaRPr lang="zh-CN" altLang="en-US" sz="2000" b="1" dirty="0">
+                <a:solidFill>
+                  <a:srgbClr val="FF0000"/>
+                </a:solidFill>
+                <a:latin typeface="楷体" panose="02010609060101010101" pitchFamily="49" charset="-122"/>
+                <a:ea typeface="楷体" panose="02010609060101010101" pitchFamily="49" charset="-122"/>
+              </a:endParaRPr>
             </a:p>
           </p:txBody>
         </p:sp>
@@ -19805,330 +15232,322 @@
 </file>
 
 <file path=ppt/tags/tag1.xml><?xml version="1.0" encoding="utf-8"?>
-<p:tagLst xmlns:a="http://schemas.openxmlformats.org/drawingml/2006/main" xmlns:r="http://schemas.openxmlformats.org/officeDocument/2006/relationships" xmlns:p="http://schemas.openxmlformats.org/presentationml/2006/main">
-  <p:tag name="KSO_WPP_MARK_KEY" val="03cb5ca4-3200-47ea-8909-9a8b1196cda9"/>
-  <p:tag name="COMMONDATA" val="eyJoZGlkIjoiNzY0YmM2NDNlODZiMzkwNDZkNDY0OTExYmY4ODNlODMifQ=="/>
-  <p:tag name="commondata" val="eyJoZGlkIjoiMDc0YmVkNzIyYTUyMGViMjlkZjRjOWNkOGFjNWZiMmUifQ=="/>
+<p:tagLst xmlns:p="http://schemas.openxmlformats.org/presentationml/2006/main">
+  <p:tag name="KSO_WM_BEAUTIFY_FLAG" val=""/>
 </p:tagLst>
 </file>
 
 <file path=ppt/tags/tag10.xml><?xml version="1.0" encoding="utf-8"?>
-<p:tagLst xmlns:a="http://schemas.openxmlformats.org/drawingml/2006/main" xmlns:r="http://schemas.openxmlformats.org/officeDocument/2006/relationships" xmlns:p="http://schemas.openxmlformats.org/presentationml/2006/main">
+<p:tagLst xmlns:p="http://schemas.openxmlformats.org/presentationml/2006/main">
   <p:tag name="KSO_WM_BEAUTIFY_FLAG" val=""/>
 </p:tagLst>
 </file>
 
 <file path=ppt/tags/tag11.xml><?xml version="1.0" encoding="utf-8"?>
-<p:tagLst xmlns:a="http://schemas.openxmlformats.org/drawingml/2006/main" xmlns:r="http://schemas.openxmlformats.org/officeDocument/2006/relationships" xmlns:p="http://schemas.openxmlformats.org/presentationml/2006/main">
+<p:tagLst xmlns:p="http://schemas.openxmlformats.org/presentationml/2006/main">
   <p:tag name="KSO_WM_BEAUTIFY_FLAG" val=""/>
 </p:tagLst>
 </file>
 
 <file path=ppt/tags/tag12.xml><?xml version="1.0" encoding="utf-8"?>
-<p:tagLst xmlns:a="http://schemas.openxmlformats.org/drawingml/2006/main" xmlns:r="http://schemas.openxmlformats.org/officeDocument/2006/relationships" xmlns:p="http://schemas.openxmlformats.org/presentationml/2006/main">
+<p:tagLst xmlns:p="http://schemas.openxmlformats.org/presentationml/2006/main">
   <p:tag name="KSO_WM_BEAUTIFY_FLAG" val=""/>
 </p:tagLst>
 </file>
 
 <file path=ppt/tags/tag13.xml><?xml version="1.0" encoding="utf-8"?>
-<p:tagLst xmlns:a="http://schemas.openxmlformats.org/drawingml/2006/main" xmlns:r="http://schemas.openxmlformats.org/officeDocument/2006/relationships" xmlns:p="http://schemas.openxmlformats.org/presentationml/2006/main">
+<p:tagLst xmlns:p="http://schemas.openxmlformats.org/presentationml/2006/main">
   <p:tag name="KSO_WM_BEAUTIFY_FLAG" val=""/>
 </p:tagLst>
 </file>
 
 <file path=ppt/tags/tag14.xml><?xml version="1.0" encoding="utf-8"?>
-<p:tagLst xmlns:a="http://schemas.openxmlformats.org/drawingml/2006/main" xmlns:r="http://schemas.openxmlformats.org/officeDocument/2006/relationships" xmlns:p="http://schemas.openxmlformats.org/presentationml/2006/main">
+<p:tagLst xmlns:p="http://schemas.openxmlformats.org/presentationml/2006/main">
   <p:tag name="KSO_WM_BEAUTIFY_FLAG" val=""/>
 </p:tagLst>
 </file>
 
 <file path=ppt/tags/tag15.xml><?xml version="1.0" encoding="utf-8"?>
-<p:tagLst xmlns:a="http://schemas.openxmlformats.org/drawingml/2006/main" xmlns:r="http://schemas.openxmlformats.org/officeDocument/2006/relationships" xmlns:p="http://schemas.openxmlformats.org/presentationml/2006/main">
+<p:tagLst xmlns:p="http://schemas.openxmlformats.org/presentationml/2006/main">
   <p:tag name="KSO_WM_BEAUTIFY_FLAG" val=""/>
 </p:tagLst>
 </file>
 
 <file path=ppt/tags/tag16.xml><?xml version="1.0" encoding="utf-8"?>
-<p:tagLst xmlns:a="http://schemas.openxmlformats.org/drawingml/2006/main" xmlns:r="http://schemas.openxmlformats.org/officeDocument/2006/relationships" xmlns:p="http://schemas.openxmlformats.org/presentationml/2006/main">
+<p:tagLst xmlns:p="http://schemas.openxmlformats.org/presentationml/2006/main">
   <p:tag name="KSO_WM_BEAUTIFY_FLAG" val=""/>
 </p:tagLst>
 </file>
 
 <file path=ppt/tags/tag17.xml><?xml version="1.0" encoding="utf-8"?>
-<p:tagLst xmlns:a="http://schemas.openxmlformats.org/drawingml/2006/main" xmlns:r="http://schemas.openxmlformats.org/officeDocument/2006/relationships" xmlns:p="http://schemas.openxmlformats.org/presentationml/2006/main">
+<p:tagLst xmlns:p="http://schemas.openxmlformats.org/presentationml/2006/main">
   <p:tag name="KSO_WM_BEAUTIFY_FLAG" val=""/>
 </p:tagLst>
 </file>
 
 <file path=ppt/tags/tag18.xml><?xml version="1.0" encoding="utf-8"?>
-<p:tagLst xmlns:a="http://schemas.openxmlformats.org/drawingml/2006/main" xmlns:r="http://schemas.openxmlformats.org/officeDocument/2006/relationships" xmlns:p="http://schemas.openxmlformats.org/presentationml/2006/main">
+<p:tagLst xmlns:p="http://schemas.openxmlformats.org/presentationml/2006/main">
   <p:tag name="KSO_WM_BEAUTIFY_FLAG" val=""/>
 </p:tagLst>
 </file>
 
 <file path=ppt/tags/tag19.xml><?xml version="1.0" encoding="utf-8"?>
-<p:tagLst xmlns:a="http://schemas.openxmlformats.org/drawingml/2006/main" xmlns:r="http://schemas.openxmlformats.org/officeDocument/2006/relationships" xmlns:p="http://schemas.openxmlformats.org/presentationml/2006/main">
+<p:tagLst xmlns:p="http://schemas.openxmlformats.org/presentationml/2006/main">
   <p:tag name="KSO_WM_BEAUTIFY_FLAG" val=""/>
 </p:tagLst>
 </file>
 
 <file path=ppt/tags/tag2.xml><?xml version="1.0" encoding="utf-8"?>
-<p:tagLst xmlns:a="http://schemas.openxmlformats.org/drawingml/2006/main" xmlns:r="http://schemas.openxmlformats.org/officeDocument/2006/relationships" xmlns:p="http://schemas.openxmlformats.org/presentationml/2006/main">
+<p:tagLst xmlns:p="http://schemas.openxmlformats.org/presentationml/2006/main">
   <p:tag name="KSO_WM_BEAUTIFY_FLAG" val=""/>
 </p:tagLst>
 </file>
 
 <file path=ppt/tags/tag20.xml><?xml version="1.0" encoding="utf-8"?>
-<p:tagLst xmlns:a="http://schemas.openxmlformats.org/drawingml/2006/main" xmlns:r="http://schemas.openxmlformats.org/officeDocument/2006/relationships" xmlns:p="http://schemas.openxmlformats.org/presentationml/2006/main">
+<p:tagLst xmlns:p="http://schemas.openxmlformats.org/presentationml/2006/main">
   <p:tag name="KSO_WM_BEAUTIFY_FLAG" val=""/>
 </p:tagLst>
 </file>
 
 <file path=ppt/tags/tag21.xml><?xml version="1.0" encoding="utf-8"?>
-<p:tagLst xmlns:a="http://schemas.openxmlformats.org/drawingml/2006/main" xmlns:r="http://schemas.openxmlformats.org/officeDocument/2006/relationships" xmlns:p="http://schemas.openxmlformats.org/presentationml/2006/main">
+<p:tagLst xmlns:p="http://schemas.openxmlformats.org/presentationml/2006/main">
   <p:tag name="KSO_WM_BEAUTIFY_FLAG" val=""/>
 </p:tagLst>
 </file>
 
 <file path=ppt/tags/tag22.xml><?xml version="1.0" encoding="utf-8"?>
-<p:tagLst xmlns:a="http://schemas.openxmlformats.org/drawingml/2006/main" xmlns:r="http://schemas.openxmlformats.org/officeDocument/2006/relationships" xmlns:p="http://schemas.openxmlformats.org/presentationml/2006/main">
+<p:tagLst xmlns:p="http://schemas.openxmlformats.org/presentationml/2006/main">
   <p:tag name="KSO_WM_BEAUTIFY_FLAG" val=""/>
 </p:tagLst>
 </file>
 
 <file path=ppt/tags/tag23.xml><?xml version="1.0" encoding="utf-8"?>
-<p:tagLst xmlns:a="http://schemas.openxmlformats.org/drawingml/2006/main" xmlns:r="http://schemas.openxmlformats.org/officeDocument/2006/relationships" xmlns:p="http://schemas.openxmlformats.org/presentationml/2006/main">
+<p:tagLst xmlns:p="http://schemas.openxmlformats.org/presentationml/2006/main">
   <p:tag name="KSO_WM_BEAUTIFY_FLAG" val=""/>
 </p:tagLst>
 </file>
 
 <file path=ppt/tags/tag24.xml><?xml version="1.0" encoding="utf-8"?>
-<p:tagLst xmlns:a="http://schemas.openxmlformats.org/drawingml/2006/main" xmlns:r="http://schemas.openxmlformats.org/officeDocument/2006/relationships" xmlns:p="http://schemas.openxmlformats.org/presentationml/2006/main">
+<p:tagLst xmlns:p="http://schemas.openxmlformats.org/presentationml/2006/main">
   <p:tag name="KSO_WM_BEAUTIFY_FLAG" val=""/>
 </p:tagLst>
 </file>
 
 <file path=ppt/tags/tag25.xml><?xml version="1.0" encoding="utf-8"?>
-<p:tagLst xmlns:a="http://schemas.openxmlformats.org/drawingml/2006/main" xmlns:r="http://schemas.openxmlformats.org/officeDocument/2006/relationships" xmlns:p="http://schemas.openxmlformats.org/presentationml/2006/main">
+<p:tagLst xmlns:p="http://schemas.openxmlformats.org/presentationml/2006/main">
   <p:tag name="KSO_WM_BEAUTIFY_FLAG" val=""/>
 </p:tagLst>
 </file>
 
 <file path=ppt/tags/tag26.xml><?xml version="1.0" encoding="utf-8"?>
-<p:tagLst xmlns:a="http://schemas.openxmlformats.org/drawingml/2006/main" xmlns:r="http://schemas.openxmlformats.org/officeDocument/2006/relationships" xmlns:p="http://schemas.openxmlformats.org/presentationml/2006/main">
+<p:tagLst xmlns:p="http://schemas.openxmlformats.org/presentationml/2006/main">
   <p:tag name="KSO_WM_BEAUTIFY_FLAG" val=""/>
 </p:tagLst>
 </file>
 
 <file path=ppt/tags/tag27.xml><?xml version="1.0" encoding="utf-8"?>
-<p:tagLst xmlns:a="http://schemas.openxmlformats.org/drawingml/2006/main" xmlns:r="http://schemas.openxmlformats.org/officeDocument/2006/relationships" xmlns:p="http://schemas.openxmlformats.org/presentationml/2006/main">
+<p:tagLst xmlns:p="http://schemas.openxmlformats.org/presentationml/2006/main">
   <p:tag name="KSO_WM_BEAUTIFY_FLAG" val=""/>
 </p:tagLst>
 </file>
 
 <file path=ppt/tags/tag28.xml><?xml version="1.0" encoding="utf-8"?>
-<p:tagLst xmlns:a="http://schemas.openxmlformats.org/drawingml/2006/main" xmlns:r="http://schemas.openxmlformats.org/officeDocument/2006/relationships" xmlns:p="http://schemas.openxmlformats.org/presentationml/2006/main">
+<p:tagLst xmlns:p="http://schemas.openxmlformats.org/presentationml/2006/main">
   <p:tag name="KSO_WM_BEAUTIFY_FLAG" val=""/>
 </p:tagLst>
 </file>
 
 <file path=ppt/tags/tag29.xml><?xml version="1.0" encoding="utf-8"?>
-<p:tagLst xmlns:a="http://schemas.openxmlformats.org/drawingml/2006/main" xmlns:r="http://schemas.openxmlformats.org/officeDocument/2006/relationships" xmlns:p="http://schemas.openxmlformats.org/presentationml/2006/main">
+<p:tagLst xmlns:p="http://schemas.openxmlformats.org/presentationml/2006/main">
   <p:tag name="KSO_WM_BEAUTIFY_FLAG" val=""/>
 </p:tagLst>
 </file>
 
 <file path=ppt/tags/tag3.xml><?xml version="1.0" encoding="utf-8"?>
-<p:tagLst xmlns:a="http://schemas.openxmlformats.org/drawingml/2006/main" xmlns:r="http://schemas.openxmlformats.org/officeDocument/2006/relationships" xmlns:p="http://schemas.openxmlformats.org/presentationml/2006/main">
+<p:tagLst xmlns:p="http://schemas.openxmlformats.org/presentationml/2006/main">
   <p:tag name="KSO_WM_BEAUTIFY_FLAG" val=""/>
 </p:tagLst>
 </file>
 
 <file path=ppt/tags/tag30.xml><?xml version="1.0" encoding="utf-8"?>
-<p:tagLst xmlns:a="http://schemas.openxmlformats.org/drawingml/2006/main" xmlns:r="http://schemas.openxmlformats.org/officeDocument/2006/relationships" xmlns:p="http://schemas.openxmlformats.org/presentationml/2006/main">
+<p:tagLst xmlns:p="http://schemas.openxmlformats.org/presentationml/2006/main">
   <p:tag name="KSO_WM_BEAUTIFY_FLAG" val=""/>
 </p:tagLst>
 </file>
 
 <file path=ppt/tags/tag31.xml><?xml version="1.0" encoding="utf-8"?>
-<p:tagLst xmlns:a="http://schemas.openxmlformats.org/drawingml/2006/main" xmlns:r="http://schemas.openxmlformats.org/officeDocument/2006/relationships" xmlns:p="http://schemas.openxmlformats.org/presentationml/2006/main">
+<p:tagLst xmlns:p="http://schemas.openxmlformats.org/presentationml/2006/main">
   <p:tag name="KSO_WM_BEAUTIFY_FLAG" val=""/>
 </p:tagLst>
 </file>
 
 <file path=ppt/tags/tag32.xml><?xml version="1.0" encoding="utf-8"?>
-<p:tagLst xmlns:a="http://schemas.openxmlformats.org/drawingml/2006/main" xmlns:r="http://schemas.openxmlformats.org/officeDocument/2006/relationships" xmlns:p="http://schemas.openxmlformats.org/presentationml/2006/main">
+<p:tagLst xmlns:p="http://schemas.openxmlformats.org/presentationml/2006/main">
   <p:tag name="KSO_WM_BEAUTIFY_FLAG" val=""/>
 </p:tagLst>
 </file>
 
 <file path=ppt/tags/tag33.xml><?xml version="1.0" encoding="utf-8"?>
-<p:tagLst xmlns:a="http://schemas.openxmlformats.org/drawingml/2006/main" xmlns:r="http://schemas.openxmlformats.org/officeDocument/2006/relationships" xmlns:p="http://schemas.openxmlformats.org/presentationml/2006/main">
+<p:tagLst xmlns:p="http://schemas.openxmlformats.org/presentationml/2006/main">
   <p:tag name="KSO_WM_BEAUTIFY_FLAG" val=""/>
 </p:tagLst>
 </file>
 
 <file path=ppt/tags/tag34.xml><?xml version="1.0" encoding="utf-8"?>
-<p:tagLst xmlns:a="http://schemas.openxmlformats.org/drawingml/2006/main" xmlns:r="http://schemas.openxmlformats.org/officeDocument/2006/relationships" xmlns:p="http://schemas.openxmlformats.org/presentationml/2006/main">
+<p:tagLst xmlns:p="http://schemas.openxmlformats.org/presentationml/2006/main">
   <p:tag name="KSO_WM_BEAUTIFY_FLAG" val=""/>
 </p:tagLst>
 </file>
 
 <file path=ppt/tags/tag35.xml><?xml version="1.0" encoding="utf-8"?>
-<p:tagLst xmlns:a="http://schemas.openxmlformats.org/drawingml/2006/main" xmlns:r="http://schemas.openxmlformats.org/officeDocument/2006/relationships" xmlns:p="http://schemas.openxmlformats.org/presentationml/2006/main">
+<p:tagLst xmlns:p="http://schemas.openxmlformats.org/presentationml/2006/main">
   <p:tag name="KSO_WM_BEAUTIFY_FLAG" val=""/>
 </p:tagLst>
 </file>
 
 <file path=ppt/tags/tag36.xml><?xml version="1.0" encoding="utf-8"?>
-<p:tagLst xmlns:a="http://schemas.openxmlformats.org/drawingml/2006/main" xmlns:r="http://schemas.openxmlformats.org/officeDocument/2006/relationships" xmlns:p="http://schemas.openxmlformats.org/presentationml/2006/main">
+<p:tagLst xmlns:p="http://schemas.openxmlformats.org/presentationml/2006/main">
   <p:tag name="KSO_WM_BEAUTIFY_FLAG" val=""/>
 </p:tagLst>
 </file>
 
 <file path=ppt/tags/tag37.xml><?xml version="1.0" encoding="utf-8"?>
-<p:tagLst xmlns:a="http://schemas.openxmlformats.org/drawingml/2006/main" xmlns:r="http://schemas.openxmlformats.org/officeDocument/2006/relationships" xmlns:p="http://schemas.openxmlformats.org/presentationml/2006/main">
+<p:tagLst xmlns:p="http://schemas.openxmlformats.org/presentationml/2006/main">
   <p:tag name="KSO_WM_BEAUTIFY_FLAG" val=""/>
 </p:tagLst>
 </file>
 
 <file path=ppt/tags/tag38.xml><?xml version="1.0" encoding="utf-8"?>
-<p:tagLst xmlns:a="http://schemas.openxmlformats.org/drawingml/2006/main" xmlns:r="http://schemas.openxmlformats.org/officeDocument/2006/relationships" xmlns:p="http://schemas.openxmlformats.org/presentationml/2006/main">
+<p:tagLst xmlns:p="http://schemas.openxmlformats.org/presentationml/2006/main">
   <p:tag name="KSO_WM_BEAUTIFY_FLAG" val=""/>
 </p:tagLst>
 </file>
 
 <file path=ppt/tags/tag39.xml><?xml version="1.0" encoding="utf-8"?>
-<p:tagLst xmlns:a="http://schemas.openxmlformats.org/drawingml/2006/main" xmlns:r="http://schemas.openxmlformats.org/officeDocument/2006/relationships" xmlns:p="http://schemas.openxmlformats.org/presentationml/2006/main">
+<p:tagLst xmlns:p="http://schemas.openxmlformats.org/presentationml/2006/main">
   <p:tag name="KSO_WM_BEAUTIFY_FLAG" val=""/>
 </p:tagLst>
 </file>
 
 <file path=ppt/tags/tag4.xml><?xml version="1.0" encoding="utf-8"?>
-<p:tagLst xmlns:a="http://schemas.openxmlformats.org/drawingml/2006/main" xmlns:r="http://schemas.openxmlformats.org/officeDocument/2006/relationships" xmlns:p="http://schemas.openxmlformats.org/presentationml/2006/main">
+<p:tagLst xmlns:p="http://schemas.openxmlformats.org/presentationml/2006/main">
   <p:tag name="KSO_WM_BEAUTIFY_FLAG" val=""/>
 </p:tagLst>
 </file>
 
 <file path=ppt/tags/tag40.xml><?xml version="1.0" encoding="utf-8"?>
-<p:tagLst xmlns:a="http://schemas.openxmlformats.org/drawingml/2006/main" xmlns:r="http://schemas.openxmlformats.org/officeDocument/2006/relationships" xmlns:p="http://schemas.openxmlformats.org/presentationml/2006/main">
+<p:tagLst xmlns:p="http://schemas.openxmlformats.org/presentationml/2006/main">
   <p:tag name="KSO_WM_BEAUTIFY_FLAG" val=""/>
 </p:tagLst>
 </file>
 
 <file path=ppt/tags/tag41.xml><?xml version="1.0" encoding="utf-8"?>
-<p:tagLst xmlns:a="http://schemas.openxmlformats.org/drawingml/2006/main" xmlns:r="http://schemas.openxmlformats.org/officeDocument/2006/relationships" xmlns:p="http://schemas.openxmlformats.org/presentationml/2006/main">
+<p:tagLst xmlns:p="http://schemas.openxmlformats.org/presentationml/2006/main">
   <p:tag name="KSO_WM_BEAUTIFY_FLAG" val=""/>
 </p:tagLst>
 </file>
 
 <file path=ppt/tags/tag42.xml><?xml version="1.0" encoding="utf-8"?>
-<p:tagLst xmlns:a="http://schemas.openxmlformats.org/drawingml/2006/main" xmlns:r="http://schemas.openxmlformats.org/officeDocument/2006/relationships" xmlns:p="http://schemas.openxmlformats.org/presentationml/2006/main">
+<p:tagLst xmlns:p="http://schemas.openxmlformats.org/presentationml/2006/main">
   <p:tag name="KSO_WM_BEAUTIFY_FLAG" val=""/>
 </p:tagLst>
 </file>
 
 <file path=ppt/tags/tag43.xml><?xml version="1.0" encoding="utf-8"?>
-<p:tagLst xmlns:a="http://schemas.openxmlformats.org/drawingml/2006/main" xmlns:r="http://schemas.openxmlformats.org/officeDocument/2006/relationships" xmlns:p="http://schemas.openxmlformats.org/presentationml/2006/main">
+<p:tagLst xmlns:p="http://schemas.openxmlformats.org/presentationml/2006/main">
   <p:tag name="KSO_WM_BEAUTIFY_FLAG" val=""/>
 </p:tagLst>
 </file>
 
 <file path=ppt/tags/tag44.xml><?xml version="1.0" encoding="utf-8"?>
-<p:tagLst xmlns:a="http://schemas.openxmlformats.org/drawingml/2006/main" xmlns:r="http://schemas.openxmlformats.org/officeDocument/2006/relationships" xmlns:p="http://schemas.openxmlformats.org/presentationml/2006/main">
+<p:tagLst xmlns:p="http://schemas.openxmlformats.org/presentationml/2006/main">
   <p:tag name="KSO_WM_BEAUTIFY_FLAG" val=""/>
 </p:tagLst>
 </file>
 
 <file path=ppt/tags/tag45.xml><?xml version="1.0" encoding="utf-8"?>
-<p:tagLst xmlns:a="http://schemas.openxmlformats.org/drawingml/2006/main" xmlns:r="http://schemas.openxmlformats.org/officeDocument/2006/relationships" xmlns:p="http://schemas.openxmlformats.org/presentationml/2006/main">
+<p:tagLst xmlns:p="http://schemas.openxmlformats.org/presentationml/2006/main">
   <p:tag name="KSO_WM_BEAUTIFY_FLAG" val=""/>
 </p:tagLst>
 </file>
 
 <file path=ppt/tags/tag46.xml><?xml version="1.0" encoding="utf-8"?>
-<p:tagLst xmlns:a="http://schemas.openxmlformats.org/drawingml/2006/main" xmlns:r="http://schemas.openxmlformats.org/officeDocument/2006/relationships" xmlns:p="http://schemas.openxmlformats.org/presentationml/2006/main">
+<p:tagLst xmlns:p="http://schemas.openxmlformats.org/presentationml/2006/main">
   <p:tag name="KSO_WM_BEAUTIFY_FLAG" val=""/>
 </p:tagLst>
 </file>
 
 <file path=ppt/tags/tag47.xml><?xml version="1.0" encoding="utf-8"?>
-<p:tagLst xmlns:a="http://schemas.openxmlformats.org/drawingml/2006/main" xmlns:r="http://schemas.openxmlformats.org/officeDocument/2006/relationships" xmlns:p="http://schemas.openxmlformats.org/presentationml/2006/main">
+<p:tagLst xmlns:p="http://schemas.openxmlformats.org/presentationml/2006/main">
   <p:tag name="KSO_WM_BEAUTIFY_FLAG" val=""/>
 </p:tagLst>
 </file>
 
 <file path=ppt/tags/tag48.xml><?xml version="1.0" encoding="utf-8"?>
-<p:tagLst xmlns:a="http://schemas.openxmlformats.org/drawingml/2006/main" xmlns:r="http://schemas.openxmlformats.org/officeDocument/2006/relationships" xmlns:p="http://schemas.openxmlformats.org/presentationml/2006/main">
+<p:tagLst xmlns:p="http://schemas.openxmlformats.org/presentationml/2006/main">
   <p:tag name="KSO_WM_BEAUTIFY_FLAG" val=""/>
 </p:tagLst>
 </file>
 
 <file path=ppt/tags/tag49.xml><?xml version="1.0" encoding="utf-8"?>
-<p:tagLst xmlns:a="http://schemas.openxmlformats.org/drawingml/2006/main" xmlns:r="http://schemas.openxmlformats.org/officeDocument/2006/relationships" xmlns:p="http://schemas.openxmlformats.org/presentationml/2006/main">
+<p:tagLst xmlns:p="http://schemas.openxmlformats.org/presentationml/2006/main">
   <p:tag name="KSO_WM_BEAUTIFY_FLAG" val=""/>
 </p:tagLst>
 </file>
 
 <file path=ppt/tags/tag5.xml><?xml version="1.0" encoding="utf-8"?>
-<p:tagLst xmlns:a="http://schemas.openxmlformats.org/drawingml/2006/main" xmlns:r="http://schemas.openxmlformats.org/officeDocument/2006/relationships" xmlns:p="http://schemas.openxmlformats.org/presentationml/2006/main">
+<p:tagLst xmlns:p="http://schemas.openxmlformats.org/presentationml/2006/main">
   <p:tag name="KSO_WM_BEAUTIFY_FLAG" val=""/>
 </p:tagLst>
 </file>
 
 <file path=ppt/tags/tag50.xml><?xml version="1.0" encoding="utf-8"?>
-<p:tagLst xmlns:a="http://schemas.openxmlformats.org/drawingml/2006/main" xmlns:r="http://schemas.openxmlformats.org/officeDocument/2006/relationships" xmlns:p="http://schemas.openxmlformats.org/presentationml/2006/main">
+<p:tagLst xmlns:p="http://schemas.openxmlformats.org/presentationml/2006/main">
   <p:tag name="KSO_WM_BEAUTIFY_FLAG" val=""/>
 </p:tagLst>
 </file>
 
 <file path=ppt/tags/tag51.xml><?xml version="1.0" encoding="utf-8"?>
-<p:tagLst xmlns:a="http://schemas.openxmlformats.org/drawingml/2006/main" xmlns:r="http://schemas.openxmlformats.org/officeDocument/2006/relationships" xmlns:p="http://schemas.openxmlformats.org/presentationml/2006/main">
+<p:tagLst xmlns:p="http://schemas.openxmlformats.org/presentationml/2006/main">
   <p:tag name="KSO_WM_BEAUTIFY_FLAG" val=""/>
 </p:tagLst>
 </file>
 
 <file path=ppt/tags/tag52.xml><?xml version="1.0" encoding="utf-8"?>
-<p:tagLst xmlns:a="http://schemas.openxmlformats.org/drawingml/2006/main" xmlns:r="http://schemas.openxmlformats.org/officeDocument/2006/relationships" xmlns:p="http://schemas.openxmlformats.org/presentationml/2006/main">
+<p:tagLst xmlns:p="http://schemas.openxmlformats.org/presentationml/2006/main">
+  <p:tag name="AS_UNIQUEID" val="12308"/>
   <p:tag name="KSO_WM_BEAUTIFY_FLAG" val=""/>
 </p:tagLst>
 </file>
 
 <file path=ppt/tags/tag53.xml><?xml version="1.0" encoding="utf-8"?>
-<p:tagLst xmlns:a="http://schemas.openxmlformats.org/drawingml/2006/main" xmlns:r="http://schemas.openxmlformats.org/officeDocument/2006/relationships" xmlns:p="http://schemas.openxmlformats.org/presentationml/2006/main">
-  <p:tag name="AS_UNIQUEID" val="12308"/>
+<p:tagLst xmlns:p="http://schemas.openxmlformats.org/presentationml/2006/main">
+  <p:tag name="AS_UNIQUEID" val="23"/>
   <p:tag name="KSO_WM_BEAUTIFY_FLAG" val=""/>
 </p:tagLst>
 </file>
 
 <file path=ppt/tags/tag54.xml><?xml version="1.0" encoding="utf-8"?>
-<p:tagLst xmlns:a="http://schemas.openxmlformats.org/drawingml/2006/main" xmlns:r="http://schemas.openxmlformats.org/officeDocument/2006/relationships" xmlns:p="http://schemas.openxmlformats.org/presentationml/2006/main">
-  <p:tag name="AS_UNIQUEID" val="23"/>
-  <p:tag name="KSO_WM_BEAUTIFY_FLAG" val=""/>
+<p:tagLst xmlns:p="http://schemas.openxmlformats.org/presentationml/2006/main">
+  <p:tag name="AS_UNIQUEID" val="14207"/>
 </p:tagLst>
 </file>
 
 <file path=ppt/tags/tag55.xml><?xml version="1.0" encoding="utf-8"?>
-<p:tagLst xmlns:a="http://schemas.openxmlformats.org/drawingml/2006/main" xmlns:r="http://schemas.openxmlformats.org/officeDocument/2006/relationships" xmlns:p="http://schemas.openxmlformats.org/presentationml/2006/main">
-  <p:tag name="AS_UNIQUEID" val="14207"/>
+<p:tagLst xmlns:p="http://schemas.openxmlformats.org/presentationml/2006/main">
+  <p:tag name="AS_UNIQUEID" val="14208"/>
 </p:tagLst>
 </file>
 
 <file path=ppt/tags/tag56.xml><?xml version="1.0" encoding="utf-8"?>
-<p:tagLst xmlns:a="http://schemas.openxmlformats.org/drawingml/2006/main" xmlns:r="http://schemas.openxmlformats.org/officeDocument/2006/relationships" xmlns:p="http://schemas.openxmlformats.org/presentationml/2006/main">
-  <p:tag name="AS_UNIQUEID" val="14208"/>
-</p:tagLst>
-</file>
-
-<file path=ppt/tags/tag57.xml><?xml version="1.0" encoding="utf-8"?>
-<p:tagLst xmlns:a="http://schemas.openxmlformats.org/drawingml/2006/main" xmlns:r="http://schemas.openxmlformats.org/officeDocument/2006/relationships" xmlns:p="http://schemas.openxmlformats.org/presentationml/2006/main">
+<p:tagLst xmlns:p="http://schemas.openxmlformats.org/presentationml/2006/main">
   <p:tag name="AS_UNIQUEID" val="2778"/>
   <p:tag name="KSO_WM_BEAUTIFY_FLAG" val=""/>
 </p:tagLst>
 </file>
 
-<file path=ppt/tags/tag58.xml><?xml version="1.0" encoding="utf-8"?>
-<p:tagLst xmlns:a="http://schemas.openxmlformats.org/drawingml/2006/main" xmlns:r="http://schemas.openxmlformats.org/officeDocument/2006/relationships" xmlns:p="http://schemas.openxmlformats.org/presentationml/2006/main">
+<file path=ppt/tags/tag57.xml><?xml version="1.0" encoding="utf-8"?>
+<p:tagLst xmlns:p="http://schemas.openxmlformats.org/presentationml/2006/main">
   <p:tag name="AS_UNIQUEID" val="3038"/>
   <p:tag name="KSO_WM_BEAUTIFY_FLAG" val=""/>
   <p:tag name="KSO_WM_TAG_VERSION" val="1.0"/>
@@ -20149,122 +15568,122 @@
 </p:tagLst>
 </file>
 
-<file path=ppt/tags/tag59.xml><?xml version="1.0" encoding="utf-8"?>
-<p:tagLst xmlns:a="http://schemas.openxmlformats.org/drawingml/2006/main" xmlns:r="http://schemas.openxmlformats.org/officeDocument/2006/relationships" xmlns:p="http://schemas.openxmlformats.org/presentationml/2006/main">
+<file path=ppt/tags/tag58.xml><?xml version="1.0" encoding="utf-8"?>
+<p:tagLst xmlns:p="http://schemas.openxmlformats.org/presentationml/2006/main">
   <p:tag name="AS_UNIQUEID" val="73"/>
   <p:tag name="KSO_WM_BEAUTIFY_FLAG" val=""/>
 </p:tagLst>
 </file>
 
+<file path=ppt/tags/tag59.xml><?xml version="1.0" encoding="utf-8"?>
+<p:tagLst xmlns:p="http://schemas.openxmlformats.org/presentationml/2006/main">
+  <p:tag name="AS_UNIQUEID" val="12333"/>
+  <p:tag name="KSO_WM_BEAUTIFY_FLAG" val=""/>
+</p:tagLst>
+</file>
+
 <file path=ppt/tags/tag6.xml><?xml version="1.0" encoding="utf-8"?>
-<p:tagLst xmlns:a="http://schemas.openxmlformats.org/drawingml/2006/main" xmlns:r="http://schemas.openxmlformats.org/officeDocument/2006/relationships" xmlns:p="http://schemas.openxmlformats.org/presentationml/2006/main">
+<p:tagLst xmlns:p="http://schemas.openxmlformats.org/presentationml/2006/main">
   <p:tag name="KSO_WM_BEAUTIFY_FLAG" val=""/>
 </p:tagLst>
 </file>
 
 <file path=ppt/tags/tag60.xml><?xml version="1.0" encoding="utf-8"?>
-<p:tagLst xmlns:a="http://schemas.openxmlformats.org/drawingml/2006/main" xmlns:r="http://schemas.openxmlformats.org/officeDocument/2006/relationships" xmlns:p="http://schemas.openxmlformats.org/presentationml/2006/main">
-  <p:tag name="AS_UNIQUEID" val="12333"/>
+<p:tagLst xmlns:p="http://schemas.openxmlformats.org/presentationml/2006/main">
+  <p:tag name="AS_UNIQUEID" val="12334"/>
   <p:tag name="KSO_WM_BEAUTIFY_FLAG" val=""/>
 </p:tagLst>
 </file>
 
 <file path=ppt/tags/tag61.xml><?xml version="1.0" encoding="utf-8"?>
-<p:tagLst xmlns:a="http://schemas.openxmlformats.org/drawingml/2006/main" xmlns:r="http://schemas.openxmlformats.org/officeDocument/2006/relationships" xmlns:p="http://schemas.openxmlformats.org/presentationml/2006/main">
-  <p:tag name="AS_UNIQUEID" val="12334"/>
+<p:tagLst xmlns:p="http://schemas.openxmlformats.org/presentationml/2006/main">
+  <p:tag name="AS_UNIQUEID" val="19125"/>
   <p:tag name="KSO_WM_BEAUTIFY_FLAG" val=""/>
 </p:tagLst>
 </file>
 
 <file path=ppt/tags/tag62.xml><?xml version="1.0" encoding="utf-8"?>
-<p:tagLst xmlns:a="http://schemas.openxmlformats.org/drawingml/2006/main" xmlns:r="http://schemas.openxmlformats.org/officeDocument/2006/relationships" xmlns:p="http://schemas.openxmlformats.org/presentationml/2006/main">
-  <p:tag name="AS_UNIQUEID" val="19125"/>
+<p:tagLst xmlns:p="http://schemas.openxmlformats.org/presentationml/2006/main">
+  <p:tag name="AS_UNIQUEID" val="5579"/>
   <p:tag name="KSO_WM_BEAUTIFY_FLAG" val=""/>
 </p:tagLst>
 </file>
 
 <file path=ppt/tags/tag63.xml><?xml version="1.0" encoding="utf-8"?>
-<p:tagLst xmlns:a="http://schemas.openxmlformats.org/drawingml/2006/main" xmlns:r="http://schemas.openxmlformats.org/officeDocument/2006/relationships" xmlns:p="http://schemas.openxmlformats.org/presentationml/2006/main">
-  <p:tag name="AS_UNIQUEID" val="5579"/>
+<p:tagLst xmlns:p="http://schemas.openxmlformats.org/presentationml/2006/main">
+  <p:tag name="AS_UNIQUEID" val="5580"/>
   <p:tag name="KSO_WM_BEAUTIFY_FLAG" val=""/>
 </p:tagLst>
 </file>
 
 <file path=ppt/tags/tag64.xml><?xml version="1.0" encoding="utf-8"?>
-<p:tagLst xmlns:a="http://schemas.openxmlformats.org/drawingml/2006/main" xmlns:r="http://schemas.openxmlformats.org/officeDocument/2006/relationships" xmlns:p="http://schemas.openxmlformats.org/presentationml/2006/main">
-  <p:tag name="AS_UNIQUEID" val="5580"/>
-  <p:tag name="KSO_WM_BEAUTIFY_FLAG" val=""/>
+<p:tagLst xmlns:p="http://schemas.openxmlformats.org/presentationml/2006/main">
+  <p:tag name="AS_UNIQUEID" val="877"/>
 </p:tagLst>
 </file>
 
 <file path=ppt/tags/tag65.xml><?xml version="1.0" encoding="utf-8"?>
-<p:tagLst xmlns:a="http://schemas.openxmlformats.org/drawingml/2006/main" xmlns:r="http://schemas.openxmlformats.org/officeDocument/2006/relationships" xmlns:p="http://schemas.openxmlformats.org/presentationml/2006/main">
-  <p:tag name="AS_UNIQUEID" val="877"/>
-</p:tagLst>
-</file>
-
-<file path=ppt/tags/tag66.xml><?xml version="1.0" encoding="utf-8"?>
-<p:tagLst xmlns:a="http://schemas.openxmlformats.org/drawingml/2006/main" xmlns:r="http://schemas.openxmlformats.org/officeDocument/2006/relationships" xmlns:p="http://schemas.openxmlformats.org/presentationml/2006/main">
+<p:tagLst xmlns:p="http://schemas.openxmlformats.org/presentationml/2006/main">
   <p:tag name="AS_UNIQUEID" val="878"/>
   <p:tag name="KSO_WM_BEAUTIFY_FLAG" val=""/>
 </p:tagLst>
 </file>
 
-<file path=ppt/tags/tag67.xml><?xml version="1.0" encoding="utf-8"?>
-<p:tagLst xmlns:a="http://schemas.openxmlformats.org/drawingml/2006/main" xmlns:r="http://schemas.openxmlformats.org/officeDocument/2006/relationships" xmlns:p="http://schemas.openxmlformats.org/presentationml/2006/main">
+<file path=ppt/tags/tag66.xml><?xml version="1.0" encoding="utf-8"?>
+<p:tagLst xmlns:p="http://schemas.openxmlformats.org/presentationml/2006/main">
   <p:tag name="AS_UNIQUEID" val="879"/>
   <p:tag name="KSO_WM_BEAUTIFY_FLAG" val=""/>
 </p:tagLst>
 </file>
 
-<file path=ppt/tags/tag68.xml><?xml version="1.0" encoding="utf-8"?>
-<p:tagLst xmlns:a="http://schemas.openxmlformats.org/drawingml/2006/main" xmlns:r="http://schemas.openxmlformats.org/officeDocument/2006/relationships" xmlns:p="http://schemas.openxmlformats.org/presentationml/2006/main">
+<file path=ppt/tags/tag67.xml><?xml version="1.0" encoding="utf-8"?>
+<p:tagLst xmlns:p="http://schemas.openxmlformats.org/presentationml/2006/main">
   <p:tag name="AS_UNIQUEID" val="14207"/>
 </p:tagLst>
 </file>
 
-<file path=ppt/tags/tag69.xml><?xml version="1.0" encoding="utf-8"?>
-<p:tagLst xmlns:a="http://schemas.openxmlformats.org/drawingml/2006/main" xmlns:r="http://schemas.openxmlformats.org/officeDocument/2006/relationships" xmlns:p="http://schemas.openxmlformats.org/presentationml/2006/main">
+<file path=ppt/tags/tag68.xml><?xml version="1.0" encoding="utf-8"?>
+<p:tagLst xmlns:p="http://schemas.openxmlformats.org/presentationml/2006/main">
   <p:tag name="AS_UNIQUEID" val="14208"/>
 </p:tagLst>
 </file>
 
+<file path=ppt/tags/tag69.xml><?xml version="1.0" encoding="utf-8"?>
+<p:tagLst xmlns:p="http://schemas.openxmlformats.org/presentationml/2006/main">
+  <p:tag name="AS_UNIQUEID" val="3216"/>
+  <p:tag name="KSO_WM_BEAUTIFY_FLAG" val=""/>
+</p:tagLst>
+</file>
+
 <file path=ppt/tags/tag7.xml><?xml version="1.0" encoding="utf-8"?>
-<p:tagLst xmlns:a="http://schemas.openxmlformats.org/drawingml/2006/main" xmlns:r="http://schemas.openxmlformats.org/officeDocument/2006/relationships" xmlns:p="http://schemas.openxmlformats.org/presentationml/2006/main">
+<p:tagLst xmlns:p="http://schemas.openxmlformats.org/presentationml/2006/main">
   <p:tag name="KSO_WM_BEAUTIFY_FLAG" val=""/>
 </p:tagLst>
 </file>
 
 <file path=ppt/tags/tag70.xml><?xml version="1.0" encoding="utf-8"?>
-<p:tagLst xmlns:a="http://schemas.openxmlformats.org/drawingml/2006/main" xmlns:r="http://schemas.openxmlformats.org/officeDocument/2006/relationships" xmlns:p="http://schemas.openxmlformats.org/presentationml/2006/main">
-  <p:tag name="AS_UNIQUEID" val="3216"/>
+<p:tagLst xmlns:p="http://schemas.openxmlformats.org/presentationml/2006/main">
+  <p:tag name="AS_UNIQUEID" val="3217"/>
   <p:tag name="KSO_WM_BEAUTIFY_FLAG" val=""/>
 </p:tagLst>
 </file>
 
 <file path=ppt/tags/tag71.xml><?xml version="1.0" encoding="utf-8"?>
-<p:tagLst xmlns:a="http://schemas.openxmlformats.org/drawingml/2006/main" xmlns:r="http://schemas.openxmlformats.org/officeDocument/2006/relationships" xmlns:p="http://schemas.openxmlformats.org/presentationml/2006/main">
-  <p:tag name="AS_UNIQUEID" val="3217"/>
+<p:tagLst xmlns:p="http://schemas.openxmlformats.org/presentationml/2006/main">
+  <p:tag name="AS_UNIQUEID" val="3218"/>
   <p:tag name="KSO_WM_BEAUTIFY_FLAG" val=""/>
 </p:tagLst>
 </file>
 
 <file path=ppt/tags/tag72.xml><?xml version="1.0" encoding="utf-8"?>
-<p:tagLst xmlns:a="http://schemas.openxmlformats.org/drawingml/2006/main" xmlns:r="http://schemas.openxmlformats.org/officeDocument/2006/relationships" xmlns:p="http://schemas.openxmlformats.org/presentationml/2006/main">
-  <p:tag name="AS_UNIQUEID" val="3218"/>
+<p:tagLst xmlns:p="http://schemas.openxmlformats.org/presentationml/2006/main">
+  <p:tag name="AS_UNIQUEID" val="3220"/>
   <p:tag name="KSO_WM_BEAUTIFY_FLAG" val=""/>
 </p:tagLst>
 </file>
 
 <file path=ppt/tags/tag73.xml><?xml version="1.0" encoding="utf-8"?>
-<p:tagLst xmlns:a="http://schemas.openxmlformats.org/drawingml/2006/main" xmlns:r="http://schemas.openxmlformats.org/officeDocument/2006/relationships" xmlns:p="http://schemas.openxmlformats.org/presentationml/2006/main">
-  <p:tag name="AS_UNIQUEID" val="3220"/>
-  <p:tag name="KSO_WM_BEAUTIFY_FLAG" val=""/>
-</p:tagLst>
-</file>
-
-<file path=ppt/tags/tag74.xml><?xml version="1.0" encoding="utf-8"?>
-<p:tagLst xmlns:a="http://schemas.openxmlformats.org/drawingml/2006/main" xmlns:r="http://schemas.openxmlformats.org/officeDocument/2006/relationships" xmlns:p="http://schemas.openxmlformats.org/presentationml/2006/main">
+<p:tagLst xmlns:p="http://schemas.openxmlformats.org/presentationml/2006/main">
   <p:tag name="AS_UNIQUEID" val="15518"/>
   <p:tag name="KSO_WM_BEAUTIFY_FLAG" val=""/>
   <p:tag name="KSO_WM_TAG_VERSION" val="1.0"/>
@@ -20287,175 +15706,183 @@
 </p:tagLst>
 </file>
 
-<file path=ppt/tags/tag75.xml><?xml version="1.0" encoding="utf-8"?>
-<p:tagLst xmlns:a="http://schemas.openxmlformats.org/drawingml/2006/main" xmlns:r="http://schemas.openxmlformats.org/officeDocument/2006/relationships" xmlns:p="http://schemas.openxmlformats.org/presentationml/2006/main">
+<file path=ppt/tags/tag74.xml><?xml version="1.0" encoding="utf-8"?>
+<p:tagLst xmlns:p="http://schemas.openxmlformats.org/presentationml/2006/main">
   <p:tag name="AS_UNIQUEID" val="23065"/>
   <p:tag name="KSO_WM_BEAUTIFY_FLAG" val=""/>
 </p:tagLst>
 </file>
 
-<file path=ppt/tags/tag76.xml><?xml version="1.0" encoding="utf-8"?>
-<p:tagLst xmlns:a="http://schemas.openxmlformats.org/drawingml/2006/main" xmlns:r="http://schemas.openxmlformats.org/officeDocument/2006/relationships" xmlns:p="http://schemas.openxmlformats.org/presentationml/2006/main">
+<file path=ppt/tags/tag75.xml><?xml version="1.0" encoding="utf-8"?>
+<p:tagLst xmlns:p="http://schemas.openxmlformats.org/presentationml/2006/main">
   <p:tag name="AS_UNIQUEID" val="19091"/>
   <p:tag name="KSO_WM_BEAUTIFY_FLAG" val=""/>
 </p:tagLst>
 </file>
 
-<file path=ppt/tags/tag77.xml><?xml version="1.0" encoding="utf-8"?>
-<p:tagLst xmlns:a="http://schemas.openxmlformats.org/drawingml/2006/main" xmlns:r="http://schemas.openxmlformats.org/officeDocument/2006/relationships" xmlns:p="http://schemas.openxmlformats.org/presentationml/2006/main">
+<file path=ppt/tags/tag76.xml><?xml version="1.0" encoding="utf-8"?>
+<p:tagLst xmlns:p="http://schemas.openxmlformats.org/presentationml/2006/main">
   <p:tag name="AS_UNIQUEID" val="2264"/>
   <p:tag name="KSO_WM_BEAUTIFY_FLAG" val=""/>
 </p:tagLst>
 </file>
 
-<file path=ppt/tags/tag78.xml><?xml version="1.0" encoding="utf-8"?>
-<p:tagLst xmlns:a="http://schemas.openxmlformats.org/drawingml/2006/main" xmlns:r="http://schemas.openxmlformats.org/officeDocument/2006/relationships" xmlns:p="http://schemas.openxmlformats.org/presentationml/2006/main">
+<file path=ppt/tags/tag77.xml><?xml version="1.0" encoding="utf-8"?>
+<p:tagLst xmlns:p="http://schemas.openxmlformats.org/presentationml/2006/main">
   <p:tag name="AS_UNIQUEID" val="2263"/>
   <p:tag name="KSO_WM_BEAUTIFY_FLAG" val=""/>
 </p:tagLst>
 </file>
 
-<file path=ppt/tags/tag79.xml><?xml version="1.0" encoding="utf-8"?>
-<p:tagLst xmlns:a="http://schemas.openxmlformats.org/drawingml/2006/main" xmlns:r="http://schemas.openxmlformats.org/officeDocument/2006/relationships" xmlns:p="http://schemas.openxmlformats.org/presentationml/2006/main">
+<file path=ppt/tags/tag78.xml><?xml version="1.0" encoding="utf-8"?>
+<p:tagLst xmlns:p="http://schemas.openxmlformats.org/presentationml/2006/main">
   <p:tag name="AS_UNIQUEID" val="2265"/>
   <p:tag name="KSO_WM_BEAUTIFY_FLAG" val=""/>
 </p:tagLst>
 </file>
 
+<file path=ppt/tags/tag79.xml><?xml version="1.0" encoding="utf-8"?>
+<p:tagLst xmlns:p="http://schemas.openxmlformats.org/presentationml/2006/main">
+  <p:tag name="AS_UNIQUEID" val="2266"/>
+  <p:tag name="KSO_WM_BEAUTIFY_FLAG" val=""/>
+</p:tagLst>
+</file>
+
 <file path=ppt/tags/tag8.xml><?xml version="1.0" encoding="utf-8"?>
-<p:tagLst xmlns:a="http://schemas.openxmlformats.org/drawingml/2006/main" xmlns:r="http://schemas.openxmlformats.org/officeDocument/2006/relationships" xmlns:p="http://schemas.openxmlformats.org/presentationml/2006/main">
+<p:tagLst xmlns:p="http://schemas.openxmlformats.org/presentationml/2006/main">
   <p:tag name="KSO_WM_BEAUTIFY_FLAG" val=""/>
 </p:tagLst>
 </file>
 
 <file path=ppt/tags/tag80.xml><?xml version="1.0" encoding="utf-8"?>
-<p:tagLst xmlns:a="http://schemas.openxmlformats.org/drawingml/2006/main" xmlns:r="http://schemas.openxmlformats.org/officeDocument/2006/relationships" xmlns:p="http://schemas.openxmlformats.org/presentationml/2006/main">
-  <p:tag name="AS_UNIQUEID" val="2266"/>
+<p:tagLst xmlns:p="http://schemas.openxmlformats.org/presentationml/2006/main">
+  <p:tag name="AS_UNIQUEID" val="3125"/>
   <p:tag name="KSO_WM_BEAUTIFY_FLAG" val=""/>
 </p:tagLst>
 </file>
 
 <file path=ppt/tags/tag81.xml><?xml version="1.0" encoding="utf-8"?>
-<p:tagLst xmlns:a="http://schemas.openxmlformats.org/drawingml/2006/main" xmlns:r="http://schemas.openxmlformats.org/officeDocument/2006/relationships" xmlns:p="http://schemas.openxmlformats.org/presentationml/2006/main">
-  <p:tag name="AS_UNIQUEID" val="3125"/>
+<p:tagLst xmlns:p="http://schemas.openxmlformats.org/presentationml/2006/main">
+  <p:tag name="AS_UNIQUEID" val="5225"/>
   <p:tag name="KSO_WM_BEAUTIFY_FLAG" val=""/>
 </p:tagLst>
 </file>
 
 <file path=ppt/tags/tag82.xml><?xml version="1.0" encoding="utf-8"?>
-<p:tagLst xmlns:a="http://schemas.openxmlformats.org/drawingml/2006/main" xmlns:r="http://schemas.openxmlformats.org/officeDocument/2006/relationships" xmlns:p="http://schemas.openxmlformats.org/presentationml/2006/main">
-  <p:tag name="AS_UNIQUEID" val="5225"/>
+<p:tagLst xmlns:p="http://schemas.openxmlformats.org/presentationml/2006/main">
+  <p:tag name="AS_UNIQUEID" val="5227"/>
   <p:tag name="KSO_WM_BEAUTIFY_FLAG" val=""/>
 </p:tagLst>
 </file>
 
 <file path=ppt/tags/tag83.xml><?xml version="1.0" encoding="utf-8"?>
-<p:tagLst xmlns:a="http://schemas.openxmlformats.org/drawingml/2006/main" xmlns:r="http://schemas.openxmlformats.org/officeDocument/2006/relationships" xmlns:p="http://schemas.openxmlformats.org/presentationml/2006/main">
-  <p:tag name="AS_UNIQUEID" val="5227"/>
+<p:tagLst xmlns:p="http://schemas.openxmlformats.org/presentationml/2006/main">
+  <p:tag name="AS_UNIQUEID" val="23176"/>
   <p:tag name="KSO_WM_BEAUTIFY_FLAG" val=""/>
 </p:tagLst>
 </file>
 
 <file path=ppt/tags/tag84.xml><?xml version="1.0" encoding="utf-8"?>
-<p:tagLst xmlns:a="http://schemas.openxmlformats.org/drawingml/2006/main" xmlns:r="http://schemas.openxmlformats.org/officeDocument/2006/relationships" xmlns:p="http://schemas.openxmlformats.org/presentationml/2006/main">
-  <p:tag name="AS_UNIQUEID" val="23176"/>
+<p:tagLst xmlns:p="http://schemas.openxmlformats.org/presentationml/2006/main">
+  <p:tag name="AS_UNIQUEID" val="5007"/>
   <p:tag name="KSO_WM_BEAUTIFY_FLAG" val=""/>
 </p:tagLst>
 </file>
 
 <file path=ppt/tags/tag85.xml><?xml version="1.0" encoding="utf-8"?>
-<p:tagLst xmlns:a="http://schemas.openxmlformats.org/drawingml/2006/main" xmlns:r="http://schemas.openxmlformats.org/officeDocument/2006/relationships" xmlns:p="http://schemas.openxmlformats.org/presentationml/2006/main">
+<p:tagLst xmlns:p="http://schemas.openxmlformats.org/presentationml/2006/main">
+  <p:tag name="AS_UNIQUEID" val="22433"/>
+  <p:tag name="KSO_WM_BEAUTIFY_FLAG" val=""/>
+</p:tagLst>
+</file>
+
+<file path=ppt/tags/tag86.xml><?xml version="1.0" encoding="utf-8"?>
+<p:tagLst xmlns:p="http://schemas.openxmlformats.org/presentationml/2006/main">
+  <p:tag name="AS_UNIQUEID" val="7394"/>
+  <p:tag name="KSO_WM_BEAUTIFY_FLAG" val=""/>
+</p:tagLst>
+</file>
+
+<file path=ppt/tags/tag87.xml><?xml version="1.0" encoding="utf-8"?>
+<p:tagLst xmlns:p="http://schemas.openxmlformats.org/presentationml/2006/main">
   <p:tag name="AS_UNIQUEID" val="5007"/>
   <p:tag name="KSO_WM_BEAUTIFY_FLAG" val=""/>
 </p:tagLst>
 </file>
 
-<file path=ppt/tags/tag86.xml><?xml version="1.0" encoding="utf-8"?>
-<p:tagLst xmlns:a="http://schemas.openxmlformats.org/drawingml/2006/main" xmlns:r="http://schemas.openxmlformats.org/officeDocument/2006/relationships" xmlns:p="http://schemas.openxmlformats.org/presentationml/2006/main">
-  <p:tag name="AS_UNIQUEID" val="22433"/>
-  <p:tag name="KSO_WM_BEAUTIFY_FLAG" val=""/>
-</p:tagLst>
-</file>
-
-<file path=ppt/tags/tag87.xml><?xml version="1.0" encoding="utf-8"?>
-<p:tagLst xmlns:a="http://schemas.openxmlformats.org/drawingml/2006/main" xmlns:r="http://schemas.openxmlformats.org/officeDocument/2006/relationships" xmlns:p="http://schemas.openxmlformats.org/presentationml/2006/main">
-  <p:tag name="AS_UNIQUEID" val="7394"/>
-  <p:tag name="KSO_WM_BEAUTIFY_FLAG" val=""/>
-</p:tagLst>
-</file>
-
 <file path=ppt/tags/tag88.xml><?xml version="1.0" encoding="utf-8"?>
-<p:tagLst xmlns:a="http://schemas.openxmlformats.org/drawingml/2006/main" xmlns:r="http://schemas.openxmlformats.org/officeDocument/2006/relationships" xmlns:p="http://schemas.openxmlformats.org/presentationml/2006/main">
-  <p:tag name="AS_UNIQUEID" val="5007"/>
+<p:tagLst xmlns:p="http://schemas.openxmlformats.org/presentationml/2006/main">
+  <p:tag name="AS_UNIQUEID" val="192"/>
   <p:tag name="KSO_WM_BEAUTIFY_FLAG" val=""/>
 </p:tagLst>
 </file>
 
 <file path=ppt/tags/tag89.xml><?xml version="1.0" encoding="utf-8"?>
-<p:tagLst xmlns:a="http://schemas.openxmlformats.org/drawingml/2006/main" xmlns:r="http://schemas.openxmlformats.org/officeDocument/2006/relationships" xmlns:p="http://schemas.openxmlformats.org/presentationml/2006/main">
-  <p:tag name="AS_UNIQUEID" val="192"/>
-  <p:tag name="KSO_WM_BEAUTIFY_FLAG" val=""/>
+<p:tagLst xmlns:p="http://schemas.openxmlformats.org/presentationml/2006/main">
+  <p:tag name="AS_UNIQUEID" val="7410"/>
 </p:tagLst>
 </file>
 
 <file path=ppt/tags/tag9.xml><?xml version="1.0" encoding="utf-8"?>
-<p:tagLst xmlns:a="http://schemas.openxmlformats.org/drawingml/2006/main" xmlns:r="http://schemas.openxmlformats.org/officeDocument/2006/relationships" xmlns:p="http://schemas.openxmlformats.org/presentationml/2006/main">
+<p:tagLst xmlns:p="http://schemas.openxmlformats.org/presentationml/2006/main">
   <p:tag name="KSO_WM_BEAUTIFY_FLAG" val=""/>
 </p:tagLst>
 </file>
 
 <file path=ppt/tags/tag90.xml><?xml version="1.0" encoding="utf-8"?>
-<p:tagLst xmlns:a="http://schemas.openxmlformats.org/drawingml/2006/main" xmlns:r="http://schemas.openxmlformats.org/officeDocument/2006/relationships" xmlns:p="http://schemas.openxmlformats.org/presentationml/2006/main">
-  <p:tag name="AS_UNIQUEID" val="7410"/>
+<p:tagLst xmlns:p="http://schemas.openxmlformats.org/presentationml/2006/main">
+  <p:tag name="AS_UNIQUEID" val="188"/>
+  <p:tag name="KSO_WM_BEAUTIFY_FLAG" val=""/>
 </p:tagLst>
 </file>
 
 <file path=ppt/tags/tag91.xml><?xml version="1.0" encoding="utf-8"?>
-<p:tagLst xmlns:a="http://schemas.openxmlformats.org/drawingml/2006/main" xmlns:r="http://schemas.openxmlformats.org/officeDocument/2006/relationships" xmlns:p="http://schemas.openxmlformats.org/presentationml/2006/main">
+<p:tagLst xmlns:p="http://schemas.openxmlformats.org/presentationml/2006/main">
+  <p:tag name="AS_UNIQUEID" val="189"/>
+  <p:tag name="KSO_WM_BEAUTIFY_FLAG" val=""/>
+</p:tagLst>
+</file>
+
+<file path=ppt/tags/tag92.xml><?xml version="1.0" encoding="utf-8"?>
+<p:tagLst xmlns:p="http://schemas.openxmlformats.org/presentationml/2006/main">
+  <p:tag name="AS_UNIQUEID" val="191"/>
+  <p:tag name="KSO_WM_BEAUTIFY_FLAG" val=""/>
+</p:tagLst>
+</file>
+
+<file path=ppt/tags/tag93.xml><?xml version="1.0" encoding="utf-8"?>
+<p:tagLst xmlns:p="http://schemas.openxmlformats.org/presentationml/2006/main">
+  <p:tag name="AS_UNIQUEID" val="194"/>
+  <p:tag name="KSO_WM_BEAUTIFY_FLAG" val=""/>
+</p:tagLst>
+</file>
+
+<file path=ppt/tags/tag94.xml><?xml version="1.0" encoding="utf-8"?>
+<p:tagLst xmlns:p="http://schemas.openxmlformats.org/presentationml/2006/main">
   <p:tag name="AS_UNIQUEID" val="195"/>
   <p:tag name="KSO_WM_BEAUTIFY_FLAG" val=""/>
 </p:tagLst>
 </file>
 
-<file path=ppt/tags/tag92.xml><?xml version="1.0" encoding="utf-8"?>
-<p:tagLst xmlns:a="http://schemas.openxmlformats.org/drawingml/2006/main" xmlns:r="http://schemas.openxmlformats.org/officeDocument/2006/relationships" xmlns:p="http://schemas.openxmlformats.org/presentationml/2006/main">
+<file path=ppt/tags/tag95.xml><?xml version="1.0" encoding="utf-8"?>
+<p:tagLst xmlns:p="http://schemas.openxmlformats.org/presentationml/2006/main">
   <p:tag name="AS_UNIQUEID" val="7413"/>
   <p:tag name="KSO_WM_BEAUTIFY_FLAG" val=""/>
 </p:tagLst>
 </file>
 
-<file path=ppt/tags/tag93.xml><?xml version="1.0" encoding="utf-8"?>
-<p:tagLst xmlns:a="http://schemas.openxmlformats.org/drawingml/2006/main" xmlns:r="http://schemas.openxmlformats.org/officeDocument/2006/relationships" xmlns:p="http://schemas.openxmlformats.org/presentationml/2006/main">
+<file path=ppt/tags/tag96.xml><?xml version="1.0" encoding="utf-8"?>
+<p:tagLst xmlns:p="http://schemas.openxmlformats.org/presentationml/2006/main">
   <p:tag name="AS_UNIQUEID" val="7414"/>
   <p:tag name="KSO_WM_BEAUTIFY_FLAG" val=""/>
 </p:tagLst>
 </file>
 
-<file path=ppt/tags/tag94.xml><?xml version="1.0" encoding="utf-8"?>
-<p:tagLst xmlns:a="http://schemas.openxmlformats.org/drawingml/2006/main" xmlns:r="http://schemas.openxmlformats.org/officeDocument/2006/relationships" xmlns:p="http://schemas.openxmlformats.org/presentationml/2006/main">
-  <p:tag name="AS_UNIQUEID" val="188"/>
-  <p:tag name="KSO_WM_BEAUTIFY_FLAG" val=""/>
-</p:tagLst>
-</file>
-
-<file path=ppt/tags/tag95.xml><?xml version="1.0" encoding="utf-8"?>
-<p:tagLst xmlns:a="http://schemas.openxmlformats.org/drawingml/2006/main" xmlns:r="http://schemas.openxmlformats.org/officeDocument/2006/relationships" xmlns:p="http://schemas.openxmlformats.org/presentationml/2006/main">
-  <p:tag name="AS_UNIQUEID" val="189"/>
-  <p:tag name="KSO_WM_BEAUTIFY_FLAG" val=""/>
-</p:tagLst>
-</file>
-
-<file path=ppt/tags/tag96.xml><?xml version="1.0" encoding="utf-8"?>
-<p:tagLst xmlns:a="http://schemas.openxmlformats.org/drawingml/2006/main" xmlns:r="http://schemas.openxmlformats.org/officeDocument/2006/relationships" xmlns:p="http://schemas.openxmlformats.org/presentationml/2006/main">
-  <p:tag name="AS_UNIQUEID" val="191"/>
-  <p:tag name="KSO_WM_BEAUTIFY_FLAG" val=""/>
-</p:tagLst>
-</file>
-
 <file path=ppt/tags/tag97.xml><?xml version="1.0" encoding="utf-8"?>
-<p:tagLst xmlns:a="http://schemas.openxmlformats.org/drawingml/2006/main" xmlns:r="http://schemas.openxmlformats.org/officeDocument/2006/relationships" xmlns:p="http://schemas.openxmlformats.org/presentationml/2006/main">
-  <p:tag name="AS_UNIQUEID" val="194"/>
-  <p:tag name="KSO_WM_BEAUTIFY_FLAG" val=""/>
+<p:tagLst xmlns:p="http://schemas.openxmlformats.org/presentationml/2006/main">
+  <p:tag name="KSO_WPP_MARK_KEY" val="03cb5ca4-3200-47ea-8909-9a8b1196cda9"/>
+  <p:tag name="COMMONDATA" val="eyJoZGlkIjoiNzY0YmM2NDNlODZiMzkwNDZkNDY0OTExYmY4ODNlODMifQ=="/>
+  <p:tag name="commondata" val="eyJoZGlkIjoiMDc0YmVkNzIyYTUyMGViMjlkZjRjOWNkOGFjNWZiMmUifQ=="/>
 </p:tagLst>
 </file>
 
@@ -20778,10 +16205,9 @@
       </a:style>
     </a:spDef>
   </a:objectDefaults>
-  <a:extraClrSchemeLst/>
   <a:extLst>
     <a:ext uri="{05A4C25C-085E-4340-85A3-A5531E510DB2}">
-      <thm15:themeFamily xmlns:thm15="http://schemas.microsoft.com/office/thememl/2012/main" xmlns="" name="Office Theme" id="{62F939B6-93AF-4DB8-9C6B-D6C7DFDC589F}" vid="{4A3C46E8-61CC-4603-A589-7422A47A8E4A}"/>
+      <thm15:themeFamily xmlns:thm15="http://schemas.microsoft.com/office/thememl/2012/main" name="Office Theme" id="{62F939B6-93AF-4DB8-9C6B-D6C7DFDC589F}" vid="{4A3C46E8-61CC-4603-A589-7422A47A8E4A}"/>
     </a:ext>
   </a:extLst>
 </a:theme>
@@ -21067,11 +16493,9 @@
       </a:bgFillStyleLst>
     </a:fmtScheme>
   </a:themeElements>
-  <a:objectDefaults/>
-  <a:extraClrSchemeLst/>
   <a:extLst>
     <a:ext uri="{05A4C25C-085E-4340-85A3-A5531E510DB2}">
-      <thm15:themeFamily xmlns:thm15="http://schemas.microsoft.com/office/thememl/2012/main" xmlns="" name="Office Theme" id="{62F939B6-93AF-4DB8-9C6B-D6C7DFDC589F}" vid="{4A3C46E8-61CC-4603-A589-7422A47A8E4A}"/>
+      <thm15:themeFamily xmlns:thm15="http://schemas.microsoft.com/office/thememl/2012/main" name="Office Theme" id="{62F939B6-93AF-4DB8-9C6B-D6C7DFDC589F}" vid="{4A3C46E8-61CC-4603-A589-7422A47A8E4A}"/>
     </a:ext>
   </a:extLst>
 </a:theme>
@@ -21355,8 +16779,11 @@
       </a:bgFillStyleLst>
     </a:fmtScheme>
   </a:themeElements>
-  <a:objectDefaults/>
-  <a:extraClrSchemeLst/>
+  <a:extLst>
+    <a:ext uri="{05A4C25C-085E-4340-85A3-A5531E510DB2}">
+      <thm15:themeFamily xmlns:thm15="http://schemas.microsoft.com/office/thememl/2012/main" name="Office Theme" id="{62F939B6-93AF-4DB8-9C6B-D6C7DFDC589F}" vid="{4A3C46E8-61CC-4603-A589-7422A47A8E4A}"/>
+    </a:ext>
+  </a:extLst>
 </a:theme>
 </file>
 
@@ -21638,299 +17065,9 @@
       </a:bgFillStyleLst>
     </a:fmtScheme>
   </a:themeElements>
-  <a:objectDefaults/>
-  <a:extraClrSchemeLst/>
   <a:extLst>
     <a:ext uri="{05A4C25C-085E-4340-85A3-A5531E510DB2}">
-      <thm15:themeFamily xmlns:thm15="http://schemas.microsoft.com/office/thememl/2012/main" xmlns="" name="Office Theme" id="{62F939B6-93AF-4DB8-9C6B-D6C7DFDC589F}" vid="{4A3C46E8-61CC-4603-A589-7422A47A8E4A}"/>
-    </a:ext>
-  </a:extLst>
-</a:theme>
-</file>
-
-<file path=ppt/theme/theme5.xml><?xml version="1.0" encoding="utf-8"?>
-<a:theme xmlns:a="http://schemas.openxmlformats.org/drawingml/2006/main" name="Office 主题">
-  <a:themeElements>
-    <a:clrScheme name="Office">
-      <a:dk1>
-        <a:sysClr val="windowText" lastClr="000000"/>
-      </a:dk1>
-      <a:lt1>
-        <a:sysClr val="window" lastClr="FFFFFF"/>
-      </a:lt1>
-      <a:dk2>
-        <a:srgbClr val="1F497D"/>
-      </a:dk2>
-      <a:lt2>
-        <a:srgbClr val="EEECE1"/>
-      </a:lt2>
-      <a:accent1>
-        <a:srgbClr val="4F81BD"/>
-      </a:accent1>
-      <a:accent2>
-        <a:srgbClr val="C0504D"/>
-      </a:accent2>
-      <a:accent3>
-        <a:srgbClr val="9BBB59"/>
-      </a:accent3>
-      <a:accent4>
-        <a:srgbClr val="8064A2"/>
-      </a:accent4>
-      <a:accent5>
-        <a:srgbClr val="4BACC6"/>
-      </a:accent5>
-      <a:accent6>
-        <a:srgbClr val="F79646"/>
-      </a:accent6>
-      <a:hlink>
-        <a:srgbClr val="0000FF"/>
-      </a:hlink>
-      <a:folHlink>
-        <a:srgbClr val="800080"/>
-      </a:folHlink>
-    </a:clrScheme>
-    <a:fontScheme name="Office">
-      <a:majorFont>
-        <a:latin typeface="Calibri"/>
-        <a:ea typeface=""/>
-        <a:cs typeface=""/>
-        <a:font script="Jpan" typeface="ＭＳ Ｐゴシック"/>
-        <a:font script="Hang" typeface="맑은 고딕"/>
-        <a:font script="Hans" typeface="宋体"/>
-        <a:font script="Hant" typeface="新細明體"/>
-        <a:font script="Arab" typeface="Times New Roman"/>
-        <a:font script="Hebr" typeface="Times New Roman"/>
-        <a:font script="Thai" typeface="Angsana New"/>
-        <a:font script="Ethi" typeface="Nyala"/>
-        <a:font script="Beng" typeface="Vrinda"/>
-        <a:font script="Gujr" typeface="Shruti"/>
-        <a:font script="Khmr" typeface="MoolBoran"/>
-        <a:font script="Knda" typeface="Tunga"/>
-        <a:font script="Guru" typeface="Raavi"/>
-        <a:font script="Cans" typeface="Euphemia"/>
-        <a:font script="Cher" typeface="Plantagenet Cherokee"/>
-        <a:font script="Yiii" typeface="Microsoft Yi Baiti"/>
-        <a:font script="Tibt" typeface="Microsoft Himalaya"/>
-        <a:font script="Thaa" typeface="MV Boli"/>
-        <a:font script="Deva" typeface="Mangal"/>
-        <a:font script="Telu" typeface="Gautami"/>
-        <a:font script="Taml" typeface="Latha"/>
-        <a:font script="Syrc" typeface="Estrangelo Edessa"/>
-        <a:font script="Orya" typeface="Kalinga"/>
-        <a:font script="Mlym" typeface="Kartika"/>
-        <a:font script="Laoo" typeface="DokChampa"/>
-        <a:font script="Sinh" typeface="Iskoola Pota"/>
-        <a:font script="Mong" typeface="Mongolian Baiti"/>
-        <a:font script="Viet" typeface="Times New Roman"/>
-        <a:font script="Uigh" typeface="Microsoft Uighur"/>
-      </a:majorFont>
-      <a:minorFont>
-        <a:latin typeface="Calibri"/>
-        <a:ea typeface=""/>
-        <a:cs typeface=""/>
-        <a:font script="Jpan" typeface="ＭＳ Ｐゴシック"/>
-        <a:font script="Hang" typeface="맑은 고딕"/>
-        <a:font script="Hans" typeface="宋体"/>
-        <a:font script="Hant" typeface="新細明體"/>
-        <a:font script="Arab" typeface="Arial"/>
-        <a:font script="Hebr" typeface="Arial"/>
-        <a:font script="Thai" typeface="Cordia New"/>
-        <a:font script="Ethi" typeface="Nyala"/>
-        <a:font script="Beng" typeface="Vrinda"/>
-        <a:font script="Gujr" typeface="Shruti"/>
-        <a:font script="Khmr" typeface="DaunPenh"/>
-        <a:font script="Knda" typeface="Tunga"/>
-        <a:font script="Guru" typeface="Raavi"/>
-        <a:font script="Cans" typeface="Euphemia"/>
-        <a:font script="Cher" typeface="Plantagenet Cherokee"/>
-        <a:font script="Yiii" typeface="Microsoft Yi Baiti"/>
-        <a:font script="Tibt" typeface="Microsoft Himalaya"/>
-        <a:font script="Thaa" typeface="MV Boli"/>
-        <a:font script="Deva" typeface="Mangal"/>
-        <a:font script="Telu" typeface="Gautami"/>
-        <a:font script="Taml" typeface="Latha"/>
-        <a:font script="Syrc" typeface="Estrangelo Edessa"/>
-        <a:font script="Orya" typeface="Kalinga"/>
-        <a:font script="Mlym" typeface="Kartika"/>
-        <a:font script="Laoo" typeface="DokChampa"/>
-        <a:font script="Sinh" typeface="Iskoola Pota"/>
-        <a:font script="Mong" typeface="Mongolian Baiti"/>
-        <a:font script="Viet" typeface="Arial"/>
-        <a:font script="Uigh" typeface="Microsoft Uighur"/>
-      </a:minorFont>
-    </a:fontScheme>
-    <a:fmtScheme name="Office">
-      <a:fillStyleLst>
-        <a:solidFill>
-          <a:schemeClr val="phClr"/>
-        </a:solidFill>
-        <a:gradFill rotWithShape="1">
-          <a:gsLst>
-            <a:gs pos="0">
-              <a:schemeClr val="phClr">
-                <a:tint val="50000"/>
-                <a:satMod val="300000"/>
-              </a:schemeClr>
-            </a:gs>
-            <a:gs pos="35000">
-              <a:schemeClr val="phClr">
-                <a:tint val="37000"/>
-                <a:satMod val="300000"/>
-              </a:schemeClr>
-            </a:gs>
-            <a:gs pos="100000">
-              <a:schemeClr val="phClr">
-                <a:tint val="15000"/>
-                <a:satMod val="350000"/>
-              </a:schemeClr>
-            </a:gs>
-          </a:gsLst>
-          <a:lin ang="16200000" scaled="1"/>
-        </a:gradFill>
-        <a:gradFill rotWithShape="1">
-          <a:gsLst>
-            <a:gs pos="0">
-              <a:schemeClr val="phClr">
-                <a:shade val="51000"/>
-                <a:satMod val="130000"/>
-              </a:schemeClr>
-            </a:gs>
-            <a:gs pos="80000">
-              <a:schemeClr val="phClr">
-                <a:shade val="93000"/>
-                <a:satMod val="130000"/>
-              </a:schemeClr>
-            </a:gs>
-            <a:gs pos="100000">
-              <a:schemeClr val="phClr">
-                <a:shade val="94000"/>
-                <a:satMod val="135000"/>
-              </a:schemeClr>
-            </a:gs>
-          </a:gsLst>
-          <a:lin ang="16200000" scaled="0"/>
-        </a:gradFill>
-      </a:fillStyleLst>
-      <a:lnStyleLst>
-        <a:ln w="9525" cap="flat" cmpd="sng" algn="ctr">
-          <a:solidFill>
-            <a:schemeClr val="phClr">
-              <a:shade val="95000"/>
-              <a:satMod val="105000"/>
-            </a:schemeClr>
-          </a:solidFill>
-          <a:prstDash val="solid"/>
-        </a:ln>
-        <a:ln w="25400" cap="flat" cmpd="sng" algn="ctr">
-          <a:solidFill>
-            <a:schemeClr val="phClr"/>
-          </a:solidFill>
-          <a:prstDash val="solid"/>
-        </a:ln>
-        <a:ln w="38100" cap="flat" cmpd="sng" algn="ctr">
-          <a:solidFill>
-            <a:schemeClr val="phClr"/>
-          </a:solidFill>
-          <a:prstDash val="solid"/>
-        </a:ln>
-      </a:lnStyleLst>
-      <a:effectStyleLst>
-        <a:effectStyle>
-          <a:effectLst>
-            <a:outerShdw blurRad="40000" dist="20000" dir="5400000" rotWithShape="0">
-              <a:srgbClr val="000000">
-                <a:alpha val="38000"/>
-              </a:srgbClr>
-            </a:outerShdw>
-          </a:effectLst>
-        </a:effectStyle>
-        <a:effectStyle>
-          <a:effectLst>
-            <a:outerShdw blurRad="40000" dist="23000" dir="5400000" rotWithShape="0">
-              <a:srgbClr val="000000">
-                <a:alpha val="35000"/>
-              </a:srgbClr>
-            </a:outerShdw>
-          </a:effectLst>
-        </a:effectStyle>
-        <a:effectStyle>
-          <a:effectLst>
-            <a:outerShdw blurRad="40000" dist="23000" dir="5400000" rotWithShape="0">
-              <a:srgbClr val="000000">
-                <a:alpha val="35000"/>
-              </a:srgbClr>
-            </a:outerShdw>
-          </a:effectLst>
-          <a:scene3d>
-            <a:camera prst="orthographicFront">
-              <a:rot lat="0" lon="0" rev="0"/>
-            </a:camera>
-            <a:lightRig rig="threePt" dir="t">
-              <a:rot lat="0" lon="0" rev="1200000"/>
-            </a:lightRig>
-          </a:scene3d>
-          <a:sp3d>
-            <a:bevelT w="63500" h="25400"/>
-          </a:sp3d>
-        </a:effectStyle>
-      </a:effectStyleLst>
-      <a:bgFillStyleLst>
-        <a:solidFill>
-          <a:schemeClr val="phClr"/>
-        </a:solidFill>
-        <a:gradFill rotWithShape="1">
-          <a:gsLst>
-            <a:gs pos="0">
-              <a:schemeClr val="phClr">
-                <a:tint val="40000"/>
-                <a:satMod val="350000"/>
-              </a:schemeClr>
-            </a:gs>
-            <a:gs pos="40000">
-              <a:schemeClr val="phClr">
-                <a:tint val="45000"/>
-                <a:shade val="99000"/>
-                <a:satMod val="350000"/>
-              </a:schemeClr>
-            </a:gs>
-            <a:gs pos="100000">
-              <a:schemeClr val="phClr">
-                <a:shade val="20000"/>
-                <a:satMod val="255000"/>
-              </a:schemeClr>
-            </a:gs>
-          </a:gsLst>
-          <a:path path="circle">
-            <a:fillToRect l="50000" t="-80000" r="50000" b="180000"/>
-          </a:path>
-        </a:gradFill>
-        <a:gradFill rotWithShape="1">
-          <a:gsLst>
-            <a:gs pos="0">
-              <a:schemeClr val="phClr">
-                <a:tint val="80000"/>
-                <a:satMod val="300000"/>
-              </a:schemeClr>
-            </a:gs>
-            <a:gs pos="100000">
-              <a:schemeClr val="phClr">
-                <a:shade val="30000"/>
-                <a:satMod val="200000"/>
-              </a:schemeClr>
-            </a:gs>
-          </a:gsLst>
-          <a:path path="circle">
-            <a:fillToRect l="50000" t="50000" r="50000" b="50000"/>
-          </a:path>
-        </a:gradFill>
-      </a:bgFillStyleLst>
-    </a:fmtScheme>
-  </a:themeElements>
-  <a:objectDefaults/>
-  <a:extraClrSchemeLst/>
-  <a:extLst>
-    <a:ext uri="{05A4C25C-085E-4340-85A3-A5531E510DB2}">
-      <thm15:themeFamily xmlns:thm15="http://schemas.microsoft.com/office/thememl/2012/main" xmlns="" name="Office Theme" id="{62F939B6-93AF-4DB8-9C6B-D6C7DFDC589F}" vid="{4A3C46E8-61CC-4603-A589-7422A47A8E4A}"/>
+      <thm15:themeFamily xmlns:thm15="http://schemas.microsoft.com/office/thememl/2012/main" name="Office Theme" id="{62F939B6-93AF-4DB8-9C6B-D6C7DFDC589F}" vid="{4A3C46E8-61CC-4603-A589-7422A47A8E4A}"/>
     </a:ext>
   </a:extLst>
 </a:theme>
